--- a/docs/ppt_build/智岗图谱_作品介绍.pptx
+++ b/docs/ppt_build/智岗图谱_作品介绍.pptx
@@ -5948,7 +5948,7 @@
                 <a:ea typeface="Microsoft YaHei" pitchFamily="34" charset="-122"/>
                 <a:cs typeface="Microsoft YaHei" pitchFamily="34" charset="-120"/>
               </a:rPr>
-              <a:t>岗位整体置信度 = 粗粒度 active 能力项的权重加权平均；全库岗位均值 0.535 —— 真实数据下的诚实数字（1021 项低置信 candidate 被过滤，不进正式图谱）</a:t>
+              <a:t>岗位整体置信度 = 粗粒度 active 能力项的权重加权平均；全库岗位均值 0.6167 —— 真实数据下的诚实数字（1885 项单来源细粒度技能点降级为 candidate，保留可查但不进图谱主视图）</a:t>
             </a:r>
             <a:endParaRPr lang="en-US" sz="1200" dirty="0"/>
           </a:p>
@@ -6204,7 +6204,7 @@
                 <a:ea typeface="Microsoft YaHei" pitchFamily="34" charset="-122"/>
                 <a:cs typeface="Microsoft YaHei" pitchFamily="34" charset="-120"/>
               </a:rPr>
-              <a:t>双轨数据集（对抗基准 379 条 + 真实语料 806 条）· 三项核心指标全部超过 90%</a:t>
+              <a:t>双轨数据集（对抗基准 379 条 + 真实语料 2523 条）· 三项核心指标全部超过 90%</a:t>
             </a:r>
             <a:endParaRPr lang="en-US" sz="1250" dirty="0"/>
           </a:p>
@@ -6316,7 +6316,7 @@
                 <a:ea typeface="Microsoft YaHei" pitchFamily="34" charset="-122"/>
                 <a:cs typeface="Microsoft YaHei" pitchFamily="34" charset="-120"/>
               </a:rPr>
-              <a:t>98.25%</a:t>
+              <a:t>98.24%</a:t>
             </a:r>
             <a:endParaRPr lang="en-US" sz="4800" dirty="0"/>
           </a:p>
@@ -10513,7 +10513,7 @@
                 <a:ea typeface="Microsoft YaHei" pitchFamily="34" charset="-122"/>
                 <a:cs typeface="Microsoft YaHei" pitchFamily="34" charset="-120"/>
               </a:rPr>
-              <a:t>29</a:t>
+              <a:t>32</a:t>
             </a:r>
             <a:endParaRPr lang="en-US" sz="3200" dirty="0"/>
           </a:p>
@@ -10591,7 +10591,7 @@
                 <a:ea typeface="Microsoft YaHei" pitchFamily="34" charset="-122"/>
                 <a:cs typeface="Microsoft YaHei" pitchFamily="34" charset="-120"/>
               </a:rPr>
-              <a:t>2387</a:t>
+              <a:t>4570</a:t>
             </a:r>
             <a:endParaRPr lang="en-US" sz="3200" dirty="0"/>
           </a:p>
@@ -10630,7 +10630,7 @@
                 <a:ea typeface="Microsoft YaHei" pitchFamily="34" charset="-122"/>
                 <a:cs typeface="Microsoft YaHei" pitchFamily="34" charset="-120"/>
               </a:rPr>
-              <a:t>技能（含1961技能点）</a:t>
+              <a:t>技能（含4000技能点）</a:t>
             </a:r>
             <a:endParaRPr lang="en-US" sz="1300" dirty="0"/>
           </a:p>
@@ -10669,7 +10669,7 @@
                 <a:ea typeface="Microsoft YaHei" pitchFamily="34" charset="-122"/>
                 <a:cs typeface="Microsoft YaHei" pitchFamily="34" charset="-120"/>
               </a:rPr>
-              <a:t>806</a:t>
+              <a:t>2523</a:t>
             </a:r>
             <a:endParaRPr lang="en-US" sz="3200" dirty="0"/>
           </a:p>
@@ -10747,7 +10747,7 @@
                 <a:ea typeface="Microsoft YaHei" pitchFamily="34" charset="-122"/>
                 <a:cs typeface="Microsoft YaHei" pitchFamily="34" charset="-120"/>
               </a:rPr>
-              <a:t>3363</a:t>
+              <a:t>5386</a:t>
             </a:r>
             <a:endParaRPr lang="en-US" sz="3200" dirty="0"/>
           </a:p>
@@ -10825,7 +10825,7 @@
                 <a:ea typeface="Microsoft YaHei" pitchFamily="34" charset="-122"/>
                 <a:cs typeface="Microsoft YaHei" pitchFamily="34" charset="-120"/>
               </a:rPr>
-              <a:t>0.535</a:t>
+              <a:t>0.6167</a:t>
             </a:r>
             <a:endParaRPr lang="en-US" sz="3200" dirty="0"/>
           </a:p>
@@ -11165,7 +11165,7 @@
                 <a:ea typeface="Microsoft YaHei" pitchFamily="34" charset="-122"/>
                 <a:cs typeface="Microsoft YaHei" pitchFamily="34" charset="-120"/>
               </a:rPr>
-              <a:t>806 条真实 JD · 官网公开接口合法采集 · 全程台账可溯源</a:t>
+              <a:t>2523 条真实 JD · 官网公开接口合法采集 · 全程台账可溯源</a:t>
             </a:r>
             <a:endParaRPr lang="en-US" sz="1250" dirty="0"/>
           </a:p>
@@ -12008,7 +12008,7 @@
                 <a:ea typeface="Microsoft YaHei" pitchFamily="34" charset="-122"/>
                 <a:cs typeface="Microsoft YaHei" pitchFamily="34" charset="-120"/>
               </a:rPr>
-              <a:t>数据源台账在系统首页可视化：采集 806 → 查重 → 解析 → 交叉验证 → 入图谱，闭环每一环都有真实数字可查；合成数据集（379 条）重新定位为对抗测试夹具，不进生产图谱</a:t>
+              <a:t>数据源台账在系统首页可视化：采集 2523 → 查重 → 解析 → 交叉验证 → 入图谱，闭环每一环都有真实数字可查；合成数据集（379 条）重新定位为对抗测试夹具，不进生产图谱</a:t>
             </a:r>
             <a:endParaRPr lang="en-US" sz="1200" dirty="0"/>
           </a:p>
@@ -15394,7 +15394,7 @@
                 <a:ea typeface="Microsoft YaHei" pitchFamily="34" charset="-122"/>
                 <a:cs typeface="Microsoft YaHei" pitchFamily="34" charset="-120"/>
               </a:rPr>
-              <a:t>22 个岗位建有三档分级画像 · 14 个岗位完成 2018→2026 真实八年演化（100 条记录）</a:t>
+              <a:t>29 / 32 个岗位建有三档分级画像 · 621 条真实演化记录贯穿 2018→2024→2026 三个切片</a:t>
             </a:r>
             <a:endParaRPr lang="en-US" sz="1250" dirty="0"/>
           </a:p>

--- a/docs/ppt_build/智岗图谱_作品介绍.pptx
+++ b/docs/ppt_build/智岗图谱_作品介绍.pptx
@@ -5948,7 +5948,7 @@
                 <a:ea typeface="Microsoft YaHei" pitchFamily="34" charset="-122"/>
                 <a:cs typeface="Microsoft YaHei" pitchFamily="34" charset="-120"/>
               </a:rPr>
-              <a:t>岗位整体置信度 = 粗粒度 active 能力项的权重加权平均；全库岗位均值 0.6167 —— 真实数据下的诚实数字（1885 项单来源细粒度技能点降级为 candidate，保留可查但不进图谱主视图）</a:t>
+              <a:t>岗位整体置信度 = 粗粒度 active 能力项的权重加权平均；全库岗位均值 0.5513 —— 比上一版低，因为 6 个原本靠联网检索打分（最高 1.000）的新兴岗位已改由真实 JD 语料重建、纳入同一条交叉验证链，公式一个参数未改（3257 项单来源细粒度技能点降级为 candidate，保留可查但不进图谱主视图）</a:t>
             </a:r>
             <a:endParaRPr lang="en-US" sz="1200" dirty="0"/>
           </a:p>
@@ -6204,7 +6204,7 @@
                 <a:ea typeface="Microsoft YaHei" pitchFamily="34" charset="-122"/>
                 <a:cs typeface="Microsoft YaHei" pitchFamily="34" charset="-120"/>
               </a:rPr>
-              <a:t>双轨数据集（对抗基准 379 条 + 真实语料 2523 条）· 三项核心指标全部超过 90%</a:t>
+              <a:t>双轨数据集（对抗基准 379 条 + 真实语料 2570 条）· 三项核心指标全部超过 90%</a:t>
             </a:r>
             <a:endParaRPr lang="en-US" sz="1250" dirty="0"/>
           </a:p>
@@ -7110,7 +7110,7 @@
                 <a:ea typeface="Microsoft YaHei" pitchFamily="34" charset="-122"/>
                 <a:cs typeface="Microsoft YaHei" pitchFamily="34" charset="-120"/>
               </a:rPr>
-              <a:t>63%</a:t>
+              <a:t>71%</a:t>
             </a:r>
             <a:endParaRPr lang="en-US" sz="2600" dirty="0"/>
           </a:p>
@@ -7222,7 +7222,7 @@
                 <a:ea typeface="Microsoft YaHei" pitchFamily="34" charset="-122"/>
                 <a:cs typeface="Microsoft YaHei" pitchFamily="34" charset="-120"/>
               </a:rPr>
-              <a:t>72</a:t>
+              <a:t>109</a:t>
             </a:r>
             <a:endParaRPr lang="en-US" sz="2600" dirty="0"/>
           </a:p>
@@ -10591,7 +10591,7 @@
                 <a:ea typeface="Microsoft YaHei" pitchFamily="34" charset="-122"/>
                 <a:cs typeface="Microsoft YaHei" pitchFamily="34" charset="-120"/>
               </a:rPr>
-              <a:t>4570</a:t>
+              <a:t>3952</a:t>
             </a:r>
             <a:endParaRPr lang="en-US" sz="3200" dirty="0"/>
           </a:p>
@@ -10630,7 +10630,7 @@
                 <a:ea typeface="Microsoft YaHei" pitchFamily="34" charset="-122"/>
                 <a:cs typeface="Microsoft YaHei" pitchFamily="34" charset="-120"/>
               </a:rPr>
-              <a:t>技能（含4000技能点）</a:t>
+              <a:t>技能（含3816技能点）</a:t>
             </a:r>
             <a:endParaRPr lang="en-US" sz="1300" dirty="0"/>
           </a:p>
@@ -10669,7 +10669,7 @@
                 <a:ea typeface="Microsoft YaHei" pitchFamily="34" charset="-122"/>
                 <a:cs typeface="Microsoft YaHei" pitchFamily="34" charset="-120"/>
               </a:rPr>
-              <a:t>2523</a:t>
+              <a:t>2570</a:t>
             </a:r>
             <a:endParaRPr lang="en-US" sz="3200" dirty="0"/>
           </a:p>
@@ -10747,7 +10747,7 @@
                 <a:ea typeface="Microsoft YaHei" pitchFamily="34" charset="-122"/>
                 <a:cs typeface="Microsoft YaHei" pitchFamily="34" charset="-120"/>
               </a:rPr>
-              <a:t>5386</a:t>
+              <a:t>7861</a:t>
             </a:r>
             <a:endParaRPr lang="en-US" sz="3200" dirty="0"/>
           </a:p>
@@ -10825,7 +10825,7 @@
                 <a:ea typeface="Microsoft YaHei" pitchFamily="34" charset="-122"/>
                 <a:cs typeface="Microsoft YaHei" pitchFamily="34" charset="-120"/>
               </a:rPr>
-              <a:t>0.6167</a:t>
+              <a:t>0.5513</a:t>
             </a:r>
             <a:endParaRPr lang="en-US" sz="3200" dirty="0"/>
           </a:p>
@@ -11165,7 +11165,7 @@
                 <a:ea typeface="Microsoft YaHei" pitchFamily="34" charset="-122"/>
                 <a:cs typeface="Microsoft YaHei" pitchFamily="34" charset="-120"/>
               </a:rPr>
-              <a:t>2523 条真实 JD · 官网公开接口合法采集 · 全程台账可溯源</a:t>
+              <a:t>2570 条真实 JD · 官网公开接口合法采集 · 全程台账可溯源</a:t>
             </a:r>
             <a:endParaRPr lang="en-US" sz="1250" dirty="0"/>
           </a:p>
@@ -12008,7 +12008,7 @@
                 <a:ea typeface="Microsoft YaHei" pitchFamily="34" charset="-122"/>
                 <a:cs typeface="Microsoft YaHei" pitchFamily="34" charset="-120"/>
               </a:rPr>
-              <a:t>数据源台账在系统首页可视化：采集 2523 → 查重 → 解析 → 交叉验证 → 入图谱，闭环每一环都有真实数字可查；合成数据集（379 条）重新定位为对抗测试夹具，不进生产图谱</a:t>
+              <a:t>数据源台账在系统首页可视化：采集 2570 → 查重 → 解析 → 交叉验证 → 入图谱，闭环每一环都有真实数字可查；合成数据集（379 条）重新定位为对抗测试夹具，不进生产图谱</a:t>
             </a:r>
             <a:endParaRPr lang="en-US" sz="1200" dirty="0"/>
           </a:p>
@@ -15394,7 +15394,7 @@
                 <a:ea typeface="Microsoft YaHei" pitchFamily="34" charset="-122"/>
                 <a:cs typeface="Microsoft YaHei" pitchFamily="34" charset="-120"/>
               </a:rPr>
-              <a:t>29 / 32 个岗位建有三档分级画像 · 621 条真实演化记录贯穿 2018→2024→2026 三个切片</a:t>
+              <a:t>32 / 32 个岗位建有三档分级画像 · 621 条真实演化记录贯穿 2018→2024→2026 三个切片</a:t>
             </a:r>
             <a:endParaRPr lang="en-US" sz="1250" dirty="0"/>
           </a:p>

--- a/docs/ppt_build/智岗图谱_作品介绍.pptx
+++ b/docs/ppt_build/智岗图谱_作品介绍.pptx
@@ -5948,7 +5948,7 @@
                 <a:ea typeface="Microsoft YaHei" pitchFamily="34" charset="-122"/>
                 <a:cs typeface="Microsoft YaHei" pitchFamily="34" charset="-120"/>
               </a:rPr>
-              <a:t>岗位整体置信度 = 粗粒度 active 能力项的权重加权平均；全库岗位均值 0.5513 —— 比上一版低，因为 6 个原本靠联网检索打分（最高 1.000）的新兴岗位已改由真实 JD 语料重建、纳入同一条交叉验证链，公式一个参数未改（3257 项单来源细粒度技能点降级为 candidate，保留可查但不进图谱主视图）</a:t>
+              <a:t>岗位整体置信度 = 粗粒度 active 能力项的权重加权平均；全库岗位均值 0.5613 —— 比上一版低，因为 6 个原本靠联网检索打分（最高 1.000）的新兴岗位已改由真实 JD 语料重建、纳入同一条交叉验证链，公式一个参数未改（3258 项单来源细粒度技能点降级为 candidate，保留可查但不进图谱主视图）</a:t>
             </a:r>
             <a:endParaRPr lang="en-US" sz="1200" dirty="0"/>
           </a:p>
@@ -7110,7 +7110,7 @@
                 <a:ea typeface="Microsoft YaHei" pitchFamily="34" charset="-122"/>
                 <a:cs typeface="Microsoft YaHei" pitchFamily="34" charset="-120"/>
               </a:rPr>
-              <a:t>71%</a:t>
+              <a:t>73%</a:t>
             </a:r>
             <a:endParaRPr lang="en-US" sz="2600" dirty="0"/>
           </a:p>
@@ -7222,7 +7222,7 @@
                 <a:ea typeface="Microsoft YaHei" pitchFamily="34" charset="-122"/>
                 <a:cs typeface="Microsoft YaHei" pitchFamily="34" charset="-120"/>
               </a:rPr>
-              <a:t>109</a:t>
+              <a:t>146</a:t>
             </a:r>
             <a:endParaRPr lang="en-US" sz="2600" dirty="0"/>
           </a:p>
@@ -10747,7 +10747,7 @@
                 <a:ea typeface="Microsoft YaHei" pitchFamily="34" charset="-122"/>
                 <a:cs typeface="Microsoft YaHei" pitchFamily="34" charset="-120"/>
               </a:rPr>
-              <a:t>7861</a:t>
+              <a:t>7999</a:t>
             </a:r>
             <a:endParaRPr lang="en-US" sz="3200" dirty="0"/>
           </a:p>
@@ -10825,7 +10825,7 @@
                 <a:ea typeface="Microsoft YaHei" pitchFamily="34" charset="-122"/>
                 <a:cs typeface="Microsoft YaHei" pitchFamily="34" charset="-120"/>
               </a:rPr>
-              <a:t>0.5513</a:t>
+              <a:t>0.5613</a:t>
             </a:r>
             <a:endParaRPr lang="en-US" sz="3200" dirty="0"/>
           </a:p>

--- a/docs/ppt_build/智岗图谱_作品介绍.pptx
+++ b/docs/ppt_build/智岗图谱_作品介绍.pptx
@@ -2082,14 +2082,14 @@
           </a:solidFill>
           <a:ln w="12700">
             <a:solidFill>
-              <a:srgbClr val="E2E8F0"/>
+              <a:srgbClr val="E2DFF1"/>
             </a:solidFill>
             <a:prstDash val="solid"/>
           </a:ln>
           <a:effectLst>
             <a:outerShdw sx="100000" sy="100000" kx="0" ky="0" algn="bl" rotWithShape="0" blurRad="152400" dist="38100" dir="5400000">
-              <a:srgbClr val="93A8D8">
-                <a:alpha val="28000"/>
+              <a:srgbClr val="9C93C8">
+                <a:alpha val="24000"/>
               </a:srgbClr>
             </a:outerShdw>
           </a:effectLst>
@@ -2097,7 +2097,7 @@
       </p:sp>
       <p:pic>
         <p:nvPicPr>
-          <p:cNvPr id="4" name="Image 0" descr="logo.png">    </p:cNvPr>
+          <p:cNvPr id="4" name="Image 0" descr="C:\Users\32768\Desktop\project\挑战杯\talent-graph-system\docs\ppt_build\logo.png">    </p:cNvPr>
           <p:cNvPicPr>
             <a:picLocks noChangeAspect="1"/>
           </p:cNvPicPr>
@@ -2146,7 +2146,7 @@
             <a:r>
               <a:rPr lang="en-US" sz="3000" b="1" dirty="0">
                 <a:solidFill>
-                  <a:srgbClr val="1E293B"/>
+                  <a:srgbClr val="1E2442"/>
                 </a:solidFill>
                 <a:latin typeface="Microsoft YaHei" pitchFamily="34" charset="0"/>
                 <a:ea typeface="Microsoft YaHei" pitchFamily="34" charset="-122"/>
@@ -2185,7 +2185,7 @@
             <a:r>
               <a:rPr lang="en-US" sz="1400" b="1" dirty="0">
                 <a:solidFill>
-                  <a:srgbClr val="0EA5E9"/>
+                  <a:srgbClr val="0E7490"/>
                 </a:solidFill>
                 <a:latin typeface="Microsoft YaHei" pitchFamily="34" charset="0"/>
                 <a:ea typeface="Microsoft YaHei" pitchFamily="34" charset="-122"/>
@@ -2227,7 +2227,7 @@
             <a:r>
               <a:rPr lang="en-US" sz="3800" b="1" dirty="0">
                 <a:solidFill>
-                  <a:srgbClr val="1E293B"/>
+                  <a:srgbClr val="1E2442"/>
                 </a:solidFill>
                 <a:latin typeface="Microsoft YaHei" pitchFamily="34" charset="0"/>
                 <a:ea typeface="Microsoft YaHei" pitchFamily="34" charset="-122"/>
@@ -2247,7 +2247,7 @@
             <a:r>
               <a:rPr lang="en-US" sz="3800" b="1" dirty="0">
                 <a:solidFill>
-                  <a:srgbClr val="1E293B"/>
+                  <a:srgbClr val="1E2442"/>
                 </a:solidFill>
                 <a:latin typeface="Microsoft YaHei" pitchFamily="34" charset="0"/>
                 <a:ea typeface="Microsoft YaHei" pitchFamily="34" charset="-122"/>
@@ -2286,7 +2286,7 @@
             <a:r>
               <a:rPr lang="en-US" sz="1600" dirty="0">
                 <a:solidFill>
-                  <a:srgbClr val="64748B"/>
+                  <a:srgbClr val="626A84"/>
                 </a:solidFill>
                 <a:latin typeface="Microsoft YaHei" pitchFamily="34" charset="0"/>
                 <a:ea typeface="Microsoft YaHei" pitchFamily="34" charset="-122"/>
@@ -2319,14 +2319,14 @@
           </a:solidFill>
           <a:ln w="12700">
             <a:solidFill>
-              <a:srgbClr val="6366F1"/>
+              <a:srgbClr val="3F4BD8"/>
             </a:solidFill>
             <a:prstDash val="solid"/>
           </a:ln>
           <a:effectLst>
             <a:outerShdw sx="100000" sy="100000" kx="0" ky="0" algn="bl" rotWithShape="0" blurRad="1935480000" dist="483870000" dir="324000000000">
-              <a:srgbClr val="93A8D8">
-                <a:alpha val="2800000000"/>
+              <a:srgbClr val="9C93C8">
+                <a:alpha val="2400000000"/>
               </a:srgbClr>
             </a:outerShdw>
           </a:effectLst>
@@ -2359,7 +2359,7 @@
             <a:r>
               <a:rPr lang="en-US" sz="1200" b="1" dirty="0">
                 <a:solidFill>
-                  <a:srgbClr val="6366F1"/>
+                  <a:srgbClr val="3F4BD8"/>
                 </a:solidFill>
                 <a:latin typeface="Microsoft YaHei" pitchFamily="34" charset="0"/>
                 <a:ea typeface="Microsoft YaHei" pitchFamily="34" charset="-122"/>
@@ -2392,14 +2392,14 @@
           </a:solidFill>
           <a:ln w="12700">
             <a:solidFill>
-              <a:srgbClr val="6366F1"/>
+              <a:srgbClr val="3F4BD8"/>
             </a:solidFill>
             <a:prstDash val="solid"/>
           </a:ln>
           <a:effectLst>
             <a:outerShdw sx="100000" sy="100000" kx="0" ky="0" algn="bl" rotWithShape="0" blurRad="24580596000000" dist="6145149000000" dir="19440000000000000">
-              <a:srgbClr val="93A8D8">
-                <a:alpha val="280000000000000"/>
+              <a:srgbClr val="9C93C8">
+                <a:alpha val="240000000000000"/>
               </a:srgbClr>
             </a:outerShdw>
           </a:effectLst>
@@ -2432,7 +2432,7 @@
             <a:r>
               <a:rPr lang="en-US" sz="1200" b="1" dirty="0">
                 <a:solidFill>
-                  <a:srgbClr val="6366F1"/>
+                  <a:srgbClr val="3F4BD8"/>
                 </a:solidFill>
                 <a:latin typeface="Microsoft YaHei" pitchFamily="34" charset="0"/>
                 <a:ea typeface="Microsoft YaHei" pitchFamily="34" charset="-122"/>
@@ -2465,14 +2465,14 @@
           </a:solidFill>
           <a:ln w="12700">
             <a:solidFill>
-              <a:srgbClr val="6366F1"/>
+              <a:srgbClr val="3F4BD8"/>
             </a:solidFill>
             <a:prstDash val="solid"/>
           </a:ln>
           <a:effectLst>
             <a:outerShdw sx="100000" sy="100000" kx="0" ky="0" algn="bl" rotWithShape="0" blurRad="312173569200000000" dist="78043392300000000" dir="1.1664e+21">
-              <a:srgbClr val="93A8D8">
-                <a:alpha val="28000000000000000000"/>
+              <a:srgbClr val="9C93C8">
+                <a:alpha val="24000000000000000000"/>
               </a:srgbClr>
             </a:outerShdw>
           </a:effectLst>
@@ -2505,7 +2505,7 @@
             <a:r>
               <a:rPr lang="en-US" sz="1200" b="1" dirty="0">
                 <a:solidFill>
-                  <a:srgbClr val="6366F1"/>
+                  <a:srgbClr val="3F4BD8"/>
                 </a:solidFill>
                 <a:latin typeface="Microsoft YaHei" pitchFamily="34" charset="0"/>
                 <a:ea typeface="Microsoft YaHei" pitchFamily="34" charset="-122"/>
@@ -2538,14 +2538,14 @@
           </a:solidFill>
           <a:ln w="12700">
             <a:solidFill>
-              <a:srgbClr val="6366F1"/>
+              <a:srgbClr val="3F4BD8"/>
             </a:solidFill>
             <a:prstDash val="solid"/>
           </a:ln>
           <a:effectLst>
             <a:outerShdw sx="100000" sy="100000" kx="0" ky="0" algn="bl" rotWithShape="0" blurRad="3.96460432884e+21" dist="991151082210000000000" dir="6.9984e+25">
-              <a:srgbClr val="93A8D8">
-                <a:alpha val="2.8e+24"/>
+              <a:srgbClr val="9C93C8">
+                <a:alpha val="2.4e+24"/>
               </a:srgbClr>
             </a:outerShdw>
           </a:effectLst>
@@ -2578,7 +2578,7 @@
             <a:r>
               <a:rPr lang="en-US" sz="1200" b="1" dirty="0">
                 <a:solidFill>
-                  <a:srgbClr val="6366F1"/>
+                  <a:srgbClr val="3F4BD8"/>
                 </a:solidFill>
                 <a:latin typeface="Microsoft YaHei" pitchFamily="34" charset="0"/>
                 <a:ea typeface="Microsoft YaHei" pitchFamily="34" charset="-122"/>
@@ -2611,14 +2611,14 @@
           </a:solidFill>
           <a:ln w="12700">
             <a:solidFill>
-              <a:srgbClr val="6366F1"/>
+              <a:srgbClr val="3F4BD8"/>
             </a:solidFill>
             <a:prstDash val="solid"/>
           </a:ln>
           <a:effectLst>
             <a:outerShdw sx="100000" sy="100000" kx="0" ky="0" algn="bl" rotWithShape="0" blurRad="5.0350474976268e+25" dist="1.2587618744067e+25" dir="4.19904e+30">
-              <a:srgbClr val="93A8D8">
-                <a:alpha val="2.8000000000000003e+29"/>
+              <a:srgbClr val="9C93C8">
+                <a:alpha val="2.4e+29"/>
               </a:srgbClr>
             </a:outerShdw>
           </a:effectLst>
@@ -2651,7 +2651,7 @@
             <a:r>
               <a:rPr lang="en-US" sz="1200" b="1" dirty="0">
                 <a:solidFill>
-                  <a:srgbClr val="6366F1"/>
+                  <a:srgbClr val="3F4BD8"/>
                 </a:solidFill>
                 <a:latin typeface="Microsoft YaHei" pitchFamily="34" charset="0"/>
                 <a:ea typeface="Microsoft YaHei" pitchFamily="34" charset="-122"/>
@@ -2690,7 +2690,7 @@
             <a:r>
               <a:rPr lang="en-US" sz="1200" dirty="0">
                 <a:solidFill>
-                  <a:srgbClr val="64748B"/>
+                  <a:srgbClr val="626A84"/>
                 </a:solidFill>
                 <a:latin typeface="Microsoft YaHei" pitchFamily="34" charset="0"/>
                 <a:ea typeface="Microsoft YaHei" pitchFamily="34" charset="-122"/>
@@ -2716,7 +2716,7 @@
     <p:bg>
       <p:bgPr>
         <a:solidFill>
-          <a:srgbClr val="EEF4FF"/>
+          <a:srgbClr val="F3F1FB"/>
         </a:solidFill>
       </p:bgPr>
     </p:bg>
@@ -2751,13 +2751,13 @@
             </a:avLst>
           </a:prstGeom>
           <a:solidFill>
-            <a:srgbClr val="6366F1"/>
+            <a:srgbClr val="3F4BD8"/>
           </a:solidFill>
           <a:ln/>
           <a:effectLst>
-            <a:outerShdw sx="100000" sy="100000" kx="0" ky="0" algn="bl" rotWithShape="0" blurRad="3.80871482804129e+218" dist="9.521787070103225e+217" dir="1.571298803391502e+255">
-              <a:srgbClr val="93A8D8">
-                <a:alpha val="2.800000000000001e+264"/>
+            <a:outerShdw sx="100000" sy="100000" kx="0" ky="0" algn="bl" rotWithShape="0" blurRad="6.143076146147797e+226" dist="1.5357690365369493e+226" dir="5.656675692209407e+264">
+              <a:srgbClr val="9C93C8">
+                <a:alpha val="2.399999999999998e+274"/>
               </a:srgbClr>
             </a:outerShdw>
           </a:effectLst>
@@ -2829,7 +2829,7 @@
             <a:r>
               <a:rPr lang="en-US" sz="2600" b="1" dirty="0">
                 <a:solidFill>
-                  <a:srgbClr val="1E293B"/>
+                  <a:srgbClr val="1E2442"/>
                 </a:solidFill>
                 <a:latin typeface="Microsoft YaHei" pitchFamily="34" charset="0"/>
                 <a:ea typeface="Microsoft YaHei" pitchFamily="34" charset="-122"/>
@@ -2868,7 +2868,7 @@
             <a:r>
               <a:rPr lang="en-US" sz="1250" dirty="0">
                 <a:solidFill>
-                  <a:srgbClr val="64748B"/>
+                  <a:srgbClr val="626A84"/>
                 </a:solidFill>
                 <a:latin typeface="Microsoft YaHei" pitchFamily="34" charset="0"/>
                 <a:ea typeface="Microsoft YaHei" pitchFamily="34" charset="-122"/>
@@ -2907,7 +2907,7 @@
             <a:r>
               <a:rPr lang="en-US" sz="1000" dirty="0">
                 <a:solidFill>
-                  <a:srgbClr val="94A3B8"/>
+                  <a:srgbClr val="767D92"/>
                 </a:solidFill>
                 <a:latin typeface="Microsoft YaHei" pitchFamily="34" charset="0"/>
                 <a:ea typeface="Microsoft YaHei" pitchFamily="34" charset="-122"/>
@@ -2940,14 +2940,14 @@
           </a:solidFill>
           <a:ln w="12700">
             <a:solidFill>
-              <a:srgbClr val="E2E8F0"/>
+              <a:srgbClr val="E2DFF1"/>
             </a:solidFill>
             <a:prstDash val="solid"/>
           </a:ln>
           <a:effectLst>
-            <a:outerShdw sx="100000" sy="100000" kx="0" ky="0" algn="bl" rotWithShape="0" blurRad="4.8370678316124384e+222" dist="1.2092669579031096e+222" dir="9.427792820349012e+259">
-              <a:srgbClr val="93A8D8">
-                <a:alpha val="2.800000000000001e+269"/>
+            <a:outerShdw sx="100000" sy="100000" kx="0" ky="0" algn="bl" rotWithShape="0" blurRad="7.801706705607703e+230" dist="1.950426676401926e+230" dir="3.3940054153256444e+269">
+              <a:srgbClr val="9C93C8">
+                <a:alpha val="2.399999999999998e+279"/>
               </a:srgbClr>
             </a:outerShdw>
           </a:effectLst>
@@ -2970,7 +2970,7 @@
             </a:avLst>
           </a:prstGeom>
           <a:solidFill>
-            <a:srgbClr val="F43F5E"/>
+            <a:srgbClr val="BE123C"/>
           </a:solidFill>
           <a:ln/>
         </p:spPr>
@@ -3044,7 +3044,7 @@
             <a:r>
               <a:rPr lang="en-US" sz="1250" b="1" dirty="0">
                 <a:solidFill>
-                  <a:srgbClr val="1E293B"/>
+                  <a:srgbClr val="1E2442"/>
                 </a:solidFill>
                 <a:latin typeface="Microsoft YaHei" pitchFamily="34" charset="0"/>
                 <a:ea typeface="Microsoft YaHei" pitchFamily="34" charset="-122"/>
@@ -3061,7 +3061,7 @@
             <a:r>
               <a:rPr lang="en-US" sz="1250" dirty="0">
                 <a:solidFill>
-                  <a:srgbClr val="64748B"/>
+                  <a:srgbClr val="626A84"/>
                 </a:solidFill>
                 <a:latin typeface="Microsoft YaHei" pitchFamily="34" charset="0"/>
                 <a:ea typeface="Microsoft YaHei" pitchFamily="34" charset="-122"/>
@@ -3103,7 +3103,7 @@
             <a:r>
               <a:rPr lang="en-US" sz="1250" b="1" dirty="0">
                 <a:solidFill>
-                  <a:srgbClr val="10B981"/>
+                  <a:srgbClr val="047857"/>
                 </a:solidFill>
                 <a:latin typeface="Microsoft YaHei" pitchFamily="34" charset="0"/>
                 <a:ea typeface="Microsoft YaHei" pitchFamily="34" charset="-122"/>
@@ -3120,7 +3120,7 @@
             <a:r>
               <a:rPr lang="en-US" sz="1250" dirty="0">
                 <a:solidFill>
-                  <a:srgbClr val="64748B"/>
+                  <a:srgbClr val="626A84"/>
                 </a:solidFill>
                 <a:latin typeface="Microsoft YaHei" pitchFamily="34" charset="0"/>
                 <a:ea typeface="Microsoft YaHei" pitchFamily="34" charset="-122"/>
@@ -3153,14 +3153,14 @@
           </a:solidFill>
           <a:ln w="12700">
             <a:solidFill>
-              <a:srgbClr val="E2E8F0"/>
+              <a:srgbClr val="E2DFF1"/>
             </a:solidFill>
             <a:prstDash val="solid"/>
           </a:ln>
           <a:effectLst>
-            <a:outerShdw sx="100000" sy="100000" kx="0" ky="0" algn="bl" rotWithShape="0" blurRad="6.143076146147797e+226" dist="1.5357690365369493e+226" dir="5.656675692209407e+264">
-              <a:srgbClr val="93A8D8">
-                <a:alpha val="2.800000000000001e+274"/>
+            <a:outerShdw sx="100000" sy="100000" kx="0" ky="0" algn="bl" rotWithShape="0" blurRad="9.908167516121783e+234" dist="2.4770418790304458e+234" dir="2.0364032491953868e+274">
+              <a:srgbClr val="9C93C8">
+                <a:alpha val="2.399999999999998e+284"/>
               </a:srgbClr>
             </a:outerShdw>
           </a:effectLst>
@@ -3183,7 +3183,7 @@
             </a:avLst>
           </a:prstGeom>
           <a:solidFill>
-            <a:srgbClr val="F59E0B"/>
+            <a:srgbClr val="A16207"/>
           </a:solidFill>
           <a:ln/>
         </p:spPr>
@@ -3257,7 +3257,7 @@
             <a:r>
               <a:rPr lang="en-US" sz="1250" b="1" dirty="0">
                 <a:solidFill>
-                  <a:srgbClr val="1E293B"/>
+                  <a:srgbClr val="1E2442"/>
                 </a:solidFill>
                 <a:latin typeface="Microsoft YaHei" pitchFamily="34" charset="0"/>
                 <a:ea typeface="Microsoft YaHei" pitchFamily="34" charset="-122"/>
@@ -3274,7 +3274,7 @@
             <a:r>
               <a:rPr lang="en-US" sz="1250" dirty="0">
                 <a:solidFill>
-                  <a:srgbClr val="64748B"/>
+                  <a:srgbClr val="626A84"/>
                 </a:solidFill>
                 <a:latin typeface="Microsoft YaHei" pitchFamily="34" charset="0"/>
                 <a:ea typeface="Microsoft YaHei" pitchFamily="34" charset="-122"/>
@@ -3316,7 +3316,7 @@
             <a:r>
               <a:rPr lang="en-US" sz="1250" b="1" dirty="0">
                 <a:solidFill>
-                  <a:srgbClr val="10B981"/>
+                  <a:srgbClr val="047857"/>
                 </a:solidFill>
                 <a:latin typeface="Microsoft YaHei" pitchFamily="34" charset="0"/>
                 <a:ea typeface="Microsoft YaHei" pitchFamily="34" charset="-122"/>
@@ -3333,7 +3333,7 @@
             <a:r>
               <a:rPr lang="en-US" sz="1250" dirty="0">
                 <a:solidFill>
-                  <a:srgbClr val="64748B"/>
+                  <a:srgbClr val="626A84"/>
                 </a:solidFill>
                 <a:latin typeface="Microsoft YaHei" pitchFamily="34" charset="0"/>
                 <a:ea typeface="Microsoft YaHei" pitchFamily="34" charset="-122"/>
@@ -3366,14 +3366,14 @@
           </a:solidFill>
           <a:ln w="12700">
             <a:solidFill>
-              <a:srgbClr val="E2E8F0"/>
+              <a:srgbClr val="E2DFF1"/>
             </a:solidFill>
             <a:prstDash val="solid"/>
           </a:ln>
           <a:effectLst>
-            <a:outerShdw sx="100000" sy="100000" kx="0" ky="0" algn="bl" rotWithShape="0" blurRad="7.801706705607703e+230" dist="1.950426676401926e+230" dir="3.3940054153256444e+269">
-              <a:srgbClr val="93A8D8">
-                <a:alpha val="2.8000000000000007e+279"/>
+            <a:outerShdw sx="100000" sy="100000" kx="0" ky="0" algn="bl" rotWithShape="0" blurRad="1.2583372745474664e+239" dist="3.145843186368666e+238" dir="1.221841949517232e+279">
+              <a:srgbClr val="9C93C8">
+                <a:alpha val="2.399999999999998e+289"/>
               </a:srgbClr>
             </a:outerShdw>
           </a:effectLst>
@@ -3396,7 +3396,7 @@
             </a:avLst>
           </a:prstGeom>
           <a:solidFill>
-            <a:srgbClr val="0EA5E9"/>
+            <a:srgbClr val="0E7490"/>
           </a:solidFill>
           <a:ln/>
         </p:spPr>
@@ -3470,7 +3470,7 @@
             <a:r>
               <a:rPr lang="en-US" sz="1250" b="1" dirty="0">
                 <a:solidFill>
-                  <a:srgbClr val="1E293B"/>
+                  <a:srgbClr val="1E2442"/>
                 </a:solidFill>
                 <a:latin typeface="Microsoft YaHei" pitchFamily="34" charset="0"/>
                 <a:ea typeface="Microsoft YaHei" pitchFamily="34" charset="-122"/>
@@ -3487,7 +3487,7 @@
             <a:r>
               <a:rPr lang="en-US" sz="1250" dirty="0">
                 <a:solidFill>
-                  <a:srgbClr val="64748B"/>
+                  <a:srgbClr val="626A84"/>
                 </a:solidFill>
                 <a:latin typeface="Microsoft YaHei" pitchFamily="34" charset="0"/>
                 <a:ea typeface="Microsoft YaHei" pitchFamily="34" charset="-122"/>
@@ -3529,7 +3529,7 @@
             <a:r>
               <a:rPr lang="en-US" sz="1250" b="1" dirty="0">
                 <a:solidFill>
-                  <a:srgbClr val="10B981"/>
+                  <a:srgbClr val="047857"/>
                 </a:solidFill>
                 <a:latin typeface="Microsoft YaHei" pitchFamily="34" charset="0"/>
                 <a:ea typeface="Microsoft YaHei" pitchFamily="34" charset="-122"/>
@@ -3546,7 +3546,7 @@
             <a:r>
               <a:rPr lang="en-US" sz="1250" dirty="0">
                 <a:solidFill>
-                  <a:srgbClr val="64748B"/>
+                  <a:srgbClr val="626A84"/>
                 </a:solidFill>
                 <a:latin typeface="Microsoft YaHei" pitchFamily="34" charset="0"/>
                 <a:ea typeface="Microsoft YaHei" pitchFamily="34" charset="-122"/>
@@ -3579,14 +3579,14 @@
           </a:solidFill>
           <a:ln w="12700">
             <a:solidFill>
-              <a:srgbClr val="E2E8F0"/>
+              <a:srgbClr val="E2DFF1"/>
             </a:solidFill>
             <a:prstDash val="solid"/>
           </a:ln>
           <a:effectLst>
-            <a:outerShdw sx="100000" sy="100000" kx="0" ky="0" algn="bl" rotWithShape="0" blurRad="9.908167516121783e+234" dist="2.4770418790304458e+234" dir="2.0364032491953868e+274">
-              <a:srgbClr val="93A8D8">
-                <a:alpha val="2.8000000000000006e+284"/>
+            <a:outerShdw sx="100000" sy="100000" kx="0" ky="0" algn="bl" rotWithShape="0" blurRad="1.5980883386752823e+243" dist="3.995220846688206e+242" dir="7.331051697103393e+283">
+              <a:srgbClr val="9C93C8">
+                <a:alpha val="2.399999999999998e+294"/>
               </a:srgbClr>
             </a:outerShdw>
           </a:effectLst>
@@ -3609,7 +3609,7 @@
             </a:avLst>
           </a:prstGeom>
           <a:solidFill>
-            <a:srgbClr val="A855F7"/>
+            <a:srgbClr val="B02AA8"/>
           </a:solidFill>
           <a:ln/>
         </p:spPr>
@@ -3683,7 +3683,7 @@
             <a:r>
               <a:rPr lang="en-US" sz="1250" b="1" dirty="0">
                 <a:solidFill>
-                  <a:srgbClr val="1E293B"/>
+                  <a:srgbClr val="1E2442"/>
                 </a:solidFill>
                 <a:latin typeface="Microsoft YaHei" pitchFamily="34" charset="0"/>
                 <a:ea typeface="Microsoft YaHei" pitchFamily="34" charset="-122"/>
@@ -3700,7 +3700,7 @@
             <a:r>
               <a:rPr lang="en-US" sz="1250" dirty="0">
                 <a:solidFill>
-                  <a:srgbClr val="64748B"/>
+                  <a:srgbClr val="626A84"/>
                 </a:solidFill>
                 <a:latin typeface="Microsoft YaHei" pitchFamily="34" charset="0"/>
                 <a:ea typeface="Microsoft YaHei" pitchFamily="34" charset="-122"/>
@@ -3742,7 +3742,7 @@
             <a:r>
               <a:rPr lang="en-US" sz="1250" b="1" dirty="0">
                 <a:solidFill>
-                  <a:srgbClr val="10B981"/>
+                  <a:srgbClr val="047857"/>
                 </a:solidFill>
                 <a:latin typeface="Microsoft YaHei" pitchFamily="34" charset="0"/>
                 <a:ea typeface="Microsoft YaHei" pitchFamily="34" charset="-122"/>
@@ -3759,7 +3759,7 @@
             <a:r>
               <a:rPr lang="en-US" sz="1250" dirty="0">
                 <a:solidFill>
-                  <a:srgbClr val="64748B"/>
+                  <a:srgbClr val="626A84"/>
                 </a:solidFill>
                 <a:latin typeface="Microsoft YaHei" pitchFamily="34" charset="0"/>
                 <a:ea typeface="Microsoft YaHei" pitchFamily="34" charset="-122"/>
@@ -3798,7 +3798,7 @@
             <a:r>
               <a:rPr lang="en-US" sz="900" dirty="0">
                 <a:solidFill>
-                  <a:srgbClr val="94A3B8"/>
+                  <a:srgbClr val="767D92"/>
                 </a:solidFill>
                 <a:latin typeface="Microsoft YaHei" pitchFamily="34" charset="0"/>
                 <a:ea typeface="Microsoft YaHei" pitchFamily="34" charset="-122"/>
@@ -3837,7 +3837,7 @@
             <a:r>
               <a:rPr lang="en-US" sz="900" dirty="0">
                 <a:solidFill>
-                  <a:srgbClr val="94A3B8"/>
+                  <a:srgbClr val="767D92"/>
                 </a:solidFill>
                 <a:latin typeface="Microsoft YaHei" pitchFamily="34" charset="0"/>
                 <a:ea typeface="Microsoft YaHei" pitchFamily="34" charset="-122"/>
@@ -3863,7 +3863,7 @@
     <p:bg>
       <p:bgPr>
         <a:solidFill>
-          <a:srgbClr val="EEF4FF"/>
+          <a:srgbClr val="F3F1FB"/>
         </a:solidFill>
       </p:bgPr>
     </p:bg>
@@ -3898,13 +3898,13 @@
             </a:avLst>
           </a:prstGeom>
           <a:solidFill>
-            <a:srgbClr val="6366F1"/>
+            <a:srgbClr val="3F4BD8"/>
           </a:solidFill>
           <a:ln/>
           <a:effectLst>
-            <a:outerShdw sx="100000" sy="100000" kx="0" ky="0" algn="bl" rotWithShape="0" blurRad="1.2583372745474664e+239" dist="3.145843186368666e+238" dir="1.221841949517232e+279">
-              <a:srgbClr val="93A8D8">
-                <a:alpha val="2.8000000000000008e+289"/>
+            <a:outerShdw sx="100000" sy="100000" kx="0" ky="0" algn="bl" rotWithShape="0" blurRad="2.0295721901176086e+247" dist="5.0739304752940216e+246" dir="4.3986310182620354e+288">
+              <a:srgbClr val="9C93C8">
+                <a:alpha val="2.399999999999998e+299"/>
               </a:srgbClr>
             </a:outerShdw>
           </a:effectLst>
@@ -3976,7 +3976,7 @@
             <a:r>
               <a:rPr lang="en-US" sz="2600" b="1" dirty="0">
                 <a:solidFill>
-                  <a:srgbClr val="1E293B"/>
+                  <a:srgbClr val="1E2442"/>
                 </a:solidFill>
                 <a:latin typeface="Microsoft YaHei" pitchFamily="34" charset="0"/>
                 <a:ea typeface="Microsoft YaHei" pitchFamily="34" charset="-122"/>
@@ -4015,7 +4015,7 @@
             <a:r>
               <a:rPr lang="en-US" sz="1250" dirty="0">
                 <a:solidFill>
-                  <a:srgbClr val="64748B"/>
+                  <a:srgbClr val="626A84"/>
                 </a:solidFill>
                 <a:latin typeface="Microsoft YaHei" pitchFamily="34" charset="0"/>
                 <a:ea typeface="Microsoft YaHei" pitchFamily="34" charset="-122"/>
@@ -4054,7 +4054,7 @@
             <a:r>
               <a:rPr lang="en-US" sz="1000" dirty="0">
                 <a:solidFill>
-                  <a:srgbClr val="94A3B8"/>
+                  <a:srgbClr val="767D92"/>
                 </a:solidFill>
                 <a:latin typeface="Microsoft YaHei" pitchFamily="34" charset="0"/>
                 <a:ea typeface="Microsoft YaHei" pitchFamily="34" charset="-122"/>
@@ -4087,9 +4087,9 @@
           </a:solidFill>
           <a:ln/>
           <a:effectLst>
-            <a:outerShdw sx="100000" sy="100000" kx="0" ky="0" algn="bl" rotWithShape="0" blurRad="1.5980883386752823e+243" dist="3.995220846688206e+242" dir="7.331051697103393e+283">
-              <a:srgbClr val="93A8D8">
-                <a:alpha val="2.800000000000001e+294"/>
+            <a:outerShdw sx="100000" sy="100000" kx="0" ky="0" algn="bl" rotWithShape="0" blurRad="2.577556681449363e+251" dist="6.443891703623408e+250" dir="2.6391786109572213e+293">
+              <a:srgbClr val="9C93C8">
+                <a:alpha val="2.399999999999998e+304"/>
               </a:srgbClr>
             </a:outerShdw>
           </a:effectLst>
@@ -4155,14 +4155,14 @@
           </a:solidFill>
           <a:ln w="12700">
             <a:solidFill>
-              <a:srgbClr val="E2E8F0"/>
+              <a:srgbClr val="E2DFF1"/>
             </a:solidFill>
             <a:prstDash val="solid"/>
           </a:ln>
           <a:effectLst>
-            <a:outerShdw sx="100000" sy="100000" kx="0" ky="0" algn="bl" rotWithShape="0" blurRad="2.0295721901176086e+247" dist="5.0739304752940216e+246" dir="4.3986310182620354e+288">
-              <a:srgbClr val="93A8D8">
-                <a:alpha val="2.800000000000001e+299"/>
+            <a:outerShdw sx="100000" sy="100000" kx="0" ky="0" algn="bl" rotWithShape="0" blurRad="3.273496985440691e+255" dist="8.183742463601727e+254" dir="1.5835071665743328e+298">
+              <a:srgbClr val="9C93C8">
+                <a:alpha val="Infinity"/>
               </a:srgbClr>
             </a:outerShdw>
           </a:effectLst>
@@ -4183,7 +4183,7 @@
             <a:avLst/>
           </a:prstGeom>
           <a:solidFill>
-            <a:srgbClr val="6366F1"/>
+            <a:srgbClr val="3F4BD8"/>
           </a:solidFill>
           <a:ln/>
         </p:spPr>
@@ -4254,7 +4254,7 @@
             <a:r>
               <a:rPr lang="en-US" sz="1500" b="1" dirty="0">
                 <a:solidFill>
-                  <a:srgbClr val="1E293B"/>
+                  <a:srgbClr val="1E2442"/>
                 </a:solidFill>
                 <a:latin typeface="Microsoft YaHei" pitchFamily="34" charset="0"/>
                 <a:ea typeface="Microsoft YaHei" pitchFamily="34" charset="-122"/>
@@ -4296,13 +4296,13 @@
             <a:r>
               <a:rPr lang="en-US" sz="1250" dirty="0">
                 <a:solidFill>
-                  <a:srgbClr val="64748B"/>
-                </a:solidFill>
-                <a:latin typeface="Microsoft YaHei" pitchFamily="34" charset="0"/>
-                <a:ea typeface="Microsoft YaHei" pitchFamily="34" charset="-122"/>
-                <a:cs typeface="Microsoft YaHei" pitchFamily="34" charset="-120"/>
-              </a:rPr>
-              <a:t>必备技能要求 ≥2 个独立非重复来源，否则自动降级为加分技能 —— 防止单源臆造被定义为"必备"</a:t>
+                  <a:srgbClr val="626A84"/>
+                </a:solidFill>
+                <a:latin typeface="Microsoft YaHei" pitchFamily="34" charset="0"/>
+                <a:ea typeface="Microsoft YaHei" pitchFamily="34" charset="-122"/>
+                <a:cs typeface="Microsoft YaHei" pitchFamily="34" charset="-120"/>
+              </a:rPr>
+              <a:t>必备技能要求 ≥2 个独立雇主实体支持；同雇主跨分发渠道去重 —— 防止转载被误当成多源共识</a:t>
             </a:r>
             <a:endParaRPr lang="en-US" sz="1250" dirty="0"/>
           </a:p>
@@ -4329,14 +4329,14 @@
           </a:solidFill>
           <a:ln w="12700">
             <a:solidFill>
-              <a:srgbClr val="E2E8F0"/>
+              <a:srgbClr val="E2DFF1"/>
             </a:solidFill>
             <a:prstDash val="solid"/>
           </a:ln>
           <a:effectLst>
-            <a:outerShdw sx="100000" sy="100000" kx="0" ky="0" algn="bl" rotWithShape="0" blurRad="2.577556681449363e+251" dist="6.443891703623408e+250" dir="2.6391786109572213e+293">
-              <a:srgbClr val="93A8D8">
-                <a:alpha val="2.8000000000000006e+304"/>
+            <a:outerShdw sx="100000" sy="100000" kx="0" ky="0" algn="bl" rotWithShape="0" blurRad="4.1573411715096775e+259" dist="1.0393352928774194e+259" dir="9.501042999445996e+302">
+              <a:srgbClr val="9C93C8">
+                <a:alpha val="Infinity"/>
               </a:srgbClr>
             </a:outerShdw>
           </a:effectLst>
@@ -4357,7 +4357,7 @@
             <a:avLst/>
           </a:prstGeom>
           <a:solidFill>
-            <a:srgbClr val="0EA5E9"/>
+            <a:srgbClr val="0E7490"/>
           </a:solidFill>
           <a:ln/>
         </p:spPr>
@@ -4428,7 +4428,7 @@
             <a:r>
               <a:rPr lang="en-US" sz="1500" b="1" dirty="0">
                 <a:solidFill>
-                  <a:srgbClr val="1E293B"/>
+                  <a:srgbClr val="1E2442"/>
                 </a:solidFill>
                 <a:latin typeface="Microsoft YaHei" pitchFamily="34" charset="0"/>
                 <a:ea typeface="Microsoft YaHei" pitchFamily="34" charset="-122"/>
@@ -4470,13 +4470,13 @@
             <a:r>
               <a:rPr lang="en-US" sz="1250" dirty="0">
                 <a:solidFill>
-                  <a:srgbClr val="64748B"/>
-                </a:solidFill>
-                <a:latin typeface="Microsoft YaHei" pitchFamily="34" charset="0"/>
-                <a:ea typeface="Microsoft YaHei" pitchFamily="34" charset="-122"/>
-                <a:cs typeface="Microsoft YaHei" pitchFamily="34" charset="-120"/>
-              </a:rPr>
-              <a:t>低于阈值（0.45）的能力项标记为候选，不进入正式图谱 —— 过滤潜在幻觉 / 噪音</a:t>
+                  <a:srgbClr val="626A84"/>
+                </a:solidFill>
+                <a:latin typeface="Microsoft YaHei" pitchFamily="34" charset="0"/>
+                <a:ea typeface="Microsoft YaHei" pitchFamily="34" charset="-122"/>
+                <a:cs typeface="Microsoft YaHei" pitchFamily="34" charset="-120"/>
+              </a:rPr>
+              <a:t>不满足交叉验证门槛的能力项标记为 candidate，不进入 RoleContract 与主匹配视图 —— 保留证据但不放大噪音</a:t>
             </a:r>
             <a:endParaRPr lang="en-US" sz="1250" dirty="0"/>
           </a:p>
@@ -4503,13 +4503,13 @@
           </a:solidFill>
           <a:ln w="12700">
             <a:solidFill>
-              <a:srgbClr val="E2E8F0"/>
+              <a:srgbClr val="E2DFF1"/>
             </a:solidFill>
             <a:prstDash val="solid"/>
           </a:ln>
           <a:effectLst>
-            <a:outerShdw sx="100000" sy="100000" kx="0" ky="0" algn="bl" rotWithShape="0" blurRad="3.273496985440691e+255" dist="8.183742463601727e+254" dir="1.5835071665743328e+298">
-              <a:srgbClr val="93A8D8">
+            <a:outerShdw sx="100000" sy="100000" kx="0" ky="0" algn="bl" rotWithShape="0" blurRad="5.27982328781729e+263" dist="1.3199558219543225e+263" dir="5.700625799667598e+307">
+              <a:srgbClr val="9C93C8">
                 <a:alpha val="Infinity"/>
               </a:srgbClr>
             </a:outerShdw>
@@ -4531,7 +4531,7 @@
             <a:avLst/>
           </a:prstGeom>
           <a:solidFill>
-            <a:srgbClr val="10B981"/>
+            <a:srgbClr val="047857"/>
           </a:solidFill>
           <a:ln/>
         </p:spPr>
@@ -4602,7 +4602,7 @@
             <a:r>
               <a:rPr lang="en-US" sz="1500" b="1" dirty="0">
                 <a:solidFill>
-                  <a:srgbClr val="1E293B"/>
+                  <a:srgbClr val="1E2442"/>
                 </a:solidFill>
                 <a:latin typeface="Microsoft YaHei" pitchFamily="34" charset="0"/>
                 <a:ea typeface="Microsoft YaHei" pitchFamily="34" charset="-122"/>
@@ -4644,7 +4644,7 @@
             <a:r>
               <a:rPr lang="en-US" sz="1250" dirty="0">
                 <a:solidFill>
-                  <a:srgbClr val="64748B"/>
+                  <a:srgbClr val="626A84"/>
                 </a:solidFill>
                 <a:latin typeface="Microsoft YaHei" pitchFamily="34" charset="0"/>
                 <a:ea typeface="Microsoft YaHei" pitchFamily="34" charset="-122"/>
@@ -4683,7 +4683,7 @@
             <a:r>
               <a:rPr lang="en-US" sz="1150" b="1" dirty="0">
                 <a:solidFill>
-                  <a:srgbClr val="A855F7"/>
+                  <a:srgbClr val="B02AA8"/>
                 </a:solidFill>
                 <a:latin typeface="Microsoft YaHei" pitchFamily="34" charset="0"/>
                 <a:ea typeface="Microsoft YaHei" pitchFamily="34" charset="-122"/>
@@ -4722,7 +4722,7 @@
             <a:r>
               <a:rPr lang="en-US" sz="900" dirty="0">
                 <a:solidFill>
-                  <a:srgbClr val="94A3B8"/>
+                  <a:srgbClr val="767D92"/>
                 </a:solidFill>
                 <a:latin typeface="Microsoft YaHei" pitchFamily="34" charset="0"/>
                 <a:ea typeface="Microsoft YaHei" pitchFamily="34" charset="-122"/>
@@ -4761,7 +4761,7 @@
             <a:r>
               <a:rPr lang="en-US" sz="900" dirty="0">
                 <a:solidFill>
-                  <a:srgbClr val="94A3B8"/>
+                  <a:srgbClr val="767D92"/>
                 </a:solidFill>
                 <a:latin typeface="Microsoft YaHei" pitchFamily="34" charset="0"/>
                 <a:ea typeface="Microsoft YaHei" pitchFamily="34" charset="-122"/>
@@ -4787,7 +4787,7 @@
     <p:bg>
       <p:bgPr>
         <a:solidFill>
-          <a:srgbClr val="EEF4FF"/>
+          <a:srgbClr val="F3F1FB"/>
         </a:solidFill>
       </p:bgPr>
     </p:bg>
@@ -4822,12 +4822,12 @@
             </a:avLst>
           </a:prstGeom>
           <a:solidFill>
-            <a:srgbClr val="6366F1"/>
+            <a:srgbClr val="3F4BD8"/>
           </a:solidFill>
           <a:ln/>
           <a:effectLst>
-            <a:outerShdw sx="100000" sy="100000" kx="0" ky="0" algn="bl" rotWithShape="0" blurRad="4.1573411715096775e+259" dist="1.0393352928774194e+259" dir="9.501042999445996e+302">
-              <a:srgbClr val="93A8D8">
+            <a:outerShdw sx="100000" sy="100000" kx="0" ky="0" algn="bl" rotWithShape="0" blurRad="6.705375575527958e+267" dist="1.6763438938819895e+267" dir="Infinity">
+              <a:srgbClr val="9C93C8">
                 <a:alpha val="Infinity"/>
               </a:srgbClr>
             </a:outerShdw>
@@ -4900,7 +4900,7 @@
             <a:r>
               <a:rPr lang="en-US" sz="2600" b="1" dirty="0">
                 <a:solidFill>
-                  <a:srgbClr val="1E293B"/>
+                  <a:srgbClr val="1E2442"/>
                 </a:solidFill>
                 <a:latin typeface="Microsoft YaHei" pitchFamily="34" charset="0"/>
                 <a:ea typeface="Microsoft YaHei" pitchFamily="34" charset="-122"/>
@@ -4939,7 +4939,7 @@
             <a:r>
               <a:rPr lang="en-US" sz="1250" dirty="0">
                 <a:solidFill>
-                  <a:srgbClr val="64748B"/>
+                  <a:srgbClr val="626A84"/>
                 </a:solidFill>
                 <a:latin typeface="Microsoft YaHei" pitchFamily="34" charset="0"/>
                 <a:ea typeface="Microsoft YaHei" pitchFamily="34" charset="-122"/>
@@ -4978,7 +4978,7 @@
             <a:r>
               <a:rPr lang="en-US" sz="1000" dirty="0">
                 <a:solidFill>
-                  <a:srgbClr val="94A3B8"/>
+                  <a:srgbClr val="767D92"/>
                 </a:solidFill>
                 <a:latin typeface="Microsoft YaHei" pitchFamily="34" charset="0"/>
                 <a:ea typeface="Microsoft YaHei" pitchFamily="34" charset="-122"/>
@@ -5011,13 +5011,13 @@
           </a:solidFill>
           <a:ln w="12700">
             <a:solidFill>
-              <a:srgbClr val="E2E8F0"/>
+              <a:srgbClr val="E2DFF1"/>
             </a:solidFill>
             <a:prstDash val="solid"/>
           </a:ln>
           <a:effectLst>
-            <a:outerShdw sx="100000" sy="100000" kx="0" ky="0" algn="bl" rotWithShape="0" blurRad="5.27982328781729e+263" dist="1.3199558219543225e+263" dir="5.700625799667598e+307">
-              <a:srgbClr val="93A8D8">
+            <a:outerShdw sx="100000" sy="100000" kx="0" ky="0" algn="bl" rotWithShape="0" blurRad="8.515826980920506e+271" dist="2.1289567452301266e+271" dir="Infinity">
+              <a:srgbClr val="9C93C8">
                 <a:alpha val="Infinity"/>
               </a:srgbClr>
             </a:outerShdw>
@@ -5051,7 +5051,7 @@
             <a:r>
               <a:rPr lang="en-US" sz="2400" b="1" dirty="0">
                 <a:solidFill>
-                  <a:srgbClr val="6366F1"/>
+                  <a:srgbClr val="3F4BD8"/>
                 </a:solidFill>
                 <a:latin typeface="Microsoft YaHei" pitchFamily="34" charset="0"/>
                 <a:ea typeface="Microsoft YaHei" pitchFamily="34" charset="-122"/>
@@ -5090,7 +5090,7 @@
             <a:r>
               <a:rPr lang="en-US" sz="1350" b="1" dirty="0">
                 <a:solidFill>
-                  <a:srgbClr val="1E293B"/>
+                  <a:srgbClr val="1E2442"/>
                 </a:solidFill>
                 <a:latin typeface="Microsoft YaHei" pitchFamily="34" charset="0"/>
                 <a:ea typeface="Microsoft YaHei" pitchFamily="34" charset="-122"/>
@@ -5132,7 +5132,7 @@
             <a:r>
               <a:rPr lang="en-US" sz="950" dirty="0">
                 <a:solidFill>
-                  <a:srgbClr val="64748B"/>
+                  <a:srgbClr val="626A84"/>
                 </a:solidFill>
                 <a:latin typeface="Microsoft YaHei" pitchFamily="34" charset="0"/>
                 <a:ea typeface="Microsoft YaHei" pitchFamily="34" charset="-122"/>
@@ -5165,13 +5165,13 @@
           </a:solidFill>
           <a:ln w="12700">
             <a:solidFill>
-              <a:srgbClr val="E2E8F0"/>
+              <a:srgbClr val="E2DFF1"/>
             </a:solidFill>
             <a:prstDash val="solid"/>
           </a:ln>
           <a:effectLst>
-            <a:outerShdw sx="100000" sy="100000" kx="0" ky="0" algn="bl" rotWithShape="0" blurRad="6.705375575527958e+267" dist="1.6763438938819895e+267" dir="Infinity">
-              <a:srgbClr val="93A8D8">
+            <a:outerShdw sx="100000" sy="100000" kx="0" ky="0" algn="bl" rotWithShape="0" blurRad="1.0815100265769043e+276" dist="2.7037750664422608e+275" dir="Infinity">
+              <a:srgbClr val="9C93C8">
                 <a:alpha val="Infinity"/>
               </a:srgbClr>
             </a:outerShdw>
@@ -5205,7 +5205,7 @@
             <a:r>
               <a:rPr lang="en-US" sz="2400" b="1" dirty="0">
                 <a:solidFill>
-                  <a:srgbClr val="0EA5E9"/>
+                  <a:srgbClr val="0E7490"/>
                 </a:solidFill>
                 <a:latin typeface="Microsoft YaHei" pitchFamily="34" charset="0"/>
                 <a:ea typeface="Microsoft YaHei" pitchFamily="34" charset="-122"/>
@@ -5244,7 +5244,7 @@
             <a:r>
               <a:rPr lang="en-US" sz="1350" b="1" dirty="0">
                 <a:solidFill>
-                  <a:srgbClr val="1E293B"/>
+                  <a:srgbClr val="1E2442"/>
                 </a:solidFill>
                 <a:latin typeface="Microsoft YaHei" pitchFamily="34" charset="0"/>
                 <a:ea typeface="Microsoft YaHei" pitchFamily="34" charset="-122"/>
@@ -5286,13 +5286,13 @@
             <a:r>
               <a:rPr lang="en-US" sz="950" dirty="0">
                 <a:solidFill>
-                  <a:srgbClr val="64748B"/>
-                </a:solidFill>
-                <a:latin typeface="Microsoft YaHei" pitchFamily="34" charset="0"/>
-                <a:ea typeface="Microsoft YaHei" pitchFamily="34" charset="-122"/>
-                <a:cs typeface="Microsoft YaHei" pitchFamily="34" charset="-120"/>
-              </a:rPr>
-              <a:t>独立平台数 ÷ 3 封顶（真实语料校准后冻结）</a:t>
+                  <a:srgbClr val="626A84"/>
+                </a:solidFill>
+                <a:latin typeface="Microsoft YaHei" pitchFamily="34" charset="0"/>
+                <a:ea typeface="Microsoft YaHei" pitchFamily="34" charset="-122"/>
+                <a:cs typeface="Microsoft YaHei" pitchFamily="34" charset="-120"/>
+              </a:rPr>
+              <a:t>独立雇主实体数 ÷ 3 封顶（同雇主跨渠道去重）</a:t>
             </a:r>
             <a:endParaRPr lang="en-US" sz="950" dirty="0"/>
           </a:p>
@@ -5319,13 +5319,13 @@
           </a:solidFill>
           <a:ln w="12700">
             <a:solidFill>
-              <a:srgbClr val="E2E8F0"/>
+              <a:srgbClr val="E2DFF1"/>
             </a:solidFill>
             <a:prstDash val="solid"/>
           </a:ln>
           <a:effectLst>
-            <a:outerShdw sx="100000" sy="100000" kx="0" ky="0" algn="bl" rotWithShape="0" blurRad="8.515826980920506e+271" dist="2.1289567452301266e+271" dir="Infinity">
-              <a:srgbClr val="93A8D8">
+            <a:outerShdw sx="100000" sy="100000" kx="0" ky="0" algn="bl" rotWithShape="0" blurRad="1.3735177337526685e+280" dist="3.433794334381671e+279" dir="Infinity">
+              <a:srgbClr val="9C93C8">
                 <a:alpha val="Infinity"/>
               </a:srgbClr>
             </a:outerShdw>
@@ -5359,7 +5359,7 @@
             <a:r>
               <a:rPr lang="en-US" sz="2400" b="1" dirty="0">
                 <a:solidFill>
-                  <a:srgbClr val="10B981"/>
+                  <a:srgbClr val="047857"/>
                 </a:solidFill>
                 <a:latin typeface="Microsoft YaHei" pitchFamily="34" charset="0"/>
                 <a:ea typeface="Microsoft YaHei" pitchFamily="34" charset="-122"/>
@@ -5398,7 +5398,7 @@
             <a:r>
               <a:rPr lang="en-US" sz="1350" b="1" dirty="0">
                 <a:solidFill>
-                  <a:srgbClr val="1E293B"/>
+                  <a:srgbClr val="1E2442"/>
                 </a:solidFill>
                 <a:latin typeface="Microsoft YaHei" pitchFamily="34" charset="0"/>
                 <a:ea typeface="Microsoft YaHei" pitchFamily="34" charset="-122"/>
@@ -5440,7 +5440,7 @@
             <a:r>
               <a:rPr lang="en-US" sz="950" dirty="0">
                 <a:solidFill>
-                  <a:srgbClr val="64748B"/>
+                  <a:srgbClr val="626A84"/>
                 </a:solidFill>
                 <a:latin typeface="Microsoft YaHei" pitchFamily="34" charset="0"/>
                 <a:ea typeface="Microsoft YaHei" pitchFamily="34" charset="-122"/>
@@ -5473,13 +5473,13 @@
           </a:solidFill>
           <a:ln w="12700">
             <a:solidFill>
-              <a:srgbClr val="E2E8F0"/>
+              <a:srgbClr val="E2DFF1"/>
             </a:solidFill>
             <a:prstDash val="solid"/>
           </a:ln>
           <a:effectLst>
-            <a:outerShdw sx="100000" sy="100000" kx="0" ky="0" algn="bl" rotWithShape="0" blurRad="1.0815100265769043e+276" dist="2.7037750664422608e+275" dir="Infinity">
-              <a:srgbClr val="93A8D8">
+            <a:outerShdw sx="100000" sy="100000" kx="0" ky="0" algn="bl" rotWithShape="0" blurRad="1.744367521865889e+284" dist="4.360918804664722e+283" dir="Infinity">
+              <a:srgbClr val="9C93C8">
                 <a:alpha val="Infinity"/>
               </a:srgbClr>
             </a:outerShdw>
@@ -5513,7 +5513,7 @@
             <a:r>
               <a:rPr lang="en-US" sz="2400" b="1" dirty="0">
                 <a:solidFill>
-                  <a:srgbClr val="A855F7"/>
+                  <a:srgbClr val="B02AA8"/>
                 </a:solidFill>
                 <a:latin typeface="Microsoft YaHei" pitchFamily="34" charset="0"/>
                 <a:ea typeface="Microsoft YaHei" pitchFamily="34" charset="-122"/>
@@ -5552,7 +5552,7 @@
             <a:r>
               <a:rPr lang="en-US" sz="1350" b="1" dirty="0">
                 <a:solidFill>
-                  <a:srgbClr val="1E293B"/>
+                  <a:srgbClr val="1E2442"/>
                 </a:solidFill>
                 <a:latin typeface="Microsoft YaHei" pitchFamily="34" charset="0"/>
                 <a:ea typeface="Microsoft YaHei" pitchFamily="34" charset="-122"/>
@@ -5594,7 +5594,7 @@
             <a:r>
               <a:rPr lang="en-US" sz="950" dirty="0">
                 <a:solidFill>
-                  <a:srgbClr val="64748B"/>
+                  <a:srgbClr val="626A84"/>
                 </a:solidFill>
                 <a:latin typeface="Microsoft YaHei" pitchFamily="34" charset="0"/>
                 <a:ea typeface="Microsoft YaHei" pitchFamily="34" charset="-122"/>
@@ -5627,13 +5627,13 @@
           </a:solidFill>
           <a:ln w="12700">
             <a:solidFill>
-              <a:srgbClr val="E2E8F0"/>
+              <a:srgbClr val="E2DFF1"/>
             </a:solidFill>
             <a:prstDash val="solid"/>
           </a:ln>
           <a:effectLst>
-            <a:outerShdw sx="100000" sy="100000" kx="0" ky="0" algn="bl" rotWithShape="0" blurRad="1.3735177337526685e+280" dist="3.433794334381671e+279" dir="Infinity">
-              <a:srgbClr val="93A8D8">
+            <a:outerShdw sx="100000" sy="100000" kx="0" ky="0" algn="bl" rotWithShape="0" blurRad="2.2153467527696788e+288" dist="5.538366881924197e+287" dir="Infinity">
+              <a:srgbClr val="9C93C8">
                 <a:alpha val="Infinity"/>
               </a:srgbClr>
             </a:outerShdw>
@@ -5667,7 +5667,7 @@
             <a:r>
               <a:rPr lang="en-US" sz="2400" b="1" dirty="0">
                 <a:solidFill>
-                  <a:srgbClr val="F59E0B"/>
+                  <a:srgbClr val="A16207"/>
                 </a:solidFill>
                 <a:latin typeface="Microsoft YaHei" pitchFamily="34" charset="0"/>
                 <a:ea typeface="Microsoft YaHei" pitchFamily="34" charset="-122"/>
@@ -5706,7 +5706,7 @@
             <a:r>
               <a:rPr lang="en-US" sz="1350" b="1" dirty="0">
                 <a:solidFill>
-                  <a:srgbClr val="1E293B"/>
+                  <a:srgbClr val="1E2442"/>
                 </a:solidFill>
                 <a:latin typeface="Microsoft YaHei" pitchFamily="34" charset="0"/>
                 <a:ea typeface="Microsoft YaHei" pitchFamily="34" charset="-122"/>
@@ -5748,7 +5748,7 @@
             <a:r>
               <a:rPr lang="en-US" sz="950" dirty="0">
                 <a:solidFill>
-                  <a:srgbClr val="64748B"/>
+                  <a:srgbClr val="626A84"/>
                 </a:solidFill>
                 <a:latin typeface="Microsoft YaHei" pitchFamily="34" charset="0"/>
                 <a:ea typeface="Microsoft YaHei" pitchFamily="34" charset="-122"/>
@@ -5769,11 +5769,11 @@
         <p:spPr>
           <a:xfrm>
             <a:off x="502920" y="3703320"/>
-            <a:ext cx="11155680" cy="1737360"/>
+            <a:ext cx="11155680" cy="1664208"/>
           </a:xfrm>
           <a:prstGeom prst="roundRect">
             <a:avLst>
-              <a:gd name="adj" fmla="val 5263"/>
+              <a:gd name="adj" fmla="val 5495"/>
             </a:avLst>
           </a:prstGeom>
           <a:solidFill>
@@ -5781,13 +5781,13 @@
           </a:solidFill>
           <a:ln w="12700">
             <a:solidFill>
-              <a:srgbClr val="E2E8F0"/>
+              <a:srgbClr val="E2DFF1"/>
             </a:solidFill>
             <a:prstDash val="solid"/>
           </a:ln>
           <a:effectLst>
-            <a:outerShdw sx="100000" sy="100000" kx="0" ky="0" algn="bl" rotWithShape="0" blurRad="1.744367521865889e+284" dist="4.360918804664722e+283" dir="Infinity">
-              <a:srgbClr val="93A8D8">
+            <a:outerShdw sx="100000" sy="100000" kx="0" ky="0" algn="bl" rotWithShape="0" blurRad="2.8134903760174922e+292" dist="7.033725940043731e+291" dir="Infinity">
+              <a:srgbClr val="9C93C8">
                 <a:alpha val="Infinity"/>
               </a:srgbClr>
             </a:outerShdw>
@@ -5821,13 +5821,13 @@
             <a:r>
               <a:rPr lang="en-US" sz="1400" b="1" dirty="0">
                 <a:solidFill>
-                  <a:srgbClr val="6366F1"/>
-                </a:solidFill>
-                <a:latin typeface="Microsoft YaHei" pitchFamily="34" charset="0"/>
-                <a:ea typeface="Microsoft YaHei" pitchFamily="34" charset="-122"/>
-                <a:cs typeface="Microsoft YaHei" pitchFamily="34" charset="-120"/>
-              </a:rPr>
-              <a:t>算例（真实数据）｜技能「大语言模型」</a:t>
+                  <a:srgbClr val="3F4BD8"/>
+                </a:solidFill>
+                <a:latin typeface="Microsoft YaHei" pitchFamily="34" charset="0"/>
+                <a:ea typeface="Microsoft YaHei" pitchFamily="34" charset="-122"/>
+                <a:cs typeface="Microsoft YaHei" pitchFamily="34" charset="-120"/>
+              </a:rPr>
+              <a:t>算例（口径演示）｜技能「大语言模型」</a:t>
             </a:r>
             <a:endParaRPr lang="en-US" sz="1400" dirty="0"/>
           </a:p>
@@ -5860,13 +5860,13 @@
             <a:r>
               <a:rPr lang="en-US" sz="1200" dirty="0">
                 <a:solidFill>
-                  <a:srgbClr val="64748B"/>
-                </a:solidFill>
-                <a:latin typeface="Microsoft YaHei" pitchFamily="34" charset="0"/>
-                <a:ea typeface="Microsoft YaHei" pitchFamily="34" charset="-122"/>
-                <a:cs typeface="Microsoft YaHei" pitchFamily="34" charset="-120"/>
-              </a:rPr>
-              <a:t>9/13 条有效 JD 提及（支持率 0.69）· 2 个平台（多样性 0.67）· 平均新鲜度 0.88 · 全部企业官网（权威度 1.0）· 暂无外部验证（0）</a:t>
+                  <a:srgbClr val="626A84"/>
+                </a:solidFill>
+                <a:latin typeface="Microsoft YaHei" pitchFamily="34" charset="0"/>
+                <a:ea typeface="Microsoft YaHei" pitchFamily="34" charset="-122"/>
+                <a:cs typeface="Microsoft YaHei" pitchFamily="34" charset="-120"/>
+              </a:rPr>
+              <a:t>9/13 条有效 JD 提及（支持率 0.69）· 2 个独立雇主实体（多样性 0.67）· 平均新鲜度 0.88 · 全部企业官网（权威度 1.0）· 暂无外部验证（0）</a:t>
             </a:r>
             <a:endParaRPr lang="en-US" sz="1200" dirty="0"/>
           </a:p>
@@ -5921,36 +5921,57 @@
         </p:nvSpPr>
         <p:spPr>
           <a:xfrm>
-            <a:off x="502920" y="5669280"/>
-            <a:ext cx="11155680" cy="548640"/>
+            <a:off x="502920" y="5522976"/>
+            <a:ext cx="11155680" cy="786384"/>
           </a:xfrm>
           <a:prstGeom prst="rect">
             <a:avLst/>
           </a:prstGeom>
           <a:solidFill>
-            <a:srgbClr val="E0E9FF"/>
+            <a:srgbClr val="EDE9FE"/>
           </a:solidFill>
-          <a:ln/>
-        </p:spPr>
-        <p:txBody>
-          <a:bodyPr wrap="square" rtlCol="0" anchor="ctr"/>
+          <a:ln w="12700">
+            <a:solidFill>
+              <a:srgbClr val="D8D0F5"/>
+            </a:solidFill>
+          </a:ln>
+        </p:spPr>
+        <p:txBody>
+          <a:bodyPr wrap="square" lIns="635" tIns="635" rIns="635" bIns="635" rtlCol="0" anchor="ctr"/>
           <a:lstStyle/>
           <a:p>
             <a:pPr algn="ctr" indent="0" marL="0">
               <a:buNone/>
             </a:pPr>
             <a:r>
-              <a:rPr lang="en-US" sz="1200" b="1" dirty="0">
-                <a:solidFill>
-                  <a:srgbClr val="6366F1"/>
-                </a:solidFill>
-                <a:latin typeface="Microsoft YaHei" pitchFamily="34" charset="0"/>
-                <a:ea typeface="Microsoft YaHei" pitchFamily="34" charset="-122"/>
-                <a:cs typeface="Microsoft YaHei" pitchFamily="34" charset="-120"/>
-              </a:rPr>
-              <a:t>岗位整体置信度 = 粗粒度 active 能力项的权重加权平均；全库岗位均值 0.5613 —— 比上一版低，因为 6 个原本靠联网检索打分（最高 1.000）的新兴岗位已改由真实 JD 语料重建、纳入同一条交叉验证链，公式一个参数未改（3258 项单来源细粒度技能点降级为 candidate，保留可查但不进图谱主视图）</a:t>
-            </a:r>
-            <a:endParaRPr lang="en-US" sz="1200" dirty="0"/>
+              <a:rPr lang="en-US" sz="1050" b="1" dirty="0">
+                <a:solidFill>
+                  <a:srgbClr val="3F4BD8"/>
+                </a:solidFill>
+                <a:latin typeface="Microsoft YaHei" pitchFamily="34" charset="0"/>
+                <a:ea typeface="Microsoft YaHei" pitchFamily="34" charset="-122"/>
+                <a:cs typeface="Microsoft YaHei" pitchFamily="34" charset="-120"/>
+              </a:rPr>
+              <a:t>R6 最终（补齐「必备能力 ≥2 个独立雇主」闸门后）：active 812 / candidate 3604 / deprecated 1231 —— 48 条仅 0–1 个独立雇主支撑的历史遗留行被降级为 candidate，证据链完整保留，这正是闸门在生效。</a:t>
+            </a:r>
+            <a:endParaRPr lang="en-US" sz="1050" dirty="0"/>
+          </a:p>
+          <a:p>
+            <a:pPr algn="ctr" indent="0" marL="0">
+              <a:buNone/>
+            </a:pPr>
+            <a:r>
+              <a:rPr lang="en-US" sz="1050" b="1" dirty="0">
+                <a:solidFill>
+                  <a:srgbClr val="3F4BD8"/>
+                </a:solidFill>
+                <a:latin typeface="Microsoft YaHei" pitchFamily="34" charset="0"/>
+                <a:ea typeface="Microsoft YaHei" pitchFamily="34" charset="-122"/>
+                <a:cs typeface="Microsoft YaHei" pitchFamily="34" charset="-120"/>
+              </a:rPr>
+              <a:t>全库均值 0.5502（2026-08-30 口径；含时效性因子，约 -0.0003/天 自然衰减，每日 02:30 批算重跑）（既有 0.5271 / 新兴 0.6507）：均值上移源于最低置信度的那批行被移出 active，并非单条能力项的置信度提高。早期材料 0.6167 / 0.5613 / 0.4783 为历史快照。</a:t>
+            </a:r>
+            <a:endParaRPr lang="en-US" sz="1050" dirty="0"/>
           </a:p>
         </p:txBody>
       </p:sp>
@@ -5981,7 +6002,7 @@
             <a:r>
               <a:rPr lang="en-US" sz="900" dirty="0">
                 <a:solidFill>
-                  <a:srgbClr val="94A3B8"/>
+                  <a:srgbClr val="767D92"/>
                 </a:solidFill>
                 <a:latin typeface="Microsoft YaHei" pitchFamily="34" charset="0"/>
                 <a:ea typeface="Microsoft YaHei" pitchFamily="34" charset="-122"/>
@@ -6020,7 +6041,7 @@
             <a:r>
               <a:rPr lang="en-US" sz="900" dirty="0">
                 <a:solidFill>
-                  <a:srgbClr val="94A3B8"/>
+                  <a:srgbClr val="767D92"/>
                 </a:solidFill>
                 <a:latin typeface="Microsoft YaHei" pitchFamily="34" charset="0"/>
                 <a:ea typeface="Microsoft YaHei" pitchFamily="34" charset="-122"/>
@@ -6046,7 +6067,7 @@
     <p:bg>
       <p:bgPr>
         <a:solidFill>
-          <a:srgbClr val="EEF4FF"/>
+          <a:srgbClr val="F3F1FB"/>
         </a:solidFill>
       </p:bgPr>
     </p:bg>
@@ -6081,12 +6102,12 @@
             </a:avLst>
           </a:prstGeom>
           <a:solidFill>
-            <a:srgbClr val="6366F1"/>
+            <a:srgbClr val="3F4BD8"/>
           </a:solidFill>
           <a:ln/>
           <a:effectLst>
-            <a:outerShdw sx="100000" sy="100000" kx="0" ky="0" algn="bl" rotWithShape="0" blurRad="2.2153467527696788e+288" dist="5.538366881924197e+287" dir="Infinity">
-              <a:srgbClr val="93A8D8">
+            <a:outerShdw sx="100000" sy="100000" kx="0" ky="0" algn="bl" rotWithShape="0" blurRad="3.573132777542215e+296" dist="8.932831943855538e+295" dir="Infinity">
+              <a:srgbClr val="9C93C8">
                 <a:alpha val="Infinity"/>
               </a:srgbClr>
             </a:outerShdw>
@@ -6159,7 +6180,7 @@
             <a:r>
               <a:rPr lang="en-US" sz="2600" b="1" dirty="0">
                 <a:solidFill>
-                  <a:srgbClr val="1E293B"/>
+                  <a:srgbClr val="1E2442"/>
                 </a:solidFill>
                 <a:latin typeface="Microsoft YaHei" pitchFamily="34" charset="0"/>
                 <a:ea typeface="Microsoft YaHei" pitchFamily="34" charset="-122"/>
@@ -6198,7 +6219,7 @@
             <a:r>
               <a:rPr lang="en-US" sz="1250" dirty="0">
                 <a:solidFill>
-                  <a:srgbClr val="64748B"/>
+                  <a:srgbClr val="626A84"/>
                 </a:solidFill>
                 <a:latin typeface="Microsoft YaHei" pitchFamily="34" charset="0"/>
                 <a:ea typeface="Microsoft YaHei" pitchFamily="34" charset="-122"/>
@@ -6237,7 +6258,7 @@
             <a:r>
               <a:rPr lang="en-US" sz="1000" dirty="0">
                 <a:solidFill>
-                  <a:srgbClr val="94A3B8"/>
+                  <a:srgbClr val="767D92"/>
                 </a:solidFill>
                 <a:latin typeface="Microsoft YaHei" pitchFamily="34" charset="0"/>
                 <a:ea typeface="Microsoft YaHei" pitchFamily="34" charset="-122"/>
@@ -6258,11 +6279,11 @@
         <p:spPr>
           <a:xfrm>
             <a:off x="548640" y="1463040"/>
-            <a:ext cx="3520440" cy="2286000"/>
+            <a:ext cx="3520440" cy="2377440"/>
           </a:xfrm>
           <a:prstGeom prst="roundRect">
             <a:avLst>
-              <a:gd name="adj" fmla="val 4000"/>
+              <a:gd name="adj" fmla="val 3846"/>
             </a:avLst>
           </a:prstGeom>
           <a:solidFill>
@@ -6270,13 +6291,13 @@
           </a:solidFill>
           <a:ln w="12700">
             <a:solidFill>
-              <a:srgbClr val="E2E8F0"/>
+              <a:srgbClr val="E2DFF1"/>
             </a:solidFill>
             <a:prstDash val="solid"/>
           </a:ln>
           <a:effectLst>
-            <a:outerShdw sx="100000" sy="100000" kx="0" ky="0" algn="bl" rotWithShape="0" blurRad="2.8134903760174922e+292" dist="7.033725940043731e+291" dir="Infinity">
-              <a:srgbClr val="93A8D8">
+            <a:outerShdw sx="100000" sy="100000" kx="0" ky="0" algn="bl" rotWithShape="0" blurRad="4.537878627478613e+300" dist="1.1344696568696533e+300" dir="Infinity">
+              <a:srgbClr val="9C93C8">
                 <a:alpha val="Infinity"/>
               </a:srgbClr>
             </a:outerShdw>
@@ -6291,7 +6312,7 @@
         </p:nvSpPr>
         <p:spPr>
           <a:xfrm>
-            <a:off x="548640" y="1737360"/>
+            <a:off x="548640" y="1719072"/>
             <a:ext cx="3520440" cy="914400"/>
           </a:xfrm>
           <a:prstGeom prst="rect">
@@ -6310,13 +6331,13 @@
             <a:r>
               <a:rPr lang="en-US" sz="4800" b="1" dirty="0">
                 <a:solidFill>
-                  <a:srgbClr val="10B981"/>
-                </a:solidFill>
-                <a:latin typeface="Microsoft YaHei" pitchFamily="34" charset="0"/>
-                <a:ea typeface="Microsoft YaHei" pitchFamily="34" charset="-122"/>
-                <a:cs typeface="Microsoft YaHei" pitchFamily="34" charset="-120"/>
-              </a:rPr>
-              <a:t>98.24%</a:t>
+                  <a:srgbClr val="047857"/>
+                </a:solidFill>
+                <a:latin typeface="Microsoft YaHei" pitchFamily="34" charset="0"/>
+                <a:ea typeface="Microsoft YaHei" pitchFamily="34" charset="-122"/>
+                <a:cs typeface="Microsoft YaHei" pitchFamily="34" charset="-120"/>
+              </a:rPr>
+              <a:t>98.25%</a:t>
             </a:r>
             <a:endParaRPr lang="en-US" sz="4800" dirty="0"/>
           </a:p>
@@ -6330,8 +6351,8 @@
         </p:nvSpPr>
         <p:spPr>
           <a:xfrm>
-            <a:off x="548640" y="2743200"/>
-            <a:ext cx="3520440" cy="411480"/>
+            <a:off x="548640" y="2724912"/>
+            <a:ext cx="3520440" cy="402336"/>
           </a:xfrm>
           <a:prstGeom prst="rect">
             <a:avLst/>
@@ -6349,7 +6370,7 @@
             <a:r>
               <a:rPr lang="en-US" sz="1600" b="1" dirty="0">
                 <a:solidFill>
-                  <a:srgbClr val="1E293B"/>
+                  <a:srgbClr val="1E2442"/>
                 </a:solidFill>
                 <a:latin typeface="Microsoft YaHei" pitchFamily="34" charset="0"/>
                 <a:ea typeface="Microsoft YaHei" pitchFamily="34" charset="-122"/>
@@ -6369,8 +6390,8 @@
         </p:nvSpPr>
         <p:spPr>
           <a:xfrm>
-            <a:off x="548640" y="3200400"/>
-            <a:ext cx="3520440" cy="365760"/>
+            <a:off x="548640" y="3145536"/>
+            <a:ext cx="3520440" cy="274320"/>
           </a:xfrm>
           <a:prstGeom prst="rect">
             <a:avLst/>
@@ -6388,7 +6409,7 @@
             <a:r>
               <a:rPr lang="en-US" sz="1150" dirty="0">
                 <a:solidFill>
-                  <a:srgbClr val="64748B"/>
+                  <a:srgbClr val="626A84"/>
                 </a:solidFill>
                 <a:latin typeface="Microsoft YaHei" pitchFamily="34" charset="0"/>
                 <a:ea typeface="Microsoft YaHei" pitchFamily="34" charset="-122"/>
@@ -6408,7 +6429,7 @@
         </p:nvSpPr>
         <p:spPr>
           <a:xfrm>
-            <a:off x="548640" y="3456432"/>
+            <a:off x="548640" y="3438144"/>
             <a:ext cx="3520440" cy="274320"/>
           </a:xfrm>
           <a:prstGeom prst="rect">
@@ -6427,7 +6448,7 @@
             <a:r>
               <a:rPr lang="en-US" sz="1100" b="1" dirty="0">
                 <a:solidFill>
-                  <a:srgbClr val="10B981"/>
+                  <a:srgbClr val="047857"/>
                 </a:solidFill>
                 <a:latin typeface="Microsoft YaHei" pitchFamily="34" charset="0"/>
                 <a:ea typeface="Microsoft YaHei" pitchFamily="34" charset="-122"/>
@@ -6447,12 +6468,12 @@
         </p:nvSpPr>
         <p:spPr>
           <a:xfrm>
-            <a:off x="4343400" y="1463040"/>
-            <a:ext cx="3520440" cy="2286000"/>
+            <a:off x="4320540" y="1463040"/>
+            <a:ext cx="3520440" cy="2377440"/>
           </a:xfrm>
           <a:prstGeom prst="roundRect">
             <a:avLst>
-              <a:gd name="adj" fmla="val 4000"/>
+              <a:gd name="adj" fmla="val 3846"/>
             </a:avLst>
           </a:prstGeom>
           <a:solidFill>
@@ -6460,13 +6481,13 @@
           </a:solidFill>
           <a:ln w="12700">
             <a:solidFill>
-              <a:srgbClr val="E2E8F0"/>
+              <a:srgbClr val="E2DFF1"/>
             </a:solidFill>
             <a:prstDash val="solid"/>
           </a:ln>
           <a:effectLst>
-            <a:outerShdw sx="100000" sy="100000" kx="0" ky="0" algn="bl" rotWithShape="0" blurRad="3.573132777542215e+296" dist="8.932831943855538e+295" dir="Infinity">
-              <a:srgbClr val="93A8D8">
+            <a:outerShdw sx="100000" sy="100000" kx="0" ky="0" algn="bl" rotWithShape="0" blurRad="5.763105856897839e+304" dist="1.4407764642244596e+304" dir="Infinity">
+              <a:srgbClr val="9C93C8">
                 <a:alpha val="Infinity"/>
               </a:srgbClr>
             </a:outerShdw>
@@ -6481,7 +6502,7 @@
         </p:nvSpPr>
         <p:spPr>
           <a:xfrm>
-            <a:off x="4343400" y="1737360"/>
+            <a:off x="4320540" y="1719072"/>
             <a:ext cx="3520440" cy="914400"/>
           </a:xfrm>
           <a:prstGeom prst="rect">
@@ -6500,7 +6521,7 @@
             <a:r>
               <a:rPr lang="en-US" sz="4800" b="1" dirty="0">
                 <a:solidFill>
-                  <a:srgbClr val="10B981"/>
+                  <a:srgbClr val="047857"/>
                 </a:solidFill>
                 <a:latin typeface="Microsoft YaHei" pitchFamily="34" charset="0"/>
                 <a:ea typeface="Microsoft YaHei" pitchFamily="34" charset="-122"/>
@@ -6520,8 +6541,8 @@
         </p:nvSpPr>
         <p:spPr>
           <a:xfrm>
-            <a:off x="4343400" y="2743200"/>
-            <a:ext cx="3520440" cy="411480"/>
+            <a:off x="4320540" y="2724912"/>
+            <a:ext cx="3520440" cy="402336"/>
           </a:xfrm>
           <a:prstGeom prst="rect">
             <a:avLst/>
@@ -6539,7 +6560,7 @@
             <a:r>
               <a:rPr lang="en-US" sz="1600" b="1" dirty="0">
                 <a:solidFill>
-                  <a:srgbClr val="1E293B"/>
+                  <a:srgbClr val="1E2442"/>
                 </a:solidFill>
                 <a:latin typeface="Microsoft YaHei" pitchFamily="34" charset="0"/>
                 <a:ea typeface="Microsoft YaHei" pitchFamily="34" charset="-122"/>
@@ -6559,8 +6580,8 @@
         </p:nvSpPr>
         <p:spPr>
           <a:xfrm>
-            <a:off x="4343400" y="3200400"/>
-            <a:ext cx="3520440" cy="365760"/>
+            <a:off x="4320540" y="3145536"/>
+            <a:ext cx="3520440" cy="274320"/>
           </a:xfrm>
           <a:prstGeom prst="rect">
             <a:avLst/>
@@ -6578,7 +6599,7 @@
             <a:r>
               <a:rPr lang="en-US" sz="1150" dirty="0">
                 <a:solidFill>
-                  <a:srgbClr val="64748B"/>
+                  <a:srgbClr val="626A84"/>
                 </a:solidFill>
                 <a:latin typeface="Microsoft YaHei" pitchFamily="34" charset="0"/>
                 <a:ea typeface="Microsoft YaHei" pitchFamily="34" charset="-122"/>
@@ -6598,7 +6619,7 @@
         </p:nvSpPr>
         <p:spPr>
           <a:xfrm>
-            <a:off x="4343400" y="3456432"/>
+            <a:off x="4320540" y="3438144"/>
             <a:ext cx="3520440" cy="274320"/>
           </a:xfrm>
           <a:prstGeom prst="rect">
@@ -6617,7 +6638,7 @@
             <a:r>
               <a:rPr lang="en-US" sz="1100" b="1" dirty="0">
                 <a:solidFill>
-                  <a:srgbClr val="10B981"/>
+                  <a:srgbClr val="047857"/>
                 </a:solidFill>
                 <a:latin typeface="Microsoft YaHei" pitchFamily="34" charset="0"/>
                 <a:ea typeface="Microsoft YaHei" pitchFamily="34" charset="-122"/>
@@ -6637,12 +6658,12 @@
         </p:nvSpPr>
         <p:spPr>
           <a:xfrm>
-            <a:off x="8138160" y="1463040"/>
-            <a:ext cx="3520440" cy="2286000"/>
+            <a:off x="8092440" y="1463040"/>
+            <a:ext cx="3520440" cy="2377440"/>
           </a:xfrm>
           <a:prstGeom prst="roundRect">
             <a:avLst>
-              <a:gd name="adj" fmla="val 4000"/>
+              <a:gd name="adj" fmla="val 3846"/>
             </a:avLst>
           </a:prstGeom>
           <a:solidFill>
@@ -6650,13 +6671,13 @@
           </a:solidFill>
           <a:ln w="12700">
             <a:solidFill>
-              <a:srgbClr val="E2E8F0"/>
+              <a:srgbClr val="E2DFF1"/>
             </a:solidFill>
             <a:prstDash val="solid"/>
           </a:ln>
           <a:effectLst>
-            <a:outerShdw sx="100000" sy="100000" kx="0" ky="0" algn="bl" rotWithShape="0" blurRad="4.537878627478613e+300" dist="1.1344696568696533e+300" dir="Infinity">
-              <a:srgbClr val="93A8D8">
+            <a:outerShdw sx="100000" sy="100000" kx="0" ky="0" algn="bl" rotWithShape="0" blurRad="Infinity" dist="Infinity" dir="Infinity">
+              <a:srgbClr val="9C93C8">
                 <a:alpha val="Infinity"/>
               </a:srgbClr>
             </a:outerShdw>
@@ -6671,7 +6692,7 @@
         </p:nvSpPr>
         <p:spPr>
           <a:xfrm>
-            <a:off x="8138160" y="1737360"/>
+            <a:off x="8092440" y="1719072"/>
             <a:ext cx="3520440" cy="914400"/>
           </a:xfrm>
           <a:prstGeom prst="rect">
@@ -6690,7 +6711,7 @@
             <a:r>
               <a:rPr lang="en-US" sz="4800" b="1" dirty="0">
                 <a:solidFill>
-                  <a:srgbClr val="10B981"/>
+                  <a:srgbClr val="047857"/>
                 </a:solidFill>
                 <a:latin typeface="Microsoft YaHei" pitchFamily="34" charset="0"/>
                 <a:ea typeface="Microsoft YaHei" pitchFamily="34" charset="-122"/>
@@ -6710,8 +6731,8 @@
         </p:nvSpPr>
         <p:spPr>
           <a:xfrm>
-            <a:off x="8138160" y="2743200"/>
-            <a:ext cx="3520440" cy="411480"/>
+            <a:off x="8092440" y="2724912"/>
+            <a:ext cx="3520440" cy="402336"/>
           </a:xfrm>
           <a:prstGeom prst="rect">
             <a:avLst/>
@@ -6729,7 +6750,7 @@
             <a:r>
               <a:rPr lang="en-US" sz="1600" b="1" dirty="0">
                 <a:solidFill>
-                  <a:srgbClr val="1E293B"/>
+                  <a:srgbClr val="1E2442"/>
                 </a:solidFill>
                 <a:latin typeface="Microsoft YaHei" pitchFamily="34" charset="0"/>
                 <a:ea typeface="Microsoft YaHei" pitchFamily="34" charset="-122"/>
@@ -6749,8 +6770,8 @@
         </p:nvSpPr>
         <p:spPr>
           <a:xfrm>
-            <a:off x="8138160" y="3200400"/>
-            <a:ext cx="3520440" cy="365760"/>
+            <a:off x="8092440" y="3145536"/>
+            <a:ext cx="3520440" cy="274320"/>
           </a:xfrm>
           <a:prstGeom prst="rect">
             <a:avLst/>
@@ -6768,7 +6789,7 @@
             <a:r>
               <a:rPr lang="en-US" sz="1150" dirty="0">
                 <a:solidFill>
-                  <a:srgbClr val="64748B"/>
+                  <a:srgbClr val="626A84"/>
                 </a:solidFill>
                 <a:latin typeface="Microsoft YaHei" pitchFamily="34" charset="0"/>
                 <a:ea typeface="Microsoft YaHei" pitchFamily="34" charset="-122"/>
@@ -6788,7 +6809,7 @@
         </p:nvSpPr>
         <p:spPr>
           <a:xfrm>
-            <a:off x="8138160" y="3456432"/>
+            <a:off x="8092440" y="3438144"/>
             <a:ext cx="3520440" cy="274320"/>
           </a:xfrm>
           <a:prstGeom prst="rect">
@@ -6807,7 +6828,7 @@
             <a:r>
               <a:rPr lang="en-US" sz="1100" b="1" dirty="0">
                 <a:solidFill>
-                  <a:srgbClr val="10B981"/>
+                  <a:srgbClr val="047857"/>
                 </a:solidFill>
                 <a:latin typeface="Microsoft YaHei" pitchFamily="34" charset="0"/>
                 <a:ea typeface="Microsoft YaHei" pitchFamily="34" charset="-122"/>
@@ -6827,8 +6848,8 @@
         </p:nvSpPr>
         <p:spPr>
           <a:xfrm>
-            <a:off x="548640" y="3977640"/>
-            <a:ext cx="2651760" cy="1371600"/>
+            <a:off x="548640" y="4069080"/>
+            <a:ext cx="2628900" cy="1371600"/>
           </a:xfrm>
           <a:prstGeom prst="roundRect">
             <a:avLst>
@@ -6840,13 +6861,13 @@
           </a:solidFill>
           <a:ln w="12700">
             <a:solidFill>
-              <a:srgbClr val="E2E8F0"/>
+              <a:srgbClr val="E2DFF1"/>
             </a:solidFill>
             <a:prstDash val="solid"/>
           </a:ln>
           <a:effectLst>
-            <a:outerShdw sx="100000" sy="100000" kx="0" ky="0" algn="bl" rotWithShape="0" blurRad="5.763105856897839e+304" dist="1.4407764642244596e+304" dir="Infinity">
-              <a:srgbClr val="93A8D8">
+            <a:outerShdw sx="100000" sy="100000" kx="0" ky="0" algn="bl" rotWithShape="0" blurRad="Infinity" dist="Infinity" dir="Infinity">
+              <a:srgbClr val="9C93C8">
                 <a:alpha val="Infinity"/>
               </a:srgbClr>
             </a:outerShdw>
@@ -6861,8 +6882,8 @@
         </p:nvSpPr>
         <p:spPr>
           <a:xfrm>
-            <a:off x="548640" y="4160520"/>
-            <a:ext cx="2651760" cy="640080"/>
+            <a:off x="548640" y="4251960"/>
+            <a:ext cx="2628900" cy="640080"/>
           </a:xfrm>
           <a:prstGeom prst="rect">
             <a:avLst/>
@@ -6880,7 +6901,7 @@
             <a:r>
               <a:rPr lang="en-US" sz="2600" b="1" dirty="0">
                 <a:solidFill>
-                  <a:srgbClr val="6366F1"/>
+                  <a:srgbClr val="3F4BD8"/>
                 </a:solidFill>
                 <a:latin typeface="Microsoft YaHei" pitchFamily="34" charset="0"/>
                 <a:ea typeface="Microsoft YaHei" pitchFamily="34" charset="-122"/>
@@ -6900,8 +6921,8 @@
         </p:nvSpPr>
         <p:spPr>
           <a:xfrm>
-            <a:off x="548640" y="4800600"/>
-            <a:ext cx="2651760" cy="365760"/>
+            <a:off x="548640" y="4892040"/>
+            <a:ext cx="2628900" cy="365760"/>
           </a:xfrm>
           <a:prstGeom prst="rect">
             <a:avLst/>
@@ -6919,7 +6940,7 @@
             <a:r>
               <a:rPr lang="en-US" sz="1200" dirty="0">
                 <a:solidFill>
-                  <a:srgbClr val="64748B"/>
+                  <a:srgbClr val="626A84"/>
                 </a:solidFill>
                 <a:latin typeface="Microsoft YaHei" pitchFamily="34" charset="0"/>
                 <a:ea typeface="Microsoft YaHei" pitchFamily="34" charset="-122"/>
@@ -6939,8 +6960,8 @@
         </p:nvSpPr>
         <p:spPr>
           <a:xfrm>
-            <a:off x="3383280" y="3977640"/>
-            <a:ext cx="2651760" cy="1371600"/>
+            <a:off x="3360420" y="4069080"/>
+            <a:ext cx="2628900" cy="1371600"/>
           </a:xfrm>
           <a:prstGeom prst="roundRect">
             <a:avLst>
@@ -6952,13 +6973,13 @@
           </a:solidFill>
           <a:ln w="12700">
             <a:solidFill>
-              <a:srgbClr val="E2E8F0"/>
+              <a:srgbClr val="E2DFF1"/>
             </a:solidFill>
             <a:prstDash val="solid"/>
           </a:ln>
           <a:effectLst>
             <a:outerShdw sx="100000" sy="100000" kx="0" ky="0" algn="bl" rotWithShape="0" blurRad="Infinity" dist="Infinity" dir="Infinity">
-              <a:srgbClr val="93A8D8">
+              <a:srgbClr val="9C93C8">
                 <a:alpha val="Infinity"/>
               </a:srgbClr>
             </a:outerShdw>
@@ -6973,8 +6994,8 @@
         </p:nvSpPr>
         <p:spPr>
           <a:xfrm>
-            <a:off x="3383280" y="4160520"/>
-            <a:ext cx="2651760" cy="640080"/>
+            <a:off x="3360420" y="4251960"/>
+            <a:ext cx="2628900" cy="640080"/>
           </a:xfrm>
           <a:prstGeom prst="rect">
             <a:avLst/>
@@ -6992,7 +7013,7 @@
             <a:r>
               <a:rPr lang="en-US" sz="2600" b="1" dirty="0">
                 <a:solidFill>
-                  <a:srgbClr val="6366F1"/>
+                  <a:srgbClr val="3F4BD8"/>
                 </a:solidFill>
                 <a:latin typeface="Microsoft YaHei" pitchFamily="34" charset="0"/>
                 <a:ea typeface="Microsoft YaHei" pitchFamily="34" charset="-122"/>
@@ -7012,8 +7033,8 @@
         </p:nvSpPr>
         <p:spPr>
           <a:xfrm>
-            <a:off x="3383280" y="4800600"/>
-            <a:ext cx="2651760" cy="365760"/>
+            <a:off x="3360420" y="4892040"/>
+            <a:ext cx="2628900" cy="365760"/>
           </a:xfrm>
           <a:prstGeom prst="rect">
             <a:avLst/>
@@ -7031,7 +7052,7 @@
             <a:r>
               <a:rPr lang="en-US" sz="1200" dirty="0">
                 <a:solidFill>
-                  <a:srgbClr val="64748B"/>
+                  <a:srgbClr val="626A84"/>
                 </a:solidFill>
                 <a:latin typeface="Microsoft YaHei" pitchFamily="34" charset="0"/>
                 <a:ea typeface="Microsoft YaHei" pitchFamily="34" charset="-122"/>
@@ -7051,8 +7072,8 @@
         </p:nvSpPr>
         <p:spPr>
           <a:xfrm>
-            <a:off x="6217920" y="3977640"/>
-            <a:ext cx="2651760" cy="1371600"/>
+            <a:off x="6172200" y="4069080"/>
+            <a:ext cx="2628900" cy="1371600"/>
           </a:xfrm>
           <a:prstGeom prst="roundRect">
             <a:avLst>
@@ -7064,13 +7085,13 @@
           </a:solidFill>
           <a:ln w="12700">
             <a:solidFill>
-              <a:srgbClr val="E2E8F0"/>
+              <a:srgbClr val="E2DFF1"/>
             </a:solidFill>
             <a:prstDash val="solid"/>
           </a:ln>
           <a:effectLst>
             <a:outerShdw sx="100000" sy="100000" kx="0" ky="0" algn="bl" rotWithShape="0" blurRad="Infinity" dist="Infinity" dir="Infinity">
-              <a:srgbClr val="93A8D8">
+              <a:srgbClr val="9C93C8">
                 <a:alpha val="Infinity"/>
               </a:srgbClr>
             </a:outerShdw>
@@ -7085,8 +7106,8 @@
         </p:nvSpPr>
         <p:spPr>
           <a:xfrm>
-            <a:off x="6217920" y="4160520"/>
-            <a:ext cx="2651760" cy="640080"/>
+            <a:off x="6172200" y="4251960"/>
+            <a:ext cx="2628900" cy="640080"/>
           </a:xfrm>
           <a:prstGeom prst="rect">
             <a:avLst/>
@@ -7104,7 +7125,7 @@
             <a:r>
               <a:rPr lang="en-US" sz="2600" b="1" dirty="0">
                 <a:solidFill>
-                  <a:srgbClr val="6366F1"/>
+                  <a:srgbClr val="3F4BD8"/>
                 </a:solidFill>
                 <a:latin typeface="Microsoft YaHei" pitchFamily="34" charset="0"/>
                 <a:ea typeface="Microsoft YaHei" pitchFamily="34" charset="-122"/>
@@ -7124,8 +7145,8 @@
         </p:nvSpPr>
         <p:spPr>
           <a:xfrm>
-            <a:off x="6217920" y="4800600"/>
-            <a:ext cx="2651760" cy="365760"/>
+            <a:off x="6172200" y="4892040"/>
+            <a:ext cx="2628900" cy="365760"/>
           </a:xfrm>
           <a:prstGeom prst="rect">
             <a:avLst/>
@@ -7143,7 +7164,7 @@
             <a:r>
               <a:rPr lang="en-US" sz="1200" dirty="0">
                 <a:solidFill>
-                  <a:srgbClr val="64748B"/>
+                  <a:srgbClr val="626A84"/>
                 </a:solidFill>
                 <a:latin typeface="Microsoft YaHei" pitchFamily="34" charset="0"/>
                 <a:ea typeface="Microsoft YaHei" pitchFamily="34" charset="-122"/>
@@ -7163,8 +7184,8 @@
         </p:nvSpPr>
         <p:spPr>
           <a:xfrm>
-            <a:off x="9052560" y="3977640"/>
-            <a:ext cx="2651760" cy="1371600"/>
+            <a:off x="8983980" y="4069080"/>
+            <a:ext cx="2628900" cy="1371600"/>
           </a:xfrm>
           <a:prstGeom prst="roundRect">
             <a:avLst>
@@ -7176,13 +7197,13 @@
           </a:solidFill>
           <a:ln w="12700">
             <a:solidFill>
-              <a:srgbClr val="E2E8F0"/>
+              <a:srgbClr val="E2DFF1"/>
             </a:solidFill>
             <a:prstDash val="solid"/>
           </a:ln>
           <a:effectLst>
             <a:outerShdw sx="100000" sy="100000" kx="0" ky="0" algn="bl" rotWithShape="0" blurRad="Infinity" dist="Infinity" dir="Infinity">
-              <a:srgbClr val="93A8D8">
+              <a:srgbClr val="9C93C8">
                 <a:alpha val="Infinity"/>
               </a:srgbClr>
             </a:outerShdw>
@@ -7197,8 +7218,8 @@
         </p:nvSpPr>
         <p:spPr>
           <a:xfrm>
-            <a:off x="9052560" y="4160520"/>
-            <a:ext cx="2651760" cy="640080"/>
+            <a:off x="8983980" y="4251960"/>
+            <a:ext cx="2628900" cy="640080"/>
           </a:xfrm>
           <a:prstGeom prst="rect">
             <a:avLst/>
@@ -7216,7 +7237,7 @@
             <a:r>
               <a:rPr lang="en-US" sz="2600" b="1" dirty="0">
                 <a:solidFill>
-                  <a:srgbClr val="6366F1"/>
+                  <a:srgbClr val="3F4BD8"/>
                 </a:solidFill>
                 <a:latin typeface="Microsoft YaHei" pitchFamily="34" charset="0"/>
                 <a:ea typeface="Microsoft YaHei" pitchFamily="34" charset="-122"/>
@@ -7236,8 +7257,8 @@
         </p:nvSpPr>
         <p:spPr>
           <a:xfrm>
-            <a:off x="9052560" y="4800600"/>
-            <a:ext cx="2651760" cy="365760"/>
+            <a:off x="8983980" y="4892040"/>
+            <a:ext cx="2628900" cy="365760"/>
           </a:xfrm>
           <a:prstGeom prst="rect">
             <a:avLst/>
@@ -7255,7 +7276,7 @@
             <a:r>
               <a:rPr lang="en-US" sz="1200" dirty="0">
                 <a:solidFill>
-                  <a:srgbClr val="64748B"/>
+                  <a:srgbClr val="626A84"/>
                 </a:solidFill>
                 <a:latin typeface="Microsoft YaHei" pitchFamily="34" charset="0"/>
                 <a:ea typeface="Microsoft YaHei" pitchFamily="34" charset="-122"/>
@@ -7286,7 +7307,7 @@
           </a:solidFill>
           <a:ln w="12700">
             <a:solidFill>
-              <a:srgbClr val="E2E8F0"/>
+              <a:srgbClr val="E2DFF1"/>
             </a:solidFill>
           </a:ln>
         </p:spPr>
@@ -7300,7 +7321,7 @@
             <a:r>
               <a:rPr lang="en-US" sz="1200" dirty="0">
                 <a:solidFill>
-                  <a:srgbClr val="64748B"/>
+                  <a:srgbClr val="626A84"/>
                 </a:solidFill>
                 <a:latin typeface="Microsoft YaHei" pitchFamily="34" charset="0"/>
                 <a:ea typeface="Microsoft YaHei" pitchFamily="34" charset="-122"/>
@@ -7339,7 +7360,7 @@
             <a:r>
               <a:rPr lang="en-US" sz="900" dirty="0">
                 <a:solidFill>
-                  <a:srgbClr val="94A3B8"/>
+                  <a:srgbClr val="767D92"/>
                 </a:solidFill>
                 <a:latin typeface="Microsoft YaHei" pitchFamily="34" charset="0"/>
                 <a:ea typeface="Microsoft YaHei" pitchFamily="34" charset="-122"/>
@@ -7378,7 +7399,7 @@
             <a:r>
               <a:rPr lang="en-US" sz="900" dirty="0">
                 <a:solidFill>
-                  <a:srgbClr val="94A3B8"/>
+                  <a:srgbClr val="767D92"/>
                 </a:solidFill>
                 <a:latin typeface="Microsoft YaHei" pitchFamily="34" charset="0"/>
                 <a:ea typeface="Microsoft YaHei" pitchFamily="34" charset="-122"/>
@@ -7404,7 +7425,7 @@
     <p:bg>
       <p:bgPr>
         <a:solidFill>
-          <a:srgbClr val="EEF4FF"/>
+          <a:srgbClr val="F3F1FB"/>
         </a:solidFill>
       </p:bgPr>
     </p:bg>
@@ -7439,12 +7460,12 @@
             </a:avLst>
           </a:prstGeom>
           <a:solidFill>
-            <a:srgbClr val="6366F1"/>
+            <a:srgbClr val="3F4BD8"/>
           </a:solidFill>
           <a:ln/>
           <a:effectLst>
             <a:outerShdw sx="100000" sy="100000" kx="0" ky="0" algn="bl" rotWithShape="0" blurRad="Infinity" dist="Infinity" dir="Infinity">
-              <a:srgbClr val="93A8D8">
+              <a:srgbClr val="9C93C8">
                 <a:alpha val="Infinity"/>
               </a:srgbClr>
             </a:outerShdw>
@@ -7517,7 +7538,7 @@
             <a:r>
               <a:rPr lang="en-US" sz="2600" b="1" dirty="0">
                 <a:solidFill>
-                  <a:srgbClr val="1E293B"/>
+                  <a:srgbClr val="1E2442"/>
                 </a:solidFill>
                 <a:latin typeface="Microsoft YaHei" pitchFamily="34" charset="0"/>
                 <a:ea typeface="Microsoft YaHei" pitchFamily="34" charset="-122"/>
@@ -7556,7 +7577,7 @@
             <a:r>
               <a:rPr lang="en-US" sz="1250" dirty="0">
                 <a:solidFill>
-                  <a:srgbClr val="64748B"/>
+                  <a:srgbClr val="626A84"/>
                 </a:solidFill>
                 <a:latin typeface="Microsoft YaHei" pitchFamily="34" charset="0"/>
                 <a:ea typeface="Microsoft YaHei" pitchFamily="34" charset="-122"/>
@@ -7595,7 +7616,7 @@
             <a:r>
               <a:rPr lang="en-US" sz="1000" dirty="0">
                 <a:solidFill>
-                  <a:srgbClr val="94A3B8"/>
+                  <a:srgbClr val="767D92"/>
                 </a:solidFill>
                 <a:latin typeface="Microsoft YaHei" pitchFamily="34" charset="0"/>
                 <a:ea typeface="Microsoft YaHei" pitchFamily="34" charset="-122"/>
@@ -7628,13 +7649,13 @@
           </a:solidFill>
           <a:ln w="12700">
             <a:solidFill>
-              <a:srgbClr val="E2E8F0"/>
+              <a:srgbClr val="E2DFF1"/>
             </a:solidFill>
             <a:prstDash val="solid"/>
           </a:ln>
           <a:effectLst>
             <a:outerShdw sx="100000" sy="100000" kx="0" ky="0" algn="bl" rotWithShape="0" blurRad="Infinity" dist="Infinity" dir="Infinity">
-              <a:srgbClr val="93A8D8">
+              <a:srgbClr val="9C93C8">
                 <a:alpha val="Infinity"/>
               </a:srgbClr>
             </a:outerShdw>
@@ -7668,7 +7689,7 @@
             <a:r>
               <a:rPr lang="en-US" sz="1600" b="1" dirty="0">
                 <a:solidFill>
-                  <a:srgbClr val="6366F1"/>
+                  <a:srgbClr val="3F4BD8"/>
                 </a:solidFill>
                 <a:latin typeface="Microsoft YaHei" pitchFamily="34" charset="0"/>
                 <a:ea typeface="Microsoft YaHei" pitchFamily="34" charset="-122"/>
@@ -7698,19 +7719,19 @@
           <a:ln/>
         </p:spPr>
         <p:txBody>
-          <a:bodyPr wrap="square" rtlCol="0" anchor="ctr"/>
+          <a:bodyPr wrap="square" rtlCol="0" anchor="t"/>
           <a:lstStyle/>
           <a:p>
             <a:pPr indent="0" marL="0">
               <a:spcAft>
-                <a:spcPts val="700"/>
+                <a:spcPts val="1500"/>
               </a:spcAft>
               <a:buNone/>
             </a:pPr>
             <a:r>
               <a:rPr lang="en-US" sz="1250" dirty="0">
                 <a:solidFill>
-                  <a:srgbClr val="64748B"/>
+                  <a:srgbClr val="626A84"/>
                 </a:solidFill>
                 <a:latin typeface="Microsoft YaHei" pitchFamily="34" charset="0"/>
                 <a:ea typeface="Microsoft YaHei" pitchFamily="34" charset="-122"/>
@@ -7723,14 +7744,14 @@
           <a:p>
             <a:pPr indent="0" marL="0">
               <a:spcAft>
-                <a:spcPts val="700"/>
+                <a:spcPts val="1500"/>
               </a:spcAft>
               <a:buNone/>
             </a:pPr>
             <a:r>
               <a:rPr lang="en-US" sz="1250" dirty="0">
                 <a:solidFill>
-                  <a:srgbClr val="64748B"/>
+                  <a:srgbClr val="626A84"/>
                 </a:solidFill>
                 <a:latin typeface="Microsoft YaHei" pitchFamily="34" charset="0"/>
                 <a:ea typeface="Microsoft YaHei" pitchFamily="34" charset="-122"/>
@@ -7743,14 +7764,14 @@
           <a:p>
             <a:pPr indent="0" marL="0">
               <a:spcAft>
-                <a:spcPts val="700"/>
+                <a:spcPts val="1500"/>
               </a:spcAft>
               <a:buNone/>
             </a:pPr>
             <a:r>
               <a:rPr lang="en-US" sz="1250" dirty="0">
                 <a:solidFill>
-                  <a:srgbClr val="64748B"/>
+                  <a:srgbClr val="626A84"/>
                 </a:solidFill>
                 <a:latin typeface="Microsoft YaHei" pitchFamily="34" charset="0"/>
                 <a:ea typeface="Microsoft YaHei" pitchFamily="34" charset="-122"/>
@@ -7763,14 +7784,14 @@
           <a:p>
             <a:pPr indent="0" marL="0">
               <a:spcAft>
-                <a:spcPts val="700"/>
+                <a:spcPts val="1500"/>
               </a:spcAft>
               <a:buNone/>
             </a:pPr>
             <a:r>
               <a:rPr lang="en-US" sz="1250" dirty="0">
                 <a:solidFill>
-                  <a:srgbClr val="64748B"/>
+                  <a:srgbClr val="626A84"/>
                 </a:solidFill>
                 <a:latin typeface="Microsoft YaHei" pitchFamily="34" charset="0"/>
                 <a:ea typeface="Microsoft YaHei" pitchFamily="34" charset="-122"/>
@@ -7803,13 +7824,13 @@
           </a:solidFill>
           <a:ln w="12700">
             <a:solidFill>
-              <a:srgbClr val="E2E8F0"/>
+              <a:srgbClr val="E2DFF1"/>
             </a:solidFill>
             <a:prstDash val="solid"/>
           </a:ln>
           <a:effectLst>
             <a:outerShdw sx="100000" sy="100000" kx="0" ky="0" algn="bl" rotWithShape="0" blurRad="Infinity" dist="Infinity" dir="Infinity">
-              <a:srgbClr val="93A8D8">
+              <a:srgbClr val="9C93C8">
                 <a:alpha val="Infinity"/>
               </a:srgbClr>
             </a:outerShdw>
@@ -7843,7 +7864,7 @@
             <a:r>
               <a:rPr lang="en-US" sz="1600" b="1" dirty="0">
                 <a:solidFill>
-                  <a:srgbClr val="A855F7"/>
+                  <a:srgbClr val="B02AA8"/>
                 </a:solidFill>
                 <a:latin typeface="Microsoft YaHei" pitchFamily="34" charset="0"/>
                 <a:ea typeface="Microsoft YaHei" pitchFamily="34" charset="-122"/>
@@ -7873,19 +7894,19 @@
           <a:ln/>
         </p:spPr>
         <p:txBody>
-          <a:bodyPr wrap="square" rtlCol="0" anchor="ctr"/>
+          <a:bodyPr wrap="square" rtlCol="0" anchor="t"/>
           <a:lstStyle/>
           <a:p>
             <a:pPr indent="0" marL="0">
               <a:spcAft>
-                <a:spcPts val="700"/>
+                <a:spcPts val="1500"/>
               </a:spcAft>
               <a:buNone/>
             </a:pPr>
             <a:r>
               <a:rPr lang="en-US" sz="1250" dirty="0">
                 <a:solidFill>
-                  <a:srgbClr val="64748B"/>
+                  <a:srgbClr val="626A84"/>
                 </a:solidFill>
                 <a:latin typeface="Microsoft YaHei" pitchFamily="34" charset="0"/>
                 <a:ea typeface="Microsoft YaHei" pitchFamily="34" charset="-122"/>
@@ -7898,14 +7919,14 @@
           <a:p>
             <a:pPr indent="0" marL="0">
               <a:spcAft>
-                <a:spcPts val="700"/>
+                <a:spcPts val="1500"/>
               </a:spcAft>
               <a:buNone/>
             </a:pPr>
             <a:r>
               <a:rPr lang="en-US" sz="1250" dirty="0">
                 <a:solidFill>
-                  <a:srgbClr val="64748B"/>
+                  <a:srgbClr val="626A84"/>
                 </a:solidFill>
                 <a:latin typeface="Microsoft YaHei" pitchFamily="34" charset="0"/>
                 <a:ea typeface="Microsoft YaHei" pitchFamily="34" charset="-122"/>
@@ -7918,14 +7939,14 @@
           <a:p>
             <a:pPr indent="0" marL="0">
               <a:spcAft>
-                <a:spcPts val="700"/>
+                <a:spcPts val="1500"/>
               </a:spcAft>
               <a:buNone/>
             </a:pPr>
             <a:r>
               <a:rPr lang="en-US" sz="1250" dirty="0">
                 <a:solidFill>
-                  <a:srgbClr val="64748B"/>
+                  <a:srgbClr val="626A84"/>
                 </a:solidFill>
                 <a:latin typeface="Microsoft YaHei" pitchFamily="34" charset="0"/>
                 <a:ea typeface="Microsoft YaHei" pitchFamily="34" charset="-122"/>
@@ -7938,14 +7959,14 @@
           <a:p>
             <a:pPr indent="0" marL="0">
               <a:spcAft>
-                <a:spcPts val="700"/>
+                <a:spcPts val="1500"/>
               </a:spcAft>
               <a:buNone/>
             </a:pPr>
             <a:r>
               <a:rPr lang="en-US" sz="1250" dirty="0">
                 <a:solidFill>
-                  <a:srgbClr val="64748B"/>
+                  <a:srgbClr val="626A84"/>
                 </a:solidFill>
                 <a:latin typeface="Microsoft YaHei" pitchFamily="34" charset="0"/>
                 <a:ea typeface="Microsoft YaHei" pitchFamily="34" charset="-122"/>
@@ -7974,12 +7995,12 @@
             </a:avLst>
           </a:prstGeom>
           <a:solidFill>
-            <a:srgbClr val="6366F1"/>
+            <a:srgbClr val="3F4BD8"/>
           </a:solidFill>
           <a:ln/>
           <a:effectLst>
             <a:outerShdw sx="100000" sy="100000" kx="0" ky="0" algn="bl" rotWithShape="0" blurRad="Infinity" dist="Infinity" dir="Infinity">
-              <a:srgbClr val="93A8D8">
+              <a:srgbClr val="9C93C8">
                 <a:alpha val="Infinity"/>
               </a:srgbClr>
             </a:outerShdw>
@@ -8130,7 +8151,7 @@
             <a:r>
               <a:rPr lang="en-US" sz="900" dirty="0">
                 <a:solidFill>
-                  <a:srgbClr val="94A3B8"/>
+                  <a:srgbClr val="767D92"/>
                 </a:solidFill>
                 <a:latin typeface="Microsoft YaHei" pitchFamily="34" charset="0"/>
                 <a:ea typeface="Microsoft YaHei" pitchFamily="34" charset="-122"/>
@@ -8169,7 +8190,7 @@
             <a:r>
               <a:rPr lang="en-US" sz="900" dirty="0">
                 <a:solidFill>
-                  <a:srgbClr val="94A3B8"/>
+                  <a:srgbClr val="767D92"/>
                 </a:solidFill>
                 <a:latin typeface="Microsoft YaHei" pitchFamily="34" charset="0"/>
                 <a:ea typeface="Microsoft YaHei" pitchFamily="34" charset="-122"/>
@@ -8195,7 +8216,7 @@
     <p:bg>
       <p:bgPr>
         <a:solidFill>
-          <a:srgbClr val="EEF4FF"/>
+          <a:srgbClr val="F3F1FB"/>
         </a:solidFill>
       </p:bgPr>
     </p:bg>
@@ -8230,13 +8251,13 @@
             </a:avLst>
           </a:prstGeom>
           <a:solidFill>
-            <a:srgbClr val="6366F1"/>
+            <a:srgbClr val="3F4BD8"/>
           </a:solidFill>
           <a:ln/>
           <a:effectLst>
             <a:outerShdw sx="100000" sy="100000" kx="0" ky="0" algn="bl" rotWithShape="0" blurRad="6.394510321986036e+29" dist="1.598627580496509e+29" dir="2.519424e+35">
-              <a:srgbClr val="93A8D8">
-                <a:alpha val="2.8000000000000005e+34"/>
+              <a:srgbClr val="9C93C8">
+                <a:alpha val="2.4e+34"/>
               </a:srgbClr>
             </a:outerShdw>
           </a:effectLst>
@@ -8308,7 +8329,7 @@
             <a:r>
               <a:rPr lang="en-US" sz="2600" b="1" dirty="0">
                 <a:solidFill>
-                  <a:srgbClr val="1E293B"/>
+                  <a:srgbClr val="1E2442"/>
                 </a:solidFill>
                 <a:latin typeface="Microsoft YaHei" pitchFamily="34" charset="0"/>
                 <a:ea typeface="Microsoft YaHei" pitchFamily="34" charset="-122"/>
@@ -8347,7 +8368,7 @@
             <a:r>
               <a:rPr lang="en-US" sz="1250" dirty="0">
                 <a:solidFill>
-                  <a:srgbClr val="64748B"/>
+                  <a:srgbClr val="626A84"/>
                 </a:solidFill>
                 <a:latin typeface="Microsoft YaHei" pitchFamily="34" charset="0"/>
                 <a:ea typeface="Microsoft YaHei" pitchFamily="34" charset="-122"/>
@@ -8386,7 +8407,7 @@
             <a:r>
               <a:rPr lang="en-US" sz="1000" dirty="0">
                 <a:solidFill>
-                  <a:srgbClr val="94A3B8"/>
+                  <a:srgbClr val="767D92"/>
                 </a:solidFill>
                 <a:latin typeface="Microsoft YaHei" pitchFamily="34" charset="0"/>
                 <a:ea typeface="Microsoft YaHei" pitchFamily="34" charset="-122"/>
@@ -8407,11 +8428,11 @@
         <p:spPr>
           <a:xfrm>
             <a:off x="548640" y="1417320"/>
-            <a:ext cx="3520440" cy="3657600"/>
+            <a:ext cx="3520440" cy="3429000"/>
           </a:xfrm>
           <a:prstGeom prst="roundRect">
             <a:avLst>
-              <a:gd name="adj" fmla="val 2597"/>
+              <a:gd name="adj" fmla="val 2667"/>
             </a:avLst>
           </a:prstGeom>
           <a:solidFill>
@@ -8419,14 +8440,14 @@
           </a:solidFill>
           <a:ln w="12700">
             <a:solidFill>
-              <a:srgbClr val="E2E8F0"/>
+              <a:srgbClr val="E2DFF1"/>
             </a:solidFill>
             <a:prstDash val="solid"/>
           </a:ln>
           <a:effectLst>
             <a:outerShdw sx="100000" sy="100000" kx="0" ky="0" algn="bl" rotWithShape="0" blurRad="8.121028108922265e+33" dist="2.0302570272305663e+33" dir="1.5116544e+40">
-              <a:srgbClr val="93A8D8">
-                <a:alpha val="2.8000000000000006e+39"/>
+              <a:srgbClr val="9C93C8">
+                <a:alpha val="2.3999999999999998e+39"/>
               </a:srgbClr>
             </a:outerShdw>
           </a:effectLst>
@@ -8440,7 +8461,7 @@
         </p:nvSpPr>
         <p:spPr>
           <a:xfrm>
-            <a:off x="822960" y="1691640"/>
+            <a:off x="822960" y="1719072"/>
             <a:ext cx="822960" cy="822960"/>
           </a:xfrm>
           <a:prstGeom prst="roundRect">
@@ -8449,7 +8470,7 @@
             </a:avLst>
           </a:prstGeom>
           <a:solidFill>
-            <a:srgbClr val="F43F5E"/>
+            <a:srgbClr val="BE123C"/>
           </a:solidFill>
           <a:ln/>
         </p:spPr>
@@ -8462,7 +8483,7 @@
         </p:nvSpPr>
         <p:spPr>
           <a:xfrm>
-            <a:off x="822960" y="1691640"/>
+            <a:off x="822960" y="1719072"/>
             <a:ext cx="822960" cy="822960"/>
           </a:xfrm>
           <a:prstGeom prst="rect">
@@ -8501,7 +8522,7 @@
         </p:nvSpPr>
         <p:spPr>
           <a:xfrm>
-            <a:off x="822960" y="2697480"/>
+            <a:off x="822960" y="2743200"/>
             <a:ext cx="2926080" cy="320040"/>
           </a:xfrm>
           <a:prstGeom prst="rect">
@@ -8520,7 +8541,7 @@
             <a:r>
               <a:rPr lang="en-US" sz="1300" dirty="0">
                 <a:solidFill>
-                  <a:srgbClr val="64748B"/>
+                  <a:srgbClr val="626A84"/>
                 </a:solidFill>
                 <a:latin typeface="Microsoft YaHei" pitchFamily="34" charset="0"/>
                 <a:ea typeface="Microsoft YaHei" pitchFamily="34" charset="-122"/>
@@ -8540,7 +8561,7 @@
         </p:nvSpPr>
         <p:spPr>
           <a:xfrm>
-            <a:off x="822960" y="3017520"/>
+            <a:off x="822960" y="3090672"/>
             <a:ext cx="3017520" cy="457200"/>
           </a:xfrm>
           <a:prstGeom prst="rect">
@@ -8559,7 +8580,7 @@
             <a:r>
               <a:rPr lang="en-US" sz="2000" b="1" dirty="0">
                 <a:solidFill>
-                  <a:srgbClr val="1E293B"/>
+                  <a:srgbClr val="1E2442"/>
                 </a:solidFill>
                 <a:latin typeface="Microsoft YaHei" pitchFamily="34" charset="0"/>
                 <a:ea typeface="Microsoft YaHei" pitchFamily="34" charset="-122"/>
@@ -8579,29 +8600,29 @@
         </p:nvSpPr>
         <p:spPr>
           <a:xfrm>
-            <a:off x="822960" y="3611880"/>
-            <a:ext cx="3017520" cy="1280160"/>
-          </a:xfrm>
-          <a:prstGeom prst="rect">
-            <a:avLst/>
-          </a:prstGeom>
-          <a:noFill/>
-          <a:ln/>
-        </p:spPr>
-        <p:txBody>
-          <a:bodyPr wrap="square" rtlCol="0" anchor="ctr"/>
+            <a:off x="822960" y="3675888"/>
+            <a:ext cx="3017520" cy="1051560"/>
+          </a:xfrm>
+          <a:prstGeom prst="rect">
+            <a:avLst/>
+          </a:prstGeom>
+          <a:noFill/>
+          <a:ln/>
+        </p:spPr>
+        <p:txBody>
+          <a:bodyPr wrap="square" rtlCol="0" anchor="t"/>
           <a:lstStyle/>
           <a:p>
             <a:pPr indent="0" marL="0">
               <a:lnSpc>
-                <a:spcPct val="125000"/>
+                <a:spcPct val="130000"/>
               </a:lnSpc>
               <a:buNone/>
             </a:pPr>
             <a:r>
               <a:rPr lang="en-US" sz="1300" dirty="0">
                 <a:solidFill>
-                  <a:srgbClr val="64748B"/>
+                  <a:srgbClr val="626A84"/>
                 </a:solidFill>
                 <a:latin typeface="Microsoft YaHei" pitchFamily="34" charset="0"/>
                 <a:ea typeface="Microsoft YaHei" pitchFamily="34" charset="-122"/>
@@ -8622,11 +8643,11 @@
         <p:spPr>
           <a:xfrm>
             <a:off x="4343400" y="1417320"/>
-            <a:ext cx="3520440" cy="3657600"/>
+            <a:ext cx="3520440" cy="3429000"/>
           </a:xfrm>
           <a:prstGeom prst="roundRect">
             <a:avLst>
-              <a:gd name="adj" fmla="val 2597"/>
+              <a:gd name="adj" fmla="val 2667"/>
             </a:avLst>
           </a:prstGeom>
           <a:solidFill>
@@ -8634,14 +8655,14 @@
           </a:solidFill>
           <a:ln w="12700">
             <a:solidFill>
-              <a:srgbClr val="E2E8F0"/>
+              <a:srgbClr val="E2DFF1"/>
             </a:solidFill>
             <a:prstDash val="solid"/>
           </a:ln>
           <a:effectLst>
             <a:outerShdw sx="100000" sy="100000" kx="0" ky="0" algn="bl" rotWithShape="0" blurRad="1.0313705698331276e+38" dist="2.578426424582819e+37" dir="9.069926400000001e+44">
-              <a:srgbClr val="93A8D8">
-                <a:alpha val="2.8000000000000005e+44"/>
+              <a:srgbClr val="9C93C8">
+                <a:alpha val="2.3999999999999997e+44"/>
               </a:srgbClr>
             </a:outerShdw>
           </a:effectLst>
@@ -8655,7 +8676,7 @@
         </p:nvSpPr>
         <p:spPr>
           <a:xfrm>
-            <a:off x="4617720" y="1691640"/>
+            <a:off x="4617720" y="1719072"/>
             <a:ext cx="822960" cy="822960"/>
           </a:xfrm>
           <a:prstGeom prst="roundRect">
@@ -8664,7 +8685,7 @@
             </a:avLst>
           </a:prstGeom>
           <a:solidFill>
-            <a:srgbClr val="F59E0B"/>
+            <a:srgbClr val="A16207"/>
           </a:solidFill>
           <a:ln/>
         </p:spPr>
@@ -8677,7 +8698,7 @@
         </p:nvSpPr>
         <p:spPr>
           <a:xfrm>
-            <a:off x="4617720" y="1691640"/>
+            <a:off x="4617720" y="1719072"/>
             <a:ext cx="822960" cy="822960"/>
           </a:xfrm>
           <a:prstGeom prst="rect">
@@ -8716,7 +8737,7 @@
         </p:nvSpPr>
         <p:spPr>
           <a:xfrm>
-            <a:off x="4617720" y="2697480"/>
+            <a:off x="4617720" y="2743200"/>
             <a:ext cx="2926080" cy="320040"/>
           </a:xfrm>
           <a:prstGeom prst="rect">
@@ -8735,7 +8756,7 @@
             <a:r>
               <a:rPr lang="en-US" sz="1300" dirty="0">
                 <a:solidFill>
-                  <a:srgbClr val="64748B"/>
+                  <a:srgbClr val="626A84"/>
                 </a:solidFill>
                 <a:latin typeface="Microsoft YaHei" pitchFamily="34" charset="0"/>
                 <a:ea typeface="Microsoft YaHei" pitchFamily="34" charset="-122"/>
@@ -8755,7 +8776,7 @@
         </p:nvSpPr>
         <p:spPr>
           <a:xfrm>
-            <a:off x="4617720" y="3017520"/>
+            <a:off x="4617720" y="3090672"/>
             <a:ext cx="3017520" cy="457200"/>
           </a:xfrm>
           <a:prstGeom prst="rect">
@@ -8774,7 +8795,7 @@
             <a:r>
               <a:rPr lang="en-US" sz="2000" b="1" dirty="0">
                 <a:solidFill>
-                  <a:srgbClr val="1E293B"/>
+                  <a:srgbClr val="1E2442"/>
                 </a:solidFill>
                 <a:latin typeface="Microsoft YaHei" pitchFamily="34" charset="0"/>
                 <a:ea typeface="Microsoft YaHei" pitchFamily="34" charset="-122"/>
@@ -8794,29 +8815,29 @@
         </p:nvSpPr>
         <p:spPr>
           <a:xfrm>
-            <a:off x="4617720" y="3611880"/>
-            <a:ext cx="3017520" cy="1280160"/>
-          </a:xfrm>
-          <a:prstGeom prst="rect">
-            <a:avLst/>
-          </a:prstGeom>
-          <a:noFill/>
-          <a:ln/>
-        </p:spPr>
-        <p:txBody>
-          <a:bodyPr wrap="square" rtlCol="0" anchor="ctr"/>
+            <a:off x="4617720" y="3675888"/>
+            <a:ext cx="3017520" cy="1051560"/>
+          </a:xfrm>
+          <a:prstGeom prst="rect">
+            <a:avLst/>
+          </a:prstGeom>
+          <a:noFill/>
+          <a:ln/>
+        </p:spPr>
+        <p:txBody>
+          <a:bodyPr wrap="square" rtlCol="0" anchor="t"/>
           <a:lstStyle/>
           <a:p>
             <a:pPr indent="0" marL="0">
               <a:lnSpc>
-                <a:spcPct val="125000"/>
+                <a:spcPct val="130000"/>
               </a:lnSpc>
               <a:buNone/>
             </a:pPr>
             <a:r>
               <a:rPr lang="en-US" sz="1300" dirty="0">
                 <a:solidFill>
-                  <a:srgbClr val="64748B"/>
+                  <a:srgbClr val="626A84"/>
                 </a:solidFill>
                 <a:latin typeface="Microsoft YaHei" pitchFamily="34" charset="0"/>
                 <a:ea typeface="Microsoft YaHei" pitchFamily="34" charset="-122"/>
@@ -8837,11 +8858,11 @@
         <p:spPr>
           <a:xfrm>
             <a:off x="8138160" y="1417320"/>
-            <a:ext cx="3520440" cy="3657600"/>
+            <a:ext cx="3520440" cy="3429000"/>
           </a:xfrm>
           <a:prstGeom prst="roundRect">
             <a:avLst>
-              <a:gd name="adj" fmla="val 2597"/>
+              <a:gd name="adj" fmla="val 2667"/>
             </a:avLst>
           </a:prstGeom>
           <a:solidFill>
@@ -8849,14 +8870,14 @@
           </a:solidFill>
           <a:ln w="12700">
             <a:solidFill>
-              <a:srgbClr val="E2E8F0"/>
+              <a:srgbClr val="E2DFF1"/>
             </a:solidFill>
             <a:prstDash val="solid"/>
           </a:ln>
           <a:effectLst>
             <a:outerShdw sx="100000" sy="100000" kx="0" ky="0" algn="bl" rotWithShape="0" blurRad="1.3098406236880721e+42" dist="3.2746015592201804e+41" dir="5.44195584e+49">
-              <a:srgbClr val="93A8D8">
-                <a:alpha val="2.8000000000000003e+49"/>
+              <a:srgbClr val="9C93C8">
+                <a:alpha val="2.4e+49"/>
               </a:srgbClr>
             </a:outerShdw>
           </a:effectLst>
@@ -8870,7 +8891,7 @@
         </p:nvSpPr>
         <p:spPr>
           <a:xfrm>
-            <a:off x="8412480" y="1691640"/>
+            <a:off x="8412480" y="1719072"/>
             <a:ext cx="822960" cy="822960"/>
           </a:xfrm>
           <a:prstGeom prst="roundRect">
@@ -8879,7 +8900,7 @@
             </a:avLst>
           </a:prstGeom>
           <a:solidFill>
-            <a:srgbClr val="A855F7"/>
+            <a:srgbClr val="B02AA8"/>
           </a:solidFill>
           <a:ln/>
         </p:spPr>
@@ -8892,7 +8913,7 @@
         </p:nvSpPr>
         <p:spPr>
           <a:xfrm>
-            <a:off x="8412480" y="1691640"/>
+            <a:off x="8412480" y="1719072"/>
             <a:ext cx="822960" cy="822960"/>
           </a:xfrm>
           <a:prstGeom prst="rect">
@@ -8931,7 +8952,7 @@
         </p:nvSpPr>
         <p:spPr>
           <a:xfrm>
-            <a:off x="8412480" y="2697480"/>
+            <a:off x="8412480" y="2743200"/>
             <a:ext cx="2926080" cy="320040"/>
           </a:xfrm>
           <a:prstGeom prst="rect">
@@ -8950,7 +8971,7 @@
             <a:r>
               <a:rPr lang="en-US" sz="1300" dirty="0">
                 <a:solidFill>
-                  <a:srgbClr val="64748B"/>
+                  <a:srgbClr val="626A84"/>
                 </a:solidFill>
                 <a:latin typeface="Microsoft YaHei" pitchFamily="34" charset="0"/>
                 <a:ea typeface="Microsoft YaHei" pitchFamily="34" charset="-122"/>
@@ -8970,7 +8991,7 @@
         </p:nvSpPr>
         <p:spPr>
           <a:xfrm>
-            <a:off x="8412480" y="3017520"/>
+            <a:off x="8412480" y="3090672"/>
             <a:ext cx="3017520" cy="457200"/>
           </a:xfrm>
           <a:prstGeom prst="rect">
@@ -8989,7 +9010,7 @@
             <a:r>
               <a:rPr lang="en-US" sz="2000" b="1" dirty="0">
                 <a:solidFill>
-                  <a:srgbClr val="1E293B"/>
+                  <a:srgbClr val="1E2442"/>
                 </a:solidFill>
                 <a:latin typeface="Microsoft YaHei" pitchFamily="34" charset="0"/>
                 <a:ea typeface="Microsoft YaHei" pitchFamily="34" charset="-122"/>
@@ -9009,29 +9030,29 @@
         </p:nvSpPr>
         <p:spPr>
           <a:xfrm>
-            <a:off x="8412480" y="3611880"/>
-            <a:ext cx="3017520" cy="1280160"/>
-          </a:xfrm>
-          <a:prstGeom prst="rect">
-            <a:avLst/>
-          </a:prstGeom>
-          <a:noFill/>
-          <a:ln/>
-        </p:spPr>
-        <p:txBody>
-          <a:bodyPr wrap="square" rtlCol="0" anchor="ctr"/>
+            <a:off x="8412480" y="3675888"/>
+            <a:ext cx="3017520" cy="1051560"/>
+          </a:xfrm>
+          <a:prstGeom prst="rect">
+            <a:avLst/>
+          </a:prstGeom>
+          <a:noFill/>
+          <a:ln/>
+        </p:spPr>
+        <p:txBody>
+          <a:bodyPr wrap="square" rtlCol="0" anchor="t"/>
           <a:lstStyle/>
           <a:p>
             <a:pPr indent="0" marL="0">
               <a:lnSpc>
-                <a:spcPct val="125000"/>
+                <a:spcPct val="130000"/>
               </a:lnSpc>
               <a:buNone/>
             </a:pPr>
             <a:r>
               <a:rPr lang="en-US" sz="1300" dirty="0">
                 <a:solidFill>
-                  <a:srgbClr val="64748B"/>
+                  <a:srgbClr val="626A84"/>
                 </a:solidFill>
                 <a:latin typeface="Microsoft YaHei" pitchFamily="34" charset="0"/>
                 <a:ea typeface="Microsoft YaHei" pitchFamily="34" charset="-122"/>
@@ -9072,7 +9093,7 @@
             <a:r>
               <a:rPr lang="en-US" sz="1350" b="1" dirty="0">
                 <a:solidFill>
-                  <a:srgbClr val="6366F1"/>
+                  <a:srgbClr val="3F4BD8"/>
                 </a:solidFill>
                 <a:latin typeface="Microsoft YaHei" pitchFamily="34" charset="0"/>
                 <a:ea typeface="Microsoft YaHei" pitchFamily="34" charset="-122"/>
@@ -9111,7 +9132,7 @@
             <a:r>
               <a:rPr lang="en-US" sz="900" dirty="0">
                 <a:solidFill>
-                  <a:srgbClr val="94A3B8"/>
+                  <a:srgbClr val="767D92"/>
                 </a:solidFill>
                 <a:latin typeface="Microsoft YaHei" pitchFamily="34" charset="0"/>
                 <a:ea typeface="Microsoft YaHei" pitchFamily="34" charset="-122"/>
@@ -9150,7 +9171,7 @@
             <a:r>
               <a:rPr lang="en-US" sz="900" dirty="0">
                 <a:solidFill>
-                  <a:srgbClr val="94A3B8"/>
+                  <a:srgbClr val="767D92"/>
                 </a:solidFill>
                 <a:latin typeface="Microsoft YaHei" pitchFamily="34" charset="0"/>
                 <a:ea typeface="Microsoft YaHei" pitchFamily="34" charset="-122"/>
@@ -9176,7 +9197,7 @@
     <p:bg>
       <p:bgPr>
         <a:solidFill>
-          <a:srgbClr val="EEF4FF"/>
+          <a:srgbClr val="F3F1FB"/>
         </a:solidFill>
       </p:bgPr>
     </p:bg>
@@ -9211,13 +9232,13 @@
             </a:avLst>
           </a:prstGeom>
           <a:solidFill>
-            <a:srgbClr val="6366F1"/>
+            <a:srgbClr val="3F4BD8"/>
           </a:solidFill>
           <a:ln/>
           <a:effectLst>
             <a:outerShdw sx="100000" sy="100000" kx="0" ky="0" algn="bl" rotWithShape="0" blurRad="1.6634975920838516e+46" dist="4.158743980209629e+45" dir="3.2651735040000005e+54">
-              <a:srgbClr val="93A8D8">
-                <a:alpha val="2.8e+54"/>
+              <a:srgbClr val="9C93C8">
+                <a:alpha val="2.4e+54"/>
               </a:srgbClr>
             </a:outerShdw>
           </a:effectLst>
@@ -9289,7 +9310,7 @@
             <a:r>
               <a:rPr lang="en-US" sz="2600" b="1" dirty="0">
                 <a:solidFill>
-                  <a:srgbClr val="1E293B"/>
+                  <a:srgbClr val="1E2442"/>
                 </a:solidFill>
                 <a:latin typeface="Microsoft YaHei" pitchFamily="34" charset="0"/>
                 <a:ea typeface="Microsoft YaHei" pitchFamily="34" charset="-122"/>
@@ -9328,7 +9349,7 @@
             <a:r>
               <a:rPr lang="en-US" sz="1250" dirty="0">
                 <a:solidFill>
-                  <a:srgbClr val="64748B"/>
+                  <a:srgbClr val="626A84"/>
                 </a:solidFill>
                 <a:latin typeface="Microsoft YaHei" pitchFamily="34" charset="0"/>
                 <a:ea typeface="Microsoft YaHei" pitchFamily="34" charset="-122"/>
@@ -9367,7 +9388,7 @@
             <a:r>
               <a:rPr lang="en-US" sz="1000" dirty="0">
                 <a:solidFill>
-                  <a:srgbClr val="94A3B8"/>
+                  <a:srgbClr val="767D92"/>
                 </a:solidFill>
                 <a:latin typeface="Microsoft YaHei" pitchFamily="34" charset="0"/>
                 <a:ea typeface="Microsoft YaHei" pitchFamily="34" charset="-122"/>
@@ -9400,14 +9421,14 @@
           </a:solidFill>
           <a:ln w="12700">
             <a:solidFill>
-              <a:srgbClr val="E2E8F0"/>
+              <a:srgbClr val="E2DFF1"/>
             </a:solidFill>
             <a:prstDash val="solid"/>
           </a:ln>
           <a:effectLst>
             <a:outerShdw sx="100000" sy="100000" kx="0" ky="0" algn="bl" rotWithShape="0" blurRad="2.1126419419464913e+50" dist="5.281604854866228e+49" dir="1.9591041024000004e+59">
-              <a:srgbClr val="93A8D8">
-                <a:alpha val="2.8000000000000002e+59"/>
+              <a:srgbClr val="9C93C8">
+                <a:alpha val="2.4e+59"/>
               </a:srgbClr>
             </a:outerShdw>
           </a:effectLst>
@@ -9440,7 +9461,7 @@
             <a:r>
               <a:rPr lang="en-US" sz="1400" b="1" dirty="0">
                 <a:solidFill>
-                  <a:srgbClr val="6366F1"/>
+                  <a:srgbClr val="3F4BD8"/>
                 </a:solidFill>
                 <a:latin typeface="Microsoft YaHei" pitchFamily="34" charset="0"/>
                 <a:ea typeface="Microsoft YaHei" pitchFamily="34" charset="-122"/>
@@ -9479,7 +9500,7 @@
             <a:r>
               <a:rPr lang="en-US" sz="1300" b="1" dirty="0">
                 <a:solidFill>
-                  <a:srgbClr val="1E293B"/>
+                  <a:srgbClr val="1E2442"/>
                 </a:solidFill>
                 <a:latin typeface="Microsoft YaHei" pitchFamily="34" charset="0"/>
                 <a:ea typeface="Microsoft YaHei" pitchFamily="34" charset="-122"/>
@@ -9518,7 +9539,7 @@
             <a:r>
               <a:rPr lang="en-US" sz="1000" dirty="0">
                 <a:solidFill>
-                  <a:srgbClr val="64748B"/>
+                  <a:srgbClr val="626A84"/>
                 </a:solidFill>
                 <a:latin typeface="Microsoft YaHei" pitchFamily="34" charset="0"/>
                 <a:ea typeface="Microsoft YaHei" pitchFamily="34" charset="-122"/>
@@ -9557,7 +9578,7 @@
             <a:r>
               <a:rPr lang="en-US" sz="1200" dirty="0">
                 <a:solidFill>
-                  <a:srgbClr val="94A3B8"/>
+                  <a:srgbClr val="767D92"/>
                 </a:solidFill>
                 <a:latin typeface="Microsoft YaHei" pitchFamily="34" charset="0"/>
                 <a:ea typeface="Microsoft YaHei" pitchFamily="34" charset="-122"/>
@@ -9590,14 +9611,14 @@
           </a:solidFill>
           <a:ln w="12700">
             <a:solidFill>
-              <a:srgbClr val="E2E8F0"/>
+              <a:srgbClr val="E2DFF1"/>
             </a:solidFill>
             <a:prstDash val="solid"/>
           </a:ln>
           <a:effectLst>
             <a:outerShdw sx="100000" sy="100000" kx="0" ky="0" algn="bl" rotWithShape="0" blurRad="2.683055266272044e+54" dist="6.70763816568011e+53" dir="1.1754624614400003e+64">
-              <a:srgbClr val="93A8D8">
-                <a:alpha val="2.8e+64"/>
+              <a:srgbClr val="9C93C8">
+                <a:alpha val="2.4000000000000003e+64"/>
               </a:srgbClr>
             </a:outerShdw>
           </a:effectLst>
@@ -9630,7 +9651,7 @@
             <a:r>
               <a:rPr lang="en-US" sz="1400" b="1" dirty="0">
                 <a:solidFill>
-                  <a:srgbClr val="0EA5E9"/>
+                  <a:srgbClr val="0E7490"/>
                 </a:solidFill>
                 <a:latin typeface="Microsoft YaHei" pitchFamily="34" charset="0"/>
                 <a:ea typeface="Microsoft YaHei" pitchFamily="34" charset="-122"/>
@@ -9669,7 +9690,7 @@
             <a:r>
               <a:rPr lang="en-US" sz="1300" b="1" dirty="0">
                 <a:solidFill>
-                  <a:srgbClr val="1E293B"/>
+                  <a:srgbClr val="1E2442"/>
                 </a:solidFill>
                 <a:latin typeface="Microsoft YaHei" pitchFamily="34" charset="0"/>
                 <a:ea typeface="Microsoft YaHei" pitchFamily="34" charset="-122"/>
@@ -9708,7 +9729,7 @@
             <a:r>
               <a:rPr lang="en-US" sz="1000" dirty="0">
                 <a:solidFill>
-                  <a:srgbClr val="64748B"/>
+                  <a:srgbClr val="626A84"/>
                 </a:solidFill>
                 <a:latin typeface="Microsoft YaHei" pitchFamily="34" charset="0"/>
                 <a:ea typeface="Microsoft YaHei" pitchFamily="34" charset="-122"/>
@@ -9747,7 +9768,7 @@
             <a:r>
               <a:rPr lang="en-US" sz="1200" dirty="0">
                 <a:solidFill>
-                  <a:srgbClr val="94A3B8"/>
+                  <a:srgbClr val="767D92"/>
                 </a:solidFill>
                 <a:latin typeface="Microsoft YaHei" pitchFamily="34" charset="0"/>
                 <a:ea typeface="Microsoft YaHei" pitchFamily="34" charset="-122"/>
@@ -9780,14 +9801,14 @@
           </a:solidFill>
           <a:ln w="12700">
             <a:solidFill>
-              <a:srgbClr val="E2E8F0"/>
+              <a:srgbClr val="E2DFF1"/>
             </a:solidFill>
             <a:prstDash val="solid"/>
           </a:ln>
           <a:effectLst>
             <a:outerShdw sx="100000" sy="100000" kx="0" ky="0" algn="bl" rotWithShape="0" blurRad="3.4074801881654956e+58" dist="8.518700470413739e+57" dir="7.052774768640002e+68">
-              <a:srgbClr val="93A8D8">
-                <a:alpha val="2.8000000000000002e+69"/>
+              <a:srgbClr val="9C93C8">
+                <a:alpha val="2.4e+69"/>
               </a:srgbClr>
             </a:outerShdw>
           </a:effectLst>
@@ -9820,7 +9841,7 @@
             <a:r>
               <a:rPr lang="en-US" sz="1400" b="1" dirty="0">
                 <a:solidFill>
-                  <a:srgbClr val="A855F7"/>
+                  <a:srgbClr val="B02AA8"/>
                 </a:solidFill>
                 <a:latin typeface="Microsoft YaHei" pitchFamily="34" charset="0"/>
                 <a:ea typeface="Microsoft YaHei" pitchFamily="34" charset="-122"/>
@@ -9859,7 +9880,7 @@
             <a:r>
               <a:rPr lang="en-US" sz="1300" b="1" dirty="0">
                 <a:solidFill>
-                  <a:srgbClr val="1E293B"/>
+                  <a:srgbClr val="1E2442"/>
                 </a:solidFill>
                 <a:latin typeface="Microsoft YaHei" pitchFamily="34" charset="0"/>
                 <a:ea typeface="Microsoft YaHei" pitchFamily="34" charset="-122"/>
@@ -9898,7 +9919,7 @@
             <a:r>
               <a:rPr lang="en-US" sz="1000" dirty="0">
                 <a:solidFill>
-                  <a:srgbClr val="64748B"/>
+                  <a:srgbClr val="626A84"/>
                 </a:solidFill>
                 <a:latin typeface="Microsoft YaHei" pitchFamily="34" charset="0"/>
                 <a:ea typeface="Microsoft YaHei" pitchFamily="34" charset="-122"/>
@@ -9937,7 +9958,7 @@
             <a:r>
               <a:rPr lang="en-US" sz="1200" dirty="0">
                 <a:solidFill>
-                  <a:srgbClr val="94A3B8"/>
+                  <a:srgbClr val="767D92"/>
                 </a:solidFill>
                 <a:latin typeface="Microsoft YaHei" pitchFamily="34" charset="0"/>
                 <a:ea typeface="Microsoft YaHei" pitchFamily="34" charset="-122"/>
@@ -9970,14 +9991,14 @@
           </a:solidFill>
           <a:ln w="12700">
             <a:solidFill>
-              <a:srgbClr val="E2E8F0"/>
+              <a:srgbClr val="E2DFF1"/>
             </a:solidFill>
             <a:prstDash val="solid"/>
           </a:ln>
           <a:effectLst>
             <a:outerShdw sx="100000" sy="100000" kx="0" ky="0" algn="bl" rotWithShape="0" blurRad="4.32749983897018e+62" dist="1.081874959742545e+62" dir="4.2316648611840007e+73">
-              <a:srgbClr val="93A8D8">
-                <a:alpha val="2.8e+74"/>
+              <a:srgbClr val="9C93C8">
+                <a:alpha val="2.4e+74"/>
               </a:srgbClr>
             </a:outerShdw>
           </a:effectLst>
@@ -10010,7 +10031,7 @@
             <a:r>
               <a:rPr lang="en-US" sz="1400" b="1" dirty="0">
                 <a:solidFill>
-                  <a:srgbClr val="10B981"/>
+                  <a:srgbClr val="047857"/>
                 </a:solidFill>
                 <a:latin typeface="Microsoft YaHei" pitchFamily="34" charset="0"/>
                 <a:ea typeface="Microsoft YaHei" pitchFamily="34" charset="-122"/>
@@ -10049,7 +10070,7 @@
             <a:r>
               <a:rPr lang="en-US" sz="1300" b="1" dirty="0">
                 <a:solidFill>
-                  <a:srgbClr val="1E293B"/>
+                  <a:srgbClr val="1E2442"/>
                 </a:solidFill>
                 <a:latin typeface="Microsoft YaHei" pitchFamily="34" charset="0"/>
                 <a:ea typeface="Microsoft YaHei" pitchFamily="34" charset="-122"/>
@@ -10088,7 +10109,7 @@
             <a:r>
               <a:rPr lang="en-US" sz="1000" dirty="0">
                 <a:solidFill>
-                  <a:srgbClr val="64748B"/>
+                  <a:srgbClr val="626A84"/>
                 </a:solidFill>
                 <a:latin typeface="Microsoft YaHei" pitchFamily="34" charset="0"/>
                 <a:ea typeface="Microsoft YaHei" pitchFamily="34" charset="-122"/>
@@ -10127,7 +10148,7 @@
             <a:r>
               <a:rPr lang="en-US" sz="1200" dirty="0">
                 <a:solidFill>
-                  <a:srgbClr val="94A3B8"/>
+                  <a:srgbClr val="767D92"/>
                 </a:solidFill>
                 <a:latin typeface="Microsoft YaHei" pitchFamily="34" charset="0"/>
                 <a:ea typeface="Microsoft YaHei" pitchFamily="34" charset="-122"/>
@@ -10160,14 +10181,14 @@
           </a:solidFill>
           <a:ln w="12700">
             <a:solidFill>
-              <a:srgbClr val="E2E8F0"/>
+              <a:srgbClr val="E2DFF1"/>
             </a:solidFill>
             <a:prstDash val="solid"/>
           </a:ln>
           <a:effectLst>
             <a:outerShdw sx="100000" sy="100000" kx="0" ky="0" algn="bl" rotWithShape="0" blurRad="5.495924795492128e+66" dist="1.373981198873032e+66" dir="2.5389989167104004e+78">
-              <a:srgbClr val="93A8D8">
-                <a:alpha val="2.8e+79"/>
+              <a:srgbClr val="9C93C8">
+                <a:alpha val="2.4000000000000002e+79"/>
               </a:srgbClr>
             </a:outerShdw>
           </a:effectLst>
@@ -10200,7 +10221,7 @@
             <a:r>
               <a:rPr lang="en-US" sz="1400" b="1" dirty="0">
                 <a:solidFill>
-                  <a:srgbClr val="6366F1"/>
+                  <a:srgbClr val="3F4BD8"/>
                 </a:solidFill>
                 <a:latin typeface="Microsoft YaHei" pitchFamily="34" charset="0"/>
                 <a:ea typeface="Microsoft YaHei" pitchFamily="34" charset="-122"/>
@@ -10239,7 +10260,7 @@
             <a:r>
               <a:rPr lang="en-US" sz="1300" b="1" dirty="0">
                 <a:solidFill>
-                  <a:srgbClr val="1E293B"/>
+                  <a:srgbClr val="1E2442"/>
                 </a:solidFill>
                 <a:latin typeface="Microsoft YaHei" pitchFamily="34" charset="0"/>
                 <a:ea typeface="Microsoft YaHei" pitchFamily="34" charset="-122"/>
@@ -10278,7 +10299,7 @@
             <a:r>
               <a:rPr lang="en-US" sz="1000" dirty="0">
                 <a:solidFill>
-                  <a:srgbClr val="64748B"/>
+                  <a:srgbClr val="626A84"/>
                 </a:solidFill>
                 <a:latin typeface="Microsoft YaHei" pitchFamily="34" charset="0"/>
                 <a:ea typeface="Microsoft YaHei" pitchFamily="34" charset="-122"/>
@@ -10317,7 +10338,7 @@
             <a:r>
               <a:rPr lang="en-US" sz="1200" dirty="0">
                 <a:solidFill>
-                  <a:srgbClr val="94A3B8"/>
+                  <a:srgbClr val="767D92"/>
                 </a:solidFill>
                 <a:latin typeface="Microsoft YaHei" pitchFamily="34" charset="0"/>
                 <a:ea typeface="Microsoft YaHei" pitchFamily="34" charset="-122"/>
@@ -10350,14 +10371,14 @@
           </a:solidFill>
           <a:ln w="12700">
             <a:solidFill>
-              <a:srgbClr val="E2E8F0"/>
+              <a:srgbClr val="E2DFF1"/>
             </a:solidFill>
             <a:prstDash val="solid"/>
           </a:ln>
           <a:effectLst>
             <a:outerShdw sx="100000" sy="100000" kx="0" ky="0" algn="bl" rotWithShape="0" blurRad="6.979824490275003e+70" dist="1.7449561225687507e+70" dir="1.5233993500262402e+83">
-              <a:srgbClr val="93A8D8">
-                <a:alpha val="2.8000000000000002e+84"/>
+              <a:srgbClr val="9C93C8">
+                <a:alpha val="2.4000000000000004e+84"/>
               </a:srgbClr>
             </a:outerShdw>
           </a:effectLst>
@@ -10390,7 +10411,7 @@
             <a:r>
               <a:rPr lang="en-US" sz="1400" b="1" dirty="0">
                 <a:solidFill>
-                  <a:srgbClr val="0EA5E9"/>
+                  <a:srgbClr val="0E7490"/>
                 </a:solidFill>
                 <a:latin typeface="Microsoft YaHei" pitchFamily="34" charset="0"/>
                 <a:ea typeface="Microsoft YaHei" pitchFamily="34" charset="-122"/>
@@ -10429,7 +10450,7 @@
             <a:r>
               <a:rPr lang="en-US" sz="1300" b="1" dirty="0">
                 <a:solidFill>
-                  <a:srgbClr val="1E293B"/>
+                  <a:srgbClr val="1E2442"/>
                 </a:solidFill>
                 <a:latin typeface="Microsoft YaHei" pitchFamily="34" charset="0"/>
                 <a:ea typeface="Microsoft YaHei" pitchFamily="34" charset="-122"/>
@@ -10468,7 +10489,7 @@
             <a:r>
               <a:rPr lang="en-US" sz="1000" dirty="0">
                 <a:solidFill>
-                  <a:srgbClr val="64748B"/>
+                  <a:srgbClr val="626A84"/>
                 </a:solidFill>
                 <a:latin typeface="Microsoft YaHei" pitchFamily="34" charset="0"/>
                 <a:ea typeface="Microsoft YaHei" pitchFamily="34" charset="-122"/>
@@ -10488,8 +10509,8 @@
         </p:nvSpPr>
         <p:spPr>
           <a:xfrm>
-            <a:off x="822960" y="4114800"/>
-            <a:ext cx="2011680" cy="640080"/>
+            <a:off x="502920" y="4114800"/>
+            <a:ext cx="2231136" cy="640080"/>
           </a:xfrm>
           <a:prstGeom prst="rect">
             <a:avLst/>
@@ -10507,7 +10528,7 @@
             <a:r>
               <a:rPr lang="en-US" sz="3200" b="1" dirty="0">
                 <a:solidFill>
-                  <a:srgbClr val="6366F1"/>
+                  <a:srgbClr val="3F4BD8"/>
                 </a:solidFill>
                 <a:latin typeface="Microsoft YaHei" pitchFamily="34" charset="0"/>
                 <a:ea typeface="Microsoft YaHei" pitchFamily="34" charset="-122"/>
@@ -10527,8 +10548,8 @@
         </p:nvSpPr>
         <p:spPr>
           <a:xfrm>
-            <a:off x="822960" y="4754880"/>
-            <a:ext cx="2011680" cy="320040"/>
+            <a:off x="502920" y="4754880"/>
+            <a:ext cx="2231136" cy="320040"/>
           </a:xfrm>
           <a:prstGeom prst="rect">
             <a:avLst/>
@@ -10546,7 +10567,7 @@
             <a:r>
               <a:rPr lang="en-US" sz="1300" dirty="0">
                 <a:solidFill>
-                  <a:srgbClr val="64748B"/>
+                  <a:srgbClr val="626A84"/>
                 </a:solidFill>
                 <a:latin typeface="Microsoft YaHei" pitchFamily="34" charset="0"/>
                 <a:ea typeface="Microsoft YaHei" pitchFamily="34" charset="-122"/>
@@ -10566,8 +10587,8 @@
         </p:nvSpPr>
         <p:spPr>
           <a:xfrm>
-            <a:off x="3063240" y="4114800"/>
-            <a:ext cx="2011680" cy="640080"/>
+            <a:off x="2734056" y="4114800"/>
+            <a:ext cx="2231136" cy="640080"/>
           </a:xfrm>
           <a:prstGeom prst="rect">
             <a:avLst/>
@@ -10585,7 +10606,7 @@
             <a:r>
               <a:rPr lang="en-US" sz="3200" b="1" dirty="0">
                 <a:solidFill>
-                  <a:srgbClr val="6366F1"/>
+                  <a:srgbClr val="3F4BD8"/>
                 </a:solidFill>
                 <a:latin typeface="Microsoft YaHei" pitchFamily="34" charset="0"/>
                 <a:ea typeface="Microsoft YaHei" pitchFamily="34" charset="-122"/>
@@ -10605,8 +10626,8 @@
         </p:nvSpPr>
         <p:spPr>
           <a:xfrm>
-            <a:off x="3063240" y="4754880"/>
-            <a:ext cx="2011680" cy="320040"/>
+            <a:off x="2734056" y="4754880"/>
+            <a:ext cx="2231136" cy="320040"/>
           </a:xfrm>
           <a:prstGeom prst="rect">
             <a:avLst/>
@@ -10624,7 +10645,7 @@
             <a:r>
               <a:rPr lang="en-US" sz="1300" dirty="0">
                 <a:solidFill>
-                  <a:srgbClr val="64748B"/>
+                  <a:srgbClr val="626A84"/>
                 </a:solidFill>
                 <a:latin typeface="Microsoft YaHei" pitchFamily="34" charset="0"/>
                 <a:ea typeface="Microsoft YaHei" pitchFamily="34" charset="-122"/>
@@ -10644,8 +10665,8 @@
         </p:nvSpPr>
         <p:spPr>
           <a:xfrm>
-            <a:off x="5303520" y="4114800"/>
-            <a:ext cx="2011680" cy="640080"/>
+            <a:off x="4965192" y="4114800"/>
+            <a:ext cx="2231136" cy="640080"/>
           </a:xfrm>
           <a:prstGeom prst="rect">
             <a:avLst/>
@@ -10663,7 +10684,7 @@
             <a:r>
               <a:rPr lang="en-US" sz="3200" b="1" dirty="0">
                 <a:solidFill>
-                  <a:srgbClr val="6366F1"/>
+                  <a:srgbClr val="3F4BD8"/>
                 </a:solidFill>
                 <a:latin typeface="Microsoft YaHei" pitchFamily="34" charset="0"/>
                 <a:ea typeface="Microsoft YaHei" pitchFamily="34" charset="-122"/>
@@ -10683,8 +10704,8 @@
         </p:nvSpPr>
         <p:spPr>
           <a:xfrm>
-            <a:off x="5303520" y="4754880"/>
-            <a:ext cx="2011680" cy="320040"/>
+            <a:off x="4965192" y="4754880"/>
+            <a:ext cx="2231136" cy="320040"/>
           </a:xfrm>
           <a:prstGeom prst="rect">
             <a:avLst/>
@@ -10702,7 +10723,7 @@
             <a:r>
               <a:rPr lang="en-US" sz="1300" dirty="0">
                 <a:solidFill>
-                  <a:srgbClr val="64748B"/>
+                  <a:srgbClr val="626A84"/>
                 </a:solidFill>
                 <a:latin typeface="Microsoft YaHei" pitchFamily="34" charset="0"/>
                 <a:ea typeface="Microsoft YaHei" pitchFamily="34" charset="-122"/>
@@ -10722,8 +10743,8 @@
         </p:nvSpPr>
         <p:spPr>
           <a:xfrm>
-            <a:off x="7543800" y="4114800"/>
-            <a:ext cx="2011680" cy="640080"/>
+            <a:off x="7196328" y="4114800"/>
+            <a:ext cx="2231136" cy="640080"/>
           </a:xfrm>
           <a:prstGeom prst="rect">
             <a:avLst/>
@@ -10741,13 +10762,13 @@
             <a:r>
               <a:rPr lang="en-US" sz="3200" b="1" dirty="0">
                 <a:solidFill>
-                  <a:srgbClr val="6366F1"/>
-                </a:solidFill>
-                <a:latin typeface="Microsoft YaHei" pitchFamily="34" charset="0"/>
-                <a:ea typeface="Microsoft YaHei" pitchFamily="34" charset="-122"/>
-                <a:cs typeface="Microsoft YaHei" pitchFamily="34" charset="-120"/>
-              </a:rPr>
-              <a:t>7999</a:t>
+                  <a:srgbClr val="3F4BD8"/>
+                </a:solidFill>
+                <a:latin typeface="Microsoft YaHei" pitchFamily="34" charset="0"/>
+                <a:ea typeface="Microsoft YaHei" pitchFamily="34" charset="-122"/>
+                <a:cs typeface="Microsoft YaHei" pitchFamily="34" charset="-120"/>
+              </a:rPr>
+              <a:t>9128</a:t>
             </a:r>
             <a:endParaRPr lang="en-US" sz="3200" dirty="0"/>
           </a:p>
@@ -10761,8 +10782,8 @@
         </p:nvSpPr>
         <p:spPr>
           <a:xfrm>
-            <a:off x="7543800" y="4754880"/>
-            <a:ext cx="2011680" cy="320040"/>
+            <a:off x="7196328" y="4754880"/>
+            <a:ext cx="2231136" cy="320040"/>
           </a:xfrm>
           <a:prstGeom prst="rect">
             <a:avLst/>
@@ -10780,13 +10801,13 @@
             <a:r>
               <a:rPr lang="en-US" sz="1300" dirty="0">
                 <a:solidFill>
-                  <a:srgbClr val="64748B"/>
-                </a:solidFill>
-                <a:latin typeface="Microsoft YaHei" pitchFamily="34" charset="0"/>
-                <a:ea typeface="Microsoft YaHei" pitchFamily="34" charset="-122"/>
-                <a:cs typeface="Microsoft YaHei" pitchFamily="34" charset="-120"/>
-              </a:rPr>
-              <a:t>溯源证据</a:t>
+                  <a:srgbClr val="626A84"/>
+                </a:solidFill>
+                <a:latin typeface="Microsoft YaHei" pitchFamily="34" charset="0"/>
+                <a:ea typeface="Microsoft YaHei" pitchFamily="34" charset="-122"/>
+                <a:cs typeface="Microsoft YaHei" pitchFamily="34" charset="-120"/>
+              </a:rPr>
+              <a:t>JD溯源证据</a:t>
             </a:r>
             <a:endParaRPr lang="en-US" sz="1300" dirty="0"/>
           </a:p>
@@ -10800,8 +10821,8 @@
         </p:nvSpPr>
         <p:spPr>
           <a:xfrm>
-            <a:off x="9784080" y="4114800"/>
-            <a:ext cx="2011680" cy="640080"/>
+            <a:off x="9427464" y="4114800"/>
+            <a:ext cx="2231136" cy="640080"/>
           </a:xfrm>
           <a:prstGeom prst="rect">
             <a:avLst/>
@@ -10819,13 +10840,13 @@
             <a:r>
               <a:rPr lang="en-US" sz="3200" b="1" dirty="0">
                 <a:solidFill>
-                  <a:srgbClr val="6366F1"/>
-                </a:solidFill>
-                <a:latin typeface="Microsoft YaHei" pitchFamily="34" charset="0"/>
-                <a:ea typeface="Microsoft YaHei" pitchFamily="34" charset="-122"/>
-                <a:cs typeface="Microsoft YaHei" pitchFamily="34" charset="-120"/>
-              </a:rPr>
-              <a:t>0.5613</a:t>
+                  <a:srgbClr val="3F4BD8"/>
+                </a:solidFill>
+                <a:latin typeface="Microsoft YaHei" pitchFamily="34" charset="0"/>
+                <a:ea typeface="Microsoft YaHei" pitchFamily="34" charset="-122"/>
+                <a:cs typeface="Microsoft YaHei" pitchFamily="34" charset="-120"/>
+              </a:rPr>
+              <a:t>0.5502</a:t>
             </a:r>
             <a:endParaRPr lang="en-US" sz="3200" dirty="0"/>
           </a:p>
@@ -10839,8 +10860,8 @@
         </p:nvSpPr>
         <p:spPr>
           <a:xfrm>
-            <a:off x="9784080" y="4754880"/>
-            <a:ext cx="2011680" cy="320040"/>
+            <a:off x="9427464" y="4754880"/>
+            <a:ext cx="2231136" cy="320040"/>
           </a:xfrm>
           <a:prstGeom prst="rect">
             <a:avLst/>
@@ -10858,13 +10879,13 @@
             <a:r>
               <a:rPr lang="en-US" sz="1300" dirty="0">
                 <a:solidFill>
-                  <a:srgbClr val="64748B"/>
-                </a:solidFill>
-                <a:latin typeface="Microsoft YaHei" pitchFamily="34" charset="0"/>
-                <a:ea typeface="Microsoft YaHei" pitchFamily="34" charset="-122"/>
-                <a:cs typeface="Microsoft YaHei" pitchFamily="34" charset="-120"/>
-              </a:rPr>
-              <a:t>岗位置信度均值</a:t>
+                  <a:srgbClr val="626A84"/>
+                </a:solidFill>
+                <a:latin typeface="Microsoft YaHei" pitchFamily="34" charset="0"/>
+                <a:ea typeface="Microsoft YaHei" pitchFamily="34" charset="-122"/>
+                <a:cs typeface="Microsoft YaHei" pitchFamily="34" charset="-120"/>
+              </a:rPr>
+              <a:t>岗位置信度均值（2026-08-30 口径）</a:t>
             </a:r>
             <a:endParaRPr lang="en-US" sz="1300" dirty="0"/>
           </a:p>
@@ -10889,7 +10910,7 @@
           </a:solidFill>
           <a:ln w="12700">
             <a:solidFill>
-              <a:srgbClr val="E2E8F0"/>
+              <a:srgbClr val="E2DFF1"/>
             </a:solidFill>
           </a:ln>
         </p:spPr>
@@ -10903,7 +10924,7 @@
             <a:r>
               <a:rPr lang="en-US" sz="1250" dirty="0">
                 <a:solidFill>
-                  <a:srgbClr val="64748B"/>
+                  <a:srgbClr val="626A84"/>
                 </a:solidFill>
                 <a:latin typeface="Microsoft YaHei" pitchFamily="34" charset="0"/>
                 <a:ea typeface="Microsoft YaHei" pitchFamily="34" charset="-122"/>
@@ -10942,7 +10963,7 @@
             <a:r>
               <a:rPr lang="en-US" sz="900" dirty="0">
                 <a:solidFill>
-                  <a:srgbClr val="94A3B8"/>
+                  <a:srgbClr val="767D92"/>
                 </a:solidFill>
                 <a:latin typeface="Microsoft YaHei" pitchFamily="34" charset="0"/>
                 <a:ea typeface="Microsoft YaHei" pitchFamily="34" charset="-122"/>
@@ -10981,7 +11002,7 @@
             <a:r>
               <a:rPr lang="en-US" sz="900" dirty="0">
                 <a:solidFill>
-                  <a:srgbClr val="94A3B8"/>
+                  <a:srgbClr val="767D92"/>
                 </a:solidFill>
                 <a:latin typeface="Microsoft YaHei" pitchFamily="34" charset="0"/>
                 <a:ea typeface="Microsoft YaHei" pitchFamily="34" charset="-122"/>
@@ -11007,7 +11028,7 @@
     <p:bg>
       <p:bgPr>
         <a:solidFill>
-          <a:srgbClr val="EEF4FF"/>
+          <a:srgbClr val="F3F1FB"/>
         </a:solidFill>
       </p:bgPr>
     </p:bg>
@@ -11042,13 +11063,13 @@
             </a:avLst>
           </a:prstGeom>
           <a:solidFill>
-            <a:srgbClr val="6366F1"/>
+            <a:srgbClr val="3F4BD8"/>
           </a:solidFill>
           <a:ln/>
           <a:effectLst>
             <a:outerShdw sx="100000" sy="100000" kx="0" ky="0" algn="bl" rotWithShape="0" blurRad="8.864377102649254e+74" dist="2.2160942756623134e+74" dir="9.14039610015744e+87">
-              <a:srgbClr val="93A8D8">
-                <a:alpha val="2.8000000000000004e+89"/>
+              <a:srgbClr val="9C93C8">
+                <a:alpha val="2.4000000000000003e+89"/>
               </a:srgbClr>
             </a:outerShdw>
           </a:effectLst>
@@ -11120,13 +11141,13 @@
             <a:r>
               <a:rPr lang="en-US" sz="2600" b="1" dirty="0">
                 <a:solidFill>
-                  <a:srgbClr val="1E293B"/>
-                </a:solidFill>
-                <a:latin typeface="Microsoft YaHei" pitchFamily="34" charset="0"/>
-                <a:ea typeface="Microsoft YaHei" pitchFamily="34" charset="-122"/>
-                <a:cs typeface="Microsoft YaHei" pitchFamily="34" charset="-120"/>
-              </a:rPr>
-              <a:t>真实数据采集与合规</a:t>
+                  <a:srgbClr val="1E2442"/>
+                </a:solidFill>
+                <a:latin typeface="Microsoft YaHei" pitchFamily="34" charset="0"/>
+                <a:ea typeface="Microsoft YaHei" pitchFamily="34" charset="-122"/>
+                <a:cs typeface="Microsoft YaHei" pitchFamily="34" charset="-120"/>
+              </a:rPr>
+              <a:t>真实数据采集、证据与治理</a:t>
             </a:r>
             <a:endParaRPr lang="en-US" sz="2600" dirty="0"/>
           </a:p>
@@ -11159,13 +11180,13 @@
             <a:r>
               <a:rPr lang="en-US" sz="1250" dirty="0">
                 <a:solidFill>
-                  <a:srgbClr val="64748B"/>
-                </a:solidFill>
-                <a:latin typeface="Microsoft YaHei" pitchFamily="34" charset="0"/>
-                <a:ea typeface="Microsoft YaHei" pitchFamily="34" charset="-122"/>
-                <a:cs typeface="Microsoft YaHei" pitchFamily="34" charset="-120"/>
-              </a:rPr>
-              <a:t>2570 条真实 JD · 官网公开接口合法采集 · 全程台账可溯源</a:t>
+                  <a:srgbClr val="626A84"/>
+                </a:solidFill>
+                <a:latin typeface="Microsoft YaHei" pitchFamily="34" charset="0"/>
+                <a:ea typeface="Microsoft YaHei" pitchFamily="34" charset="-122"/>
+                <a:cs typeface="Microsoft YaHei" pitchFamily="34" charset="-120"/>
+              </a:rPr>
+              <a:t>六类分发渠道累计 2570 条真实 JD · 有效 2404 / 重复 166 · 原始台账全程可溯源</a:t>
             </a:r>
             <a:endParaRPr lang="en-US" sz="1250" dirty="0"/>
           </a:p>
@@ -11198,7 +11219,7 @@
             <a:r>
               <a:rPr lang="en-US" sz="1000" dirty="0">
                 <a:solidFill>
-                  <a:srgbClr val="94A3B8"/>
+                  <a:srgbClr val="767D92"/>
                 </a:solidFill>
                 <a:latin typeface="Microsoft YaHei" pitchFamily="34" charset="0"/>
                 <a:ea typeface="Microsoft YaHei" pitchFamily="34" charset="-122"/>
@@ -11218,12 +11239,12 @@
         </p:nvSpPr>
         <p:spPr>
           <a:xfrm>
-            <a:off x="502920" y="1417320"/>
-            <a:ext cx="6949440" cy="822960"/>
+            <a:off x="502920" y="1353312"/>
+            <a:ext cx="3337560" cy="932688"/>
           </a:xfrm>
           <a:prstGeom prst="roundRect">
             <a:avLst>
-              <a:gd name="adj" fmla="val 11111"/>
+              <a:gd name="adj" fmla="val 9804"/>
             </a:avLst>
           </a:prstGeom>
           <a:solidFill>
@@ -11231,14 +11252,14 @@
           </a:solidFill>
           <a:ln w="12700">
             <a:solidFill>
-              <a:srgbClr val="E2E8F0"/>
+              <a:srgbClr val="E2DFF1"/>
             </a:solidFill>
             <a:prstDash val="solid"/>
           </a:ln>
           <a:effectLst>
             <a:outerShdw sx="100000" sy="100000" kx="0" ky="0" algn="bl" rotWithShape="0" blurRad="1.1257758920364552e+79" dist="2.814439730091138e+78" dir="5.484237660094465e+92">
-              <a:srgbClr val="93A8D8">
-                <a:alpha val="2.8000000000000004e+94"/>
+              <a:srgbClr val="9C93C8">
+                <a:alpha val="2.4000000000000002e+94"/>
               </a:srgbClr>
             </a:outerShdw>
           </a:effectLst>
@@ -11252,16 +11273,16 @@
         </p:nvSpPr>
         <p:spPr>
           <a:xfrm>
-            <a:off x="731520" y="1581912"/>
-            <a:ext cx="1645920" cy="502920"/>
+            <a:off x="685800" y="1536192"/>
+            <a:ext cx="1188720" cy="402336"/>
           </a:xfrm>
           <a:prstGeom prst="roundRect">
             <a:avLst>
-              <a:gd name="adj" fmla="val 49091"/>
+              <a:gd name="adj" fmla="val 50000"/>
             </a:avLst>
           </a:prstGeom>
           <a:solidFill>
-            <a:srgbClr val="6366F1"/>
+            <a:srgbClr val="3F4BD8"/>
           </a:solidFill>
           <a:ln/>
         </p:spPr>
@@ -11274,24 +11295,24 @@
         </p:nvSpPr>
         <p:spPr>
           <a:xfrm>
-            <a:off x="731520" y="1581912"/>
-            <a:ext cx="1645920" cy="502920"/>
-          </a:xfrm>
-          <a:prstGeom prst="rect">
-            <a:avLst/>
-          </a:prstGeom>
-          <a:noFill/>
-          <a:ln/>
-        </p:spPr>
-        <p:txBody>
-          <a:bodyPr wrap="square" rtlCol="0" anchor="ctr"/>
+            <a:off x="685800" y="1536192"/>
+            <a:ext cx="1188720" cy="402336"/>
+          </a:xfrm>
+          <a:prstGeom prst="rect">
+            <a:avLst/>
+          </a:prstGeom>
+          <a:noFill/>
+          <a:ln/>
+        </p:spPr>
+        <p:txBody>
+          <a:bodyPr wrap="square" lIns="0" tIns="0" rIns="0" bIns="0" rtlCol="0" anchor="ctr"/>
           <a:lstStyle/>
           <a:p>
             <a:pPr algn="ctr" indent="0" marL="0">
               <a:buNone/>
             </a:pPr>
             <a:r>
-              <a:rPr lang="en-US" sz="1250" b="1" dirty="0">
+              <a:rPr lang="en-US" sz="1150" b="1" dirty="0">
                 <a:solidFill>
                   <a:srgbClr val="FFFFFF"/>
                 </a:solidFill>
@@ -11299,9 +11320,9 @@
                 <a:ea typeface="Microsoft YaHei" pitchFamily="34" charset="-122"/>
                 <a:cs typeface="Microsoft YaHei" pitchFamily="34" charset="-120"/>
               </a:rPr>
-              <a:t>腾讯招聘</a:t>
-            </a:r>
-            <a:endParaRPr lang="en-US" sz="1250" dirty="0"/>
+              <a:t>飞书 ATS</a:t>
+            </a:r>
+            <a:endParaRPr lang="en-US" sz="1150" dirty="0"/>
           </a:p>
         </p:txBody>
       </p:sp>
@@ -11313,54 +11334,90 @@
         </p:nvSpPr>
         <p:spPr>
           <a:xfrm>
-            <a:off x="2560320" y="1417320"/>
-            <a:ext cx="4754880" cy="822960"/>
-          </a:xfrm>
-          <a:prstGeom prst="rect">
-            <a:avLst/>
-          </a:prstGeom>
-          <a:noFill/>
-          <a:ln/>
-        </p:spPr>
-        <p:txBody>
-          <a:bodyPr wrap="square" rtlCol="0" anchor="ctr"/>
+            <a:off x="2011680" y="1472184"/>
+            <a:ext cx="1508760" cy="347472"/>
+          </a:xfrm>
+          <a:prstGeom prst="rect">
+            <a:avLst/>
+          </a:prstGeom>
+          <a:noFill/>
+          <a:ln/>
+        </p:spPr>
+        <p:txBody>
+          <a:bodyPr wrap="square" lIns="0" tIns="0" rIns="0" bIns="0" rtlCol="0" anchor="ctr"/>
+          <a:lstStyle/>
+          <a:p>
+            <a:pPr algn="r" indent="0" marL="0">
+              <a:buNone/>
+            </a:pPr>
+            <a:r>
+              <a:rPr lang="en-US" sz="1800" b="1" dirty="0">
+                <a:solidFill>
+                  <a:srgbClr val="3F4BD8"/>
+                </a:solidFill>
+                <a:latin typeface="Microsoft YaHei" pitchFamily="34" charset="0"/>
+                <a:ea typeface="Microsoft YaHei" pitchFamily="34" charset="-122"/>
+                <a:cs typeface="Microsoft YaHei" pitchFamily="34" charset="-120"/>
+              </a:rPr>
+              <a:t>774 条</a:t>
+            </a:r>
+            <a:endParaRPr lang="en-US" sz="1800" dirty="0"/>
+          </a:p>
+        </p:txBody>
+      </p:sp>
+      <p:sp>
+        <p:nvSpPr>
+          <p:cNvPr id="11" name="Text 9"/>
+          <p:cNvSpPr/>
+          <p:nvPr/>
+        </p:nvSpPr>
+        <p:spPr>
+          <a:xfrm>
+            <a:off x="685800" y="1975104"/>
+            <a:ext cx="2926080" cy="201168"/>
+          </a:xfrm>
+          <a:prstGeom prst="rect">
+            <a:avLst/>
+          </a:prstGeom>
+          <a:noFill/>
+          <a:ln/>
+        </p:spPr>
+        <p:txBody>
+          <a:bodyPr wrap="square" lIns="0" tIns="0" rIns="0" bIns="0" rtlCol="0" anchor="ctr"/>
           <a:lstStyle/>
           <a:p>
             <a:pPr indent="0" marL="0">
-              <a:lnSpc>
-                <a:spcPct val="110000"/>
-              </a:lnSpc>
-              <a:buNone/>
-            </a:pPr>
-            <a:r>
-              <a:rPr lang="en-US" sz="1150" dirty="0">
-                <a:solidFill>
-                  <a:srgbClr val="64748B"/>
-                </a:solidFill>
-                <a:latin typeface="Microsoft YaHei" pitchFamily="34" charset="0"/>
-                <a:ea typeface="Microsoft YaHei" pitchFamily="34" charset="-122"/>
-                <a:cs typeface="Microsoft YaHei" pitchFamily="34" charset="-120"/>
-              </a:rPr>
-              <a:t>careers.tencent.com 官网公开接口 · 255 条 · 权威度 1.0（批次 2026W31-r1）</a:t>
-            </a:r>
-            <a:endParaRPr lang="en-US" sz="1150" dirty="0"/>
-          </a:p>
-        </p:txBody>
-      </p:sp>
-      <p:sp>
-        <p:nvSpPr>
-          <p:cNvPr id="11" name="Shape 9"/>
-          <p:cNvSpPr/>
-          <p:nvPr/>
-        </p:nvSpPr>
-        <p:spPr>
-          <a:xfrm>
-            <a:off x="502920" y="2350008"/>
-            <a:ext cx="6949440" cy="822960"/>
+              <a:buNone/>
+            </a:pPr>
+            <a:r>
+              <a:rPr lang="en-US" sz="950" dirty="0">
+                <a:solidFill>
+                  <a:srgbClr val="626A84"/>
+                </a:solidFill>
+                <a:latin typeface="Microsoft YaHei" pitchFamily="34" charset="0"/>
+                <a:ea typeface="Microsoft YaHei" pitchFamily="34" charset="-122"/>
+                <a:cs typeface="Microsoft YaHei" pitchFamily="34" charset="-120"/>
+              </a:rPr>
+              <a:t>企业官网公开职位</a:t>
+            </a:r>
+            <a:endParaRPr lang="en-US" sz="950" dirty="0"/>
+          </a:p>
+        </p:txBody>
+      </p:sp>
+      <p:sp>
+        <p:nvSpPr>
+          <p:cNvPr id="12" name="Shape 10"/>
+          <p:cNvSpPr/>
+          <p:nvPr/>
+        </p:nvSpPr>
+        <p:spPr>
+          <a:xfrm>
+            <a:off x="4069080" y="1353312"/>
+            <a:ext cx="3337560" cy="932688"/>
           </a:xfrm>
           <a:prstGeom prst="roundRect">
             <a:avLst>
-              <a:gd name="adj" fmla="val 11111"/>
+              <a:gd name="adj" fmla="val 9804"/>
             </a:avLst>
           </a:prstGeom>
           <a:solidFill>
@@ -11368,14 +11425,14 @@
           </a:solidFill>
           <a:ln w="12700">
             <a:solidFill>
-              <a:srgbClr val="E2E8F0"/>
+              <a:srgbClr val="E2DFF1"/>
             </a:solidFill>
             <a:prstDash val="solid"/>
           </a:ln>
           <a:effectLst>
             <a:outerShdw sx="100000" sy="100000" kx="0" ky="0" algn="bl" rotWithShape="0" blurRad="1.429735382886298e+83" dist="3.574338457215745e+82" dir="3.2905425960566786e+97">
-              <a:srgbClr val="93A8D8">
-                <a:alpha val="2.8000000000000003e+99"/>
+              <a:srgbClr val="9C93C8">
+                <a:alpha val="2.4e+99"/>
               </a:srgbClr>
             </a:outerShdw>
           </a:effectLst>
@@ -11383,52 +11440,52 @@
       </p:sp>
       <p:sp>
         <p:nvSpPr>
-          <p:cNvPr id="12" name="Shape 10"/>
-          <p:cNvSpPr/>
-          <p:nvPr/>
-        </p:nvSpPr>
-        <p:spPr>
-          <a:xfrm>
-            <a:off x="731520" y="2514600"/>
-            <a:ext cx="1645920" cy="502920"/>
+          <p:cNvPr id="13" name="Shape 11"/>
+          <p:cNvSpPr/>
+          <p:nvPr/>
+        </p:nvSpPr>
+        <p:spPr>
+          <a:xfrm>
+            <a:off x="4251960" y="1536192"/>
+            <a:ext cx="1188720" cy="402336"/>
           </a:xfrm>
           <a:prstGeom prst="roundRect">
             <a:avLst>
-              <a:gd name="adj" fmla="val 49091"/>
+              <a:gd name="adj" fmla="val 50000"/>
             </a:avLst>
           </a:prstGeom>
           <a:solidFill>
-            <a:srgbClr val="0EA5E9"/>
+            <a:srgbClr val="0E7490"/>
           </a:solidFill>
           <a:ln/>
         </p:spPr>
       </p:sp>
       <p:sp>
         <p:nvSpPr>
-          <p:cNvPr id="13" name="Text 11"/>
-          <p:cNvSpPr/>
-          <p:nvPr/>
-        </p:nvSpPr>
-        <p:spPr>
-          <a:xfrm>
-            <a:off x="731520" y="2514600"/>
-            <a:ext cx="1645920" cy="502920"/>
-          </a:xfrm>
-          <a:prstGeom prst="rect">
-            <a:avLst/>
-          </a:prstGeom>
-          <a:noFill/>
-          <a:ln/>
-        </p:spPr>
-        <p:txBody>
-          <a:bodyPr wrap="square" rtlCol="0" anchor="ctr"/>
+          <p:cNvPr id="14" name="Text 12"/>
+          <p:cNvSpPr/>
+          <p:nvPr/>
+        </p:nvSpPr>
+        <p:spPr>
+          <a:xfrm>
+            <a:off x="4251960" y="1536192"/>
+            <a:ext cx="1188720" cy="402336"/>
+          </a:xfrm>
+          <a:prstGeom prst="rect">
+            <a:avLst/>
+          </a:prstGeom>
+          <a:noFill/>
+          <a:ln/>
+        </p:spPr>
+        <p:txBody>
+          <a:bodyPr wrap="square" lIns="0" tIns="0" rIns="0" bIns="0" rtlCol="0" anchor="ctr"/>
           <a:lstStyle/>
           <a:p>
             <a:pPr algn="ctr" indent="0" marL="0">
               <a:buNone/>
             </a:pPr>
             <a:r>
-              <a:rPr lang="en-US" sz="1250" b="1" dirty="0">
+              <a:rPr lang="en-US" sz="1150" b="1" dirty="0">
                 <a:solidFill>
                   <a:srgbClr val="FFFFFF"/>
                 </a:solidFill>
@@ -11436,68 +11493,104 @@
                 <a:ea typeface="Microsoft YaHei" pitchFamily="34" charset="-122"/>
                 <a:cs typeface="Microsoft YaHei" pitchFamily="34" charset="-120"/>
               </a:rPr>
-              <a:t>网易招聘</a:t>
-            </a:r>
-            <a:endParaRPr lang="en-US" sz="1250" dirty="0"/>
-          </a:p>
-        </p:txBody>
-      </p:sp>
-      <p:sp>
-        <p:nvSpPr>
-          <p:cNvPr id="14" name="Text 12"/>
-          <p:cNvSpPr/>
-          <p:nvPr/>
-        </p:nvSpPr>
-        <p:spPr>
-          <a:xfrm>
-            <a:off x="2560320" y="2350008"/>
-            <a:ext cx="4754880" cy="822960"/>
-          </a:xfrm>
-          <a:prstGeom prst="rect">
-            <a:avLst/>
-          </a:prstGeom>
-          <a:noFill/>
-          <a:ln/>
-        </p:spPr>
-        <p:txBody>
-          <a:bodyPr wrap="square" rtlCol="0" anchor="ctr"/>
+              <a:t>国聘网</a:t>
+            </a:r>
+            <a:endParaRPr lang="en-US" sz="1150" dirty="0"/>
+          </a:p>
+        </p:txBody>
+      </p:sp>
+      <p:sp>
+        <p:nvSpPr>
+          <p:cNvPr id="15" name="Text 13"/>
+          <p:cNvSpPr/>
+          <p:nvPr/>
+        </p:nvSpPr>
+        <p:spPr>
+          <a:xfrm>
+            <a:off x="5577840" y="1472184"/>
+            <a:ext cx="1508760" cy="347472"/>
+          </a:xfrm>
+          <a:prstGeom prst="rect">
+            <a:avLst/>
+          </a:prstGeom>
+          <a:noFill/>
+          <a:ln/>
+        </p:spPr>
+        <p:txBody>
+          <a:bodyPr wrap="square" lIns="0" tIns="0" rIns="0" bIns="0" rtlCol="0" anchor="ctr"/>
+          <a:lstStyle/>
+          <a:p>
+            <a:pPr algn="r" indent="0" marL="0">
+              <a:buNone/>
+            </a:pPr>
+            <a:r>
+              <a:rPr lang="en-US" sz="1800" b="1" dirty="0">
+                <a:solidFill>
+                  <a:srgbClr val="0E7490"/>
+                </a:solidFill>
+                <a:latin typeface="Microsoft YaHei" pitchFamily="34" charset="0"/>
+                <a:ea typeface="Microsoft YaHei" pitchFamily="34" charset="-122"/>
+                <a:cs typeface="Microsoft YaHei" pitchFamily="34" charset="-120"/>
+              </a:rPr>
+              <a:t>671 条</a:t>
+            </a:r>
+            <a:endParaRPr lang="en-US" sz="1800" dirty="0"/>
+          </a:p>
+        </p:txBody>
+      </p:sp>
+      <p:sp>
+        <p:nvSpPr>
+          <p:cNvPr id="16" name="Text 14"/>
+          <p:cNvSpPr/>
+          <p:nvPr/>
+        </p:nvSpPr>
+        <p:spPr>
+          <a:xfrm>
+            <a:off x="4251960" y="1975104"/>
+            <a:ext cx="2926080" cy="201168"/>
+          </a:xfrm>
+          <a:prstGeom prst="rect">
+            <a:avLst/>
+          </a:prstGeom>
+          <a:noFill/>
+          <a:ln/>
+        </p:spPr>
+        <p:txBody>
+          <a:bodyPr wrap="square" lIns="0" tIns="0" rIns="0" bIns="0" rtlCol="0" anchor="ctr"/>
           <a:lstStyle/>
           <a:p>
             <a:pPr indent="0" marL="0">
-              <a:lnSpc>
-                <a:spcPct val="110000"/>
-              </a:lnSpc>
-              <a:buNone/>
-            </a:pPr>
-            <a:r>
-              <a:rPr lang="en-US" sz="1150" dirty="0">
-                <a:solidFill>
-                  <a:srgbClr val="64748B"/>
-                </a:solidFill>
-                <a:latin typeface="Microsoft YaHei" pitchFamily="34" charset="0"/>
-                <a:ea typeface="Microsoft YaHei" pitchFamily="34" charset="-122"/>
-                <a:cs typeface="Microsoft YaHei" pitchFamily="34" charset="-120"/>
-              </a:rPr>
-              <a:t>hr.163.com 官网公开接口 · 251 条 · 权威度 1.0（批次 2026W31-r1）</a:t>
-            </a:r>
-            <a:endParaRPr lang="en-US" sz="1150" dirty="0"/>
-          </a:p>
-        </p:txBody>
-      </p:sp>
-      <p:sp>
-        <p:nvSpPr>
-          <p:cNvPr id="15" name="Shape 13"/>
-          <p:cNvSpPr/>
-          <p:nvPr/>
-        </p:nvSpPr>
-        <p:spPr>
-          <a:xfrm>
-            <a:off x="502920" y="3282696"/>
-            <a:ext cx="6949440" cy="822960"/>
+              <a:buNone/>
+            </a:pPr>
+            <a:r>
+              <a:rPr lang="en-US" sz="950" dirty="0">
+                <a:solidFill>
+                  <a:srgbClr val="626A84"/>
+                </a:solidFill>
+                <a:latin typeface="Microsoft YaHei" pitchFamily="34" charset="0"/>
+                <a:ea typeface="Microsoft YaHei" pitchFamily="34" charset="-122"/>
+                <a:cs typeface="Microsoft YaHei" pitchFamily="34" charset="-120"/>
+              </a:rPr>
+              <a:t>国家级公共招聘平台</a:t>
+            </a:r>
+            <a:endParaRPr lang="en-US" sz="950" dirty="0"/>
+          </a:p>
+        </p:txBody>
+      </p:sp>
+      <p:sp>
+        <p:nvSpPr>
+          <p:cNvPr id="17" name="Shape 15"/>
+          <p:cNvSpPr/>
+          <p:nvPr/>
+        </p:nvSpPr>
+        <p:spPr>
+          <a:xfrm>
+            <a:off x="502920" y="2432304"/>
+            <a:ext cx="3337560" cy="932688"/>
           </a:xfrm>
           <a:prstGeom prst="roundRect">
             <a:avLst>
-              <a:gd name="adj" fmla="val 11111"/>
+              <a:gd name="adj" fmla="val 9804"/>
             </a:avLst>
           </a:prstGeom>
           <a:solidFill>
@@ -11505,14 +11598,14 @@
           </a:solidFill>
           <a:ln w="12700">
             <a:solidFill>
-              <a:srgbClr val="E2E8F0"/>
+              <a:srgbClr val="E2DFF1"/>
             </a:solidFill>
             <a:prstDash val="solid"/>
           </a:ln>
           <a:effectLst>
             <a:outerShdw sx="100000" sy="100000" kx="0" ky="0" algn="bl" rotWithShape="0" blurRad="1.8157639362655985e+87" dist="4.539409840663996e+86" dir="1.9743255576340073e+102">
-              <a:srgbClr val="93A8D8">
-                <a:alpha val="2.8000000000000003e+104"/>
+              <a:srgbClr val="9C93C8">
+                <a:alpha val="2.4e+104"/>
               </a:srgbClr>
             </a:outerShdw>
           </a:effectLst>
@@ -11520,52 +11613,52 @@
       </p:sp>
       <p:sp>
         <p:nvSpPr>
-          <p:cNvPr id="16" name="Shape 14"/>
-          <p:cNvSpPr/>
-          <p:nvPr/>
-        </p:nvSpPr>
-        <p:spPr>
-          <a:xfrm>
-            <a:off x="731520" y="3447288"/>
-            <a:ext cx="1645920" cy="502920"/>
+          <p:cNvPr id="18" name="Shape 16"/>
+          <p:cNvSpPr/>
+          <p:nvPr/>
+        </p:nvSpPr>
+        <p:spPr>
+          <a:xfrm>
+            <a:off x="685800" y="2615184"/>
+            <a:ext cx="1188720" cy="402336"/>
           </a:xfrm>
           <a:prstGeom prst="roundRect">
             <a:avLst>
-              <a:gd name="adj" fmla="val 49091"/>
+              <a:gd name="adj" fmla="val 50000"/>
             </a:avLst>
           </a:prstGeom>
           <a:solidFill>
-            <a:srgbClr val="A855F7"/>
+            <a:srgbClr val="B02AA8"/>
           </a:solidFill>
           <a:ln/>
         </p:spPr>
       </p:sp>
       <p:sp>
         <p:nvSpPr>
-          <p:cNvPr id="17" name="Text 15"/>
-          <p:cNvSpPr/>
-          <p:nvPr/>
-        </p:nvSpPr>
-        <p:spPr>
-          <a:xfrm>
-            <a:off x="731520" y="3447288"/>
-            <a:ext cx="1645920" cy="502920"/>
-          </a:xfrm>
-          <a:prstGeom prst="rect">
-            <a:avLst/>
-          </a:prstGeom>
-          <a:noFill/>
-          <a:ln/>
-        </p:spPr>
-        <p:txBody>
-          <a:bodyPr wrap="square" rtlCol="0" anchor="ctr"/>
+          <p:cNvPr id="19" name="Text 17"/>
+          <p:cNvSpPr/>
+          <p:nvPr/>
+        </p:nvSpPr>
+        <p:spPr>
+          <a:xfrm>
+            <a:off x="685800" y="2615184"/>
+            <a:ext cx="1188720" cy="402336"/>
+          </a:xfrm>
+          <a:prstGeom prst="rect">
+            <a:avLst/>
+          </a:prstGeom>
+          <a:noFill/>
+          <a:ln/>
+        </p:spPr>
+        <p:txBody>
+          <a:bodyPr wrap="square" lIns="0" tIns="0" rIns="0" bIns="0" rtlCol="0" anchor="ctr"/>
           <a:lstStyle/>
           <a:p>
             <a:pPr algn="ctr" indent="0" marL="0">
               <a:buNone/>
             </a:pPr>
             <a:r>
-              <a:rPr lang="en-US" sz="1250" b="1" dirty="0">
+              <a:rPr lang="en-US" sz="1150" b="1" dirty="0">
                 <a:solidFill>
                   <a:srgbClr val="FFFFFF"/>
                 </a:solidFill>
@@ -11573,68 +11666,104 @@
                 <a:ea typeface="Microsoft YaHei" pitchFamily="34" charset="-122"/>
                 <a:cs typeface="Microsoft YaHei" pitchFamily="34" charset="-120"/>
               </a:rPr>
-              <a:t>2018 历史基线</a:t>
-            </a:r>
-            <a:endParaRPr lang="en-US" sz="1250" dirty="0"/>
-          </a:p>
-        </p:txBody>
-      </p:sp>
-      <p:sp>
-        <p:nvSpPr>
-          <p:cNvPr id="18" name="Text 16"/>
-          <p:cNvSpPr/>
-          <p:nvPr/>
-        </p:nvSpPr>
-        <p:spPr>
-          <a:xfrm>
-            <a:off x="2560320" y="3282696"/>
-            <a:ext cx="4754880" cy="822960"/>
-          </a:xfrm>
-          <a:prstGeom prst="rect">
-            <a:avLst/>
-          </a:prstGeom>
-          <a:noFill/>
-          <a:ln/>
-        </p:spPr>
-        <p:txBody>
-          <a:bodyPr wrap="square" rtlCol="0" anchor="ctr"/>
+              <a:t>前程无忧</a:t>
+            </a:r>
+            <a:endParaRPr lang="en-US" sz="1150" dirty="0"/>
+          </a:p>
+        </p:txBody>
+      </p:sp>
+      <p:sp>
+        <p:nvSpPr>
+          <p:cNvPr id="20" name="Text 18"/>
+          <p:cNvSpPr/>
+          <p:nvPr/>
+        </p:nvSpPr>
+        <p:spPr>
+          <a:xfrm>
+            <a:off x="2011680" y="2551176"/>
+            <a:ext cx="1508760" cy="347472"/>
+          </a:xfrm>
+          <a:prstGeom prst="rect">
+            <a:avLst/>
+          </a:prstGeom>
+          <a:noFill/>
+          <a:ln/>
+        </p:spPr>
+        <p:txBody>
+          <a:bodyPr wrap="square" lIns="0" tIns="0" rIns="0" bIns="0" rtlCol="0" anchor="ctr"/>
+          <a:lstStyle/>
+          <a:p>
+            <a:pPr algn="r" indent="0" marL="0">
+              <a:buNone/>
+            </a:pPr>
+            <a:r>
+              <a:rPr lang="en-US" sz="1800" b="1" dirty="0">
+                <a:solidFill>
+                  <a:srgbClr val="B02AA8"/>
+                </a:solidFill>
+                <a:latin typeface="Microsoft YaHei" pitchFamily="34" charset="0"/>
+                <a:ea typeface="Microsoft YaHei" pitchFamily="34" charset="-122"/>
+                <a:cs typeface="Microsoft YaHei" pitchFamily="34" charset="-120"/>
+              </a:rPr>
+              <a:t>300 条</a:t>
+            </a:r>
+            <a:endParaRPr lang="en-US" sz="1800" dirty="0"/>
+          </a:p>
+        </p:txBody>
+      </p:sp>
+      <p:sp>
+        <p:nvSpPr>
+          <p:cNvPr id="21" name="Text 19"/>
+          <p:cNvSpPr/>
+          <p:nvPr/>
+        </p:nvSpPr>
+        <p:spPr>
+          <a:xfrm>
+            <a:off x="685800" y="3054096"/>
+            <a:ext cx="2926080" cy="201168"/>
+          </a:xfrm>
+          <a:prstGeom prst="rect">
+            <a:avLst/>
+          </a:prstGeom>
+          <a:noFill/>
+          <a:ln/>
+        </p:spPr>
+        <p:txBody>
+          <a:bodyPr wrap="square" lIns="0" tIns="0" rIns="0" bIns="0" rtlCol="0" anchor="ctr"/>
           <a:lstStyle/>
           <a:p>
             <a:pPr indent="0" marL="0">
-              <a:lnSpc>
-                <a:spcPct val="110000"/>
-              </a:lnSpc>
-              <a:buNone/>
-            </a:pPr>
-            <a:r>
-              <a:rPr lang="en-US" sz="1150" dirty="0">
-                <a:solidFill>
-                  <a:srgbClr val="64748B"/>
-                </a:solidFill>
-                <a:latin typeface="Microsoft YaHei" pitchFamily="34" charset="0"/>
-                <a:ea typeface="Microsoft YaHei" pitchFamily="34" charset="-122"/>
-                <a:cs typeface="Microsoft YaHei" pitchFamily="34" charset="-120"/>
-              </a:rPr>
-              <a:t>前程无忧公开数据集 300 条（2018-12 采集）· 权威度 0.7 · 驱动真实 v1→v2 演化</a:t>
-            </a:r>
-            <a:endParaRPr lang="en-US" sz="1150" dirty="0"/>
-          </a:p>
-        </p:txBody>
-      </p:sp>
-      <p:sp>
-        <p:nvSpPr>
-          <p:cNvPr id="19" name="Shape 17"/>
-          <p:cNvSpPr/>
-          <p:nvPr/>
-        </p:nvSpPr>
-        <p:spPr>
-          <a:xfrm>
-            <a:off x="502920" y="4215384"/>
-            <a:ext cx="6949440" cy="822960"/>
+              <a:buNone/>
+            </a:pPr>
+            <a:r>
+              <a:rPr lang="en-US" sz="950" dirty="0">
+                <a:solidFill>
+                  <a:srgbClr val="626A84"/>
+                </a:solidFill>
+                <a:latin typeface="Microsoft YaHei" pitchFamily="34" charset="0"/>
+                <a:ea typeface="Microsoft YaHei" pitchFamily="34" charset="-122"/>
+                <a:cs typeface="Microsoft YaHei" pitchFamily="34" charset="-120"/>
+              </a:rPr>
+              <a:t>2018 历史公开数据集</a:t>
+            </a:r>
+            <a:endParaRPr lang="en-US" sz="950" dirty="0"/>
+          </a:p>
+        </p:txBody>
+      </p:sp>
+      <p:sp>
+        <p:nvSpPr>
+          <p:cNvPr id="22" name="Shape 20"/>
+          <p:cNvSpPr/>
+          <p:nvPr/>
+        </p:nvSpPr>
+        <p:spPr>
+          <a:xfrm>
+            <a:off x="4069080" y="2432304"/>
+            <a:ext cx="3337560" cy="932688"/>
           </a:xfrm>
           <a:prstGeom prst="roundRect">
             <a:avLst>
-              <a:gd name="adj" fmla="val 11111"/>
+              <a:gd name="adj" fmla="val 9804"/>
             </a:avLst>
           </a:prstGeom>
           <a:solidFill>
@@ -11642,14 +11771,14 @@
           </a:solidFill>
           <a:ln w="12700">
             <a:solidFill>
-              <a:srgbClr val="E2E8F0"/>
+              <a:srgbClr val="E2DFF1"/>
             </a:solidFill>
             <a:prstDash val="solid"/>
           </a:ln>
           <a:effectLst>
             <a:outerShdw sx="100000" sy="100000" kx="0" ky="0" algn="bl" rotWithShape="0" blurRad="2.30602019905731e+91" dist="5.765050497643275e+90" dir="1.1845953345804043e+107">
-              <a:srgbClr val="93A8D8">
-                <a:alpha val="2.8e+109"/>
+              <a:srgbClr val="9C93C8">
+                <a:alpha val="2.4e+109"/>
               </a:srgbClr>
             </a:outerShdw>
           </a:effectLst>
@@ -11657,52 +11786,52 @@
       </p:sp>
       <p:sp>
         <p:nvSpPr>
-          <p:cNvPr id="20" name="Shape 18"/>
-          <p:cNvSpPr/>
-          <p:nvPr/>
-        </p:nvSpPr>
-        <p:spPr>
-          <a:xfrm>
-            <a:off x="731520" y="4379976"/>
-            <a:ext cx="1645920" cy="502920"/>
+          <p:cNvPr id="23" name="Shape 21"/>
+          <p:cNvSpPr/>
+          <p:nvPr/>
+        </p:nvSpPr>
+        <p:spPr>
+          <a:xfrm>
+            <a:off x="4251960" y="2615184"/>
+            <a:ext cx="1188720" cy="402336"/>
           </a:xfrm>
           <a:prstGeom prst="roundRect">
             <a:avLst>
-              <a:gd name="adj" fmla="val 49091"/>
+              <a:gd name="adj" fmla="val 50000"/>
             </a:avLst>
           </a:prstGeom>
           <a:solidFill>
-            <a:srgbClr val="10B981"/>
+            <a:srgbClr val="047857"/>
           </a:solidFill>
           <a:ln/>
         </p:spPr>
       </p:sp>
       <p:sp>
         <p:nvSpPr>
-          <p:cNvPr id="21" name="Text 19"/>
-          <p:cNvSpPr/>
-          <p:nvPr/>
-        </p:nvSpPr>
-        <p:spPr>
-          <a:xfrm>
-            <a:off x="731520" y="4379976"/>
-            <a:ext cx="1645920" cy="502920"/>
-          </a:xfrm>
-          <a:prstGeom prst="rect">
-            <a:avLst/>
-          </a:prstGeom>
-          <a:noFill/>
-          <a:ln/>
-        </p:spPr>
-        <p:txBody>
-          <a:bodyPr wrap="square" rtlCol="0" anchor="ctr"/>
+          <p:cNvPr id="24" name="Text 22"/>
+          <p:cNvSpPr/>
+          <p:nvPr/>
+        </p:nvSpPr>
+        <p:spPr>
+          <a:xfrm>
+            <a:off x="4251960" y="2615184"/>
+            <a:ext cx="1188720" cy="402336"/>
+          </a:xfrm>
+          <a:prstGeom prst="rect">
+            <a:avLst/>
+          </a:prstGeom>
+          <a:noFill/>
+          <a:ln/>
+        </p:spPr>
+        <p:txBody>
+          <a:bodyPr wrap="square" lIns="0" tIns="0" rIns="0" bIns="0" rtlCol="0" anchor="ctr"/>
           <a:lstStyle/>
           <a:p>
             <a:pPr algn="ctr" indent="0" marL="0">
               <a:buNone/>
             </a:pPr>
             <a:r>
-              <a:rPr lang="en-US" sz="1250" b="1" dirty="0">
+              <a:rPr lang="en-US" sz="1150" b="1" dirty="0">
                 <a:solidFill>
                   <a:srgbClr val="FFFFFF"/>
                 </a:solidFill>
@@ -11710,68 +11839,104 @@
                 <a:ea typeface="Microsoft YaHei" pitchFamily="34" charset="-122"/>
                 <a:cs typeface="Microsoft YaHei" pitchFamily="34" charset="-120"/>
               </a:rPr>
-              <a:t>权威佐证</a:t>
-            </a:r>
-            <a:endParaRPr lang="en-US" sz="1250" dirty="0"/>
-          </a:p>
-        </p:txBody>
-      </p:sp>
-      <p:sp>
-        <p:nvSpPr>
-          <p:cNvPr id="22" name="Text 20"/>
-          <p:cNvSpPr/>
-          <p:nvPr/>
-        </p:nvSpPr>
-        <p:spPr>
-          <a:xfrm>
-            <a:off x="2560320" y="4215384"/>
-            <a:ext cx="4754880" cy="822960"/>
-          </a:xfrm>
-          <a:prstGeom prst="rect">
-            <a:avLst/>
-          </a:prstGeom>
-          <a:noFill/>
-          <a:ln/>
-        </p:spPr>
-        <p:txBody>
-          <a:bodyPr wrap="square" rtlCol="0" anchor="ctr"/>
+              <a:t>AIJob</a:t>
+            </a:r>
+            <a:endParaRPr lang="en-US" sz="1150" dirty="0"/>
+          </a:p>
+        </p:txBody>
+      </p:sp>
+      <p:sp>
+        <p:nvSpPr>
+          <p:cNvPr id="25" name="Text 23"/>
+          <p:cNvSpPr/>
+          <p:nvPr/>
+        </p:nvSpPr>
+        <p:spPr>
+          <a:xfrm>
+            <a:off x="5577840" y="2551176"/>
+            <a:ext cx="1508760" cy="347472"/>
+          </a:xfrm>
+          <a:prstGeom prst="rect">
+            <a:avLst/>
+          </a:prstGeom>
+          <a:noFill/>
+          <a:ln/>
+        </p:spPr>
+        <p:txBody>
+          <a:bodyPr wrap="square" lIns="0" tIns="0" rIns="0" bIns="0" rtlCol="0" anchor="ctr"/>
+          <a:lstStyle/>
+          <a:p>
+            <a:pPr algn="r" indent="0" marL="0">
+              <a:buNone/>
+            </a:pPr>
+            <a:r>
+              <a:rPr lang="en-US" sz="1800" b="1" dirty="0">
+                <a:solidFill>
+                  <a:srgbClr val="047857"/>
+                </a:solidFill>
+                <a:latin typeface="Microsoft YaHei" pitchFamily="34" charset="0"/>
+                <a:ea typeface="Microsoft YaHei" pitchFamily="34" charset="-122"/>
+                <a:cs typeface="Microsoft YaHei" pitchFamily="34" charset="-120"/>
+              </a:rPr>
+              <a:t>300 条</a:t>
+            </a:r>
+            <a:endParaRPr lang="en-US" sz="1800" dirty="0"/>
+          </a:p>
+        </p:txBody>
+      </p:sp>
+      <p:sp>
+        <p:nvSpPr>
+          <p:cNvPr id="26" name="Text 24"/>
+          <p:cNvSpPr/>
+          <p:nvPr/>
+        </p:nvSpPr>
+        <p:spPr>
+          <a:xfrm>
+            <a:off x="4251960" y="3054096"/>
+            <a:ext cx="2926080" cy="201168"/>
+          </a:xfrm>
+          <a:prstGeom prst="rect">
+            <a:avLst/>
+          </a:prstGeom>
+          <a:noFill/>
+          <a:ln/>
+        </p:spPr>
+        <p:txBody>
+          <a:bodyPr wrap="square" lIns="0" tIns="0" rIns="0" bIns="0" rtlCol="0" anchor="ctr"/>
           <a:lstStyle/>
           <a:p>
             <a:pPr indent="0" marL="0">
-              <a:lnSpc>
-                <a:spcPct val="110000"/>
-              </a:lnSpc>
-              <a:buNone/>
-            </a:pPr>
-            <a:r>
-              <a:rPr lang="en-US" sz="1150" dirty="0">
-                <a:solidFill>
-                  <a:srgbClr val="64748B"/>
-                </a:solidFill>
-                <a:latin typeface="Microsoft YaHei" pitchFamily="34" charset="0"/>
-                <a:ea typeface="Microsoft YaHei" pitchFamily="34" charset="-122"/>
-                <a:cs typeface="Microsoft YaHei" pitchFamily="34" charset="-120"/>
-              </a:rPr>
-              <a:t>人社部文件 / 头部机构报告 8 条 · 权威度 1.0 · 原文快照归档</a:t>
-            </a:r>
-            <a:endParaRPr lang="en-US" sz="1150" dirty="0"/>
-          </a:p>
-        </p:txBody>
-      </p:sp>
-      <p:sp>
-        <p:nvSpPr>
-          <p:cNvPr id="23" name="Shape 21"/>
-          <p:cNvSpPr/>
-          <p:nvPr/>
-        </p:nvSpPr>
-        <p:spPr>
-          <a:xfrm>
-            <a:off x="7635240" y="1417320"/>
-            <a:ext cx="4023360" cy="3639312"/>
+              <a:buNone/>
+            </a:pPr>
+            <a:r>
+              <a:rPr lang="en-US" sz="950" dirty="0">
+                <a:solidFill>
+                  <a:srgbClr val="626A84"/>
+                </a:solidFill>
+                <a:latin typeface="Microsoft YaHei" pitchFamily="34" charset="0"/>
+                <a:ea typeface="Microsoft YaHei" pitchFamily="34" charset="-122"/>
+                <a:cs typeface="Microsoft YaHei" pitchFamily="34" charset="-120"/>
+              </a:rPr>
+              <a:t>2024 公开数据集</a:t>
+            </a:r>
+            <a:endParaRPr lang="en-US" sz="950" dirty="0"/>
+          </a:p>
+        </p:txBody>
+      </p:sp>
+      <p:sp>
+        <p:nvSpPr>
+          <p:cNvPr id="27" name="Shape 25"/>
+          <p:cNvSpPr/>
+          <p:nvPr/>
+        </p:nvSpPr>
+        <p:spPr>
+          <a:xfrm>
+            <a:off x="502920" y="3511296"/>
+            <a:ext cx="3337560" cy="932688"/>
           </a:xfrm>
           <a:prstGeom prst="roundRect">
             <a:avLst>
-              <a:gd name="adj" fmla="val 2513"/>
+              <a:gd name="adj" fmla="val 9804"/>
             </a:avLst>
           </a:prstGeom>
           <a:solidFill>
@@ -11779,14 +11944,14 @@
           </a:solidFill>
           <a:ln w="12700">
             <a:solidFill>
-              <a:srgbClr val="E2E8F0"/>
+              <a:srgbClr val="E2DFF1"/>
             </a:solidFill>
             <a:prstDash val="solid"/>
           </a:ln>
           <a:effectLst>
             <a:outerShdw sx="100000" sy="100000" kx="0" ky="0" algn="bl" rotWithShape="0" blurRad="2.9286456528027836e+95" dist="7.321614132006959e+94" dir="7.107572007482426e+111">
-              <a:srgbClr val="93A8D8">
-                <a:alpha val="2.8e+114"/>
+              <a:srgbClr val="9C93C8">
+                <a:alpha val="2.3999999999999998e+114"/>
               </a:srgbClr>
             </a:outerShdw>
           </a:effectLst>
@@ -11794,32 +11959,378 @@
       </p:sp>
       <p:sp>
         <p:nvSpPr>
-          <p:cNvPr id="24" name="Text 22"/>
-          <p:cNvSpPr/>
-          <p:nvPr/>
-        </p:nvSpPr>
-        <p:spPr>
-          <a:xfrm>
-            <a:off x="7863840" y="1572768"/>
-            <a:ext cx="3566160" cy="365760"/>
-          </a:xfrm>
-          <a:prstGeom prst="rect">
-            <a:avLst/>
-          </a:prstGeom>
-          <a:noFill/>
-          <a:ln/>
-        </p:spPr>
-        <p:txBody>
-          <a:bodyPr wrap="square" rtlCol="0" anchor="ctr"/>
+          <p:cNvPr id="28" name="Shape 26"/>
+          <p:cNvSpPr/>
+          <p:nvPr/>
+        </p:nvSpPr>
+        <p:spPr>
+          <a:xfrm>
+            <a:off x="685800" y="3694176"/>
+            <a:ext cx="1188720" cy="402336"/>
+          </a:xfrm>
+          <a:prstGeom prst="roundRect">
+            <a:avLst>
+              <a:gd name="adj" fmla="val 50000"/>
+            </a:avLst>
+          </a:prstGeom>
+          <a:solidFill>
+            <a:srgbClr val="A16207"/>
+          </a:solidFill>
+          <a:ln/>
+        </p:spPr>
+      </p:sp>
+      <p:sp>
+        <p:nvSpPr>
+          <p:cNvPr id="29" name="Text 27"/>
+          <p:cNvSpPr/>
+          <p:nvPr/>
+        </p:nvSpPr>
+        <p:spPr>
+          <a:xfrm>
+            <a:off x="685800" y="3694176"/>
+            <a:ext cx="1188720" cy="402336"/>
+          </a:xfrm>
+          <a:prstGeom prst="rect">
+            <a:avLst/>
+          </a:prstGeom>
+          <a:noFill/>
+          <a:ln/>
+        </p:spPr>
+        <p:txBody>
+          <a:bodyPr wrap="square" lIns="0" tIns="0" rIns="0" bIns="0" rtlCol="0" anchor="ctr"/>
+          <a:lstStyle/>
+          <a:p>
+            <a:pPr algn="ctr" indent="0" marL="0">
+              <a:buNone/>
+            </a:pPr>
+            <a:r>
+              <a:rPr lang="en-US" sz="1150" b="1" dirty="0">
+                <a:solidFill>
+                  <a:srgbClr val="FFFFFF"/>
+                </a:solidFill>
+                <a:latin typeface="Microsoft YaHei" pitchFamily="34" charset="0"/>
+                <a:ea typeface="Microsoft YaHei" pitchFamily="34" charset="-122"/>
+                <a:cs typeface="Microsoft YaHei" pitchFamily="34" charset="-120"/>
+              </a:rPr>
+              <a:t>腾讯招聘</a:t>
+            </a:r>
+            <a:endParaRPr lang="en-US" sz="1150" dirty="0"/>
+          </a:p>
+        </p:txBody>
+      </p:sp>
+      <p:sp>
+        <p:nvSpPr>
+          <p:cNvPr id="30" name="Text 28"/>
+          <p:cNvSpPr/>
+          <p:nvPr/>
+        </p:nvSpPr>
+        <p:spPr>
+          <a:xfrm>
+            <a:off x="2011680" y="3630168"/>
+            <a:ext cx="1508760" cy="347472"/>
+          </a:xfrm>
+          <a:prstGeom prst="rect">
+            <a:avLst/>
+          </a:prstGeom>
+          <a:noFill/>
+          <a:ln/>
+        </p:spPr>
+        <p:txBody>
+          <a:bodyPr wrap="square" lIns="0" tIns="0" rIns="0" bIns="0" rtlCol="0" anchor="ctr"/>
+          <a:lstStyle/>
+          <a:p>
+            <a:pPr algn="r" indent="0" marL="0">
+              <a:buNone/>
+            </a:pPr>
+            <a:r>
+              <a:rPr lang="en-US" sz="1800" b="1" dirty="0">
+                <a:solidFill>
+                  <a:srgbClr val="A16207"/>
+                </a:solidFill>
+                <a:latin typeface="Microsoft YaHei" pitchFamily="34" charset="0"/>
+                <a:ea typeface="Microsoft YaHei" pitchFamily="34" charset="-122"/>
+                <a:cs typeface="Microsoft YaHei" pitchFamily="34" charset="-120"/>
+              </a:rPr>
+              <a:t>272 条</a:t>
+            </a:r>
+            <a:endParaRPr lang="en-US" sz="1800" dirty="0"/>
+          </a:p>
+        </p:txBody>
+      </p:sp>
+      <p:sp>
+        <p:nvSpPr>
+          <p:cNvPr id="31" name="Text 29"/>
+          <p:cNvSpPr/>
+          <p:nvPr/>
+        </p:nvSpPr>
+        <p:spPr>
+          <a:xfrm>
+            <a:off x="685800" y="4133088"/>
+            <a:ext cx="2926080" cy="201168"/>
+          </a:xfrm>
+          <a:prstGeom prst="rect">
+            <a:avLst/>
+          </a:prstGeom>
+          <a:noFill/>
+          <a:ln/>
+        </p:spPr>
+        <p:txBody>
+          <a:bodyPr wrap="square" lIns="0" tIns="0" rIns="0" bIns="0" rtlCol="0" anchor="ctr"/>
           <a:lstStyle/>
           <a:p>
             <a:pPr indent="0" marL="0">
               <a:buNone/>
             </a:pPr>
             <a:r>
+              <a:rPr lang="en-US" sz="950" dirty="0">
+                <a:solidFill>
+                  <a:srgbClr val="626A84"/>
+                </a:solidFill>
+                <a:latin typeface="Microsoft YaHei" pitchFamily="34" charset="0"/>
+                <a:ea typeface="Microsoft YaHei" pitchFamily="34" charset="-122"/>
+                <a:cs typeface="Microsoft YaHei" pitchFamily="34" charset="-120"/>
+              </a:rPr>
+              <a:t>企业官网公开接口</a:t>
+            </a:r>
+            <a:endParaRPr lang="en-US" sz="950" dirty="0"/>
+          </a:p>
+        </p:txBody>
+      </p:sp>
+      <p:sp>
+        <p:nvSpPr>
+          <p:cNvPr id="32" name="Shape 30"/>
+          <p:cNvSpPr/>
+          <p:nvPr/>
+        </p:nvSpPr>
+        <p:spPr>
+          <a:xfrm>
+            <a:off x="4069080" y="3511296"/>
+            <a:ext cx="3337560" cy="932688"/>
+          </a:xfrm>
+          <a:prstGeom prst="roundRect">
+            <a:avLst>
+              <a:gd name="adj" fmla="val 9804"/>
+            </a:avLst>
+          </a:prstGeom>
+          <a:solidFill>
+            <a:srgbClr val="FFFFFF"/>
+          </a:solidFill>
+          <a:ln w="12700">
+            <a:solidFill>
+              <a:srgbClr val="E2DFF1"/>
+            </a:solidFill>
+            <a:prstDash val="solid"/>
+          </a:ln>
+          <a:effectLst>
+            <a:outerShdw sx="100000" sy="100000" kx="0" ky="0" algn="bl" rotWithShape="0" blurRad="3.7193799790595354e+99" dist="9.298449947648839e+98" dir="4.2645432044894554e+116">
+              <a:srgbClr val="9C93C8">
+                <a:alpha val="2.3999999999999997e+119"/>
+              </a:srgbClr>
+            </a:outerShdw>
+          </a:effectLst>
+        </p:spPr>
+      </p:sp>
+      <p:sp>
+        <p:nvSpPr>
+          <p:cNvPr id="33" name="Shape 31"/>
+          <p:cNvSpPr/>
+          <p:nvPr/>
+        </p:nvSpPr>
+        <p:spPr>
+          <a:xfrm>
+            <a:off x="4251960" y="3694176"/>
+            <a:ext cx="1188720" cy="402336"/>
+          </a:xfrm>
+          <a:prstGeom prst="roundRect">
+            <a:avLst>
+              <a:gd name="adj" fmla="val 50000"/>
+            </a:avLst>
+          </a:prstGeom>
+          <a:solidFill>
+            <a:srgbClr val="BE123C"/>
+          </a:solidFill>
+          <a:ln/>
+        </p:spPr>
+      </p:sp>
+      <p:sp>
+        <p:nvSpPr>
+          <p:cNvPr id="34" name="Text 32"/>
+          <p:cNvSpPr/>
+          <p:nvPr/>
+        </p:nvSpPr>
+        <p:spPr>
+          <a:xfrm>
+            <a:off x="4251960" y="3694176"/>
+            <a:ext cx="1188720" cy="402336"/>
+          </a:xfrm>
+          <a:prstGeom prst="rect">
+            <a:avLst/>
+          </a:prstGeom>
+          <a:noFill/>
+          <a:ln/>
+        </p:spPr>
+        <p:txBody>
+          <a:bodyPr wrap="square" lIns="0" tIns="0" rIns="0" bIns="0" rtlCol="0" anchor="ctr"/>
+          <a:lstStyle/>
+          <a:p>
+            <a:pPr algn="ctr" indent="0" marL="0">
+              <a:buNone/>
+            </a:pPr>
+            <a:r>
+              <a:rPr lang="en-US" sz="1150" b="1" dirty="0">
+                <a:solidFill>
+                  <a:srgbClr val="FFFFFF"/>
+                </a:solidFill>
+                <a:latin typeface="Microsoft YaHei" pitchFamily="34" charset="0"/>
+                <a:ea typeface="Microsoft YaHei" pitchFamily="34" charset="-122"/>
+                <a:cs typeface="Microsoft YaHei" pitchFamily="34" charset="-120"/>
+              </a:rPr>
+              <a:t>网易招聘</a:t>
+            </a:r>
+            <a:endParaRPr lang="en-US" sz="1150" dirty="0"/>
+          </a:p>
+        </p:txBody>
+      </p:sp>
+      <p:sp>
+        <p:nvSpPr>
+          <p:cNvPr id="35" name="Text 33"/>
+          <p:cNvSpPr/>
+          <p:nvPr/>
+        </p:nvSpPr>
+        <p:spPr>
+          <a:xfrm>
+            <a:off x="5577840" y="3630168"/>
+            <a:ext cx="1508760" cy="347472"/>
+          </a:xfrm>
+          <a:prstGeom prst="rect">
+            <a:avLst/>
+          </a:prstGeom>
+          <a:noFill/>
+          <a:ln/>
+        </p:spPr>
+        <p:txBody>
+          <a:bodyPr wrap="square" lIns="0" tIns="0" rIns="0" bIns="0" rtlCol="0" anchor="ctr"/>
+          <a:lstStyle/>
+          <a:p>
+            <a:pPr algn="r" indent="0" marL="0">
+              <a:buNone/>
+            </a:pPr>
+            <a:r>
+              <a:rPr lang="en-US" sz="1800" b="1" dirty="0">
+                <a:solidFill>
+                  <a:srgbClr val="BE123C"/>
+                </a:solidFill>
+                <a:latin typeface="Microsoft YaHei" pitchFamily="34" charset="0"/>
+                <a:ea typeface="Microsoft YaHei" pitchFamily="34" charset="-122"/>
+                <a:cs typeface="Microsoft YaHei" pitchFamily="34" charset="-120"/>
+              </a:rPr>
+              <a:t>253 条</a:t>
+            </a:r>
+            <a:endParaRPr lang="en-US" sz="1800" dirty="0"/>
+          </a:p>
+        </p:txBody>
+      </p:sp>
+      <p:sp>
+        <p:nvSpPr>
+          <p:cNvPr id="36" name="Text 34"/>
+          <p:cNvSpPr/>
+          <p:nvPr/>
+        </p:nvSpPr>
+        <p:spPr>
+          <a:xfrm>
+            <a:off x="4251960" y="4133088"/>
+            <a:ext cx="2926080" cy="201168"/>
+          </a:xfrm>
+          <a:prstGeom prst="rect">
+            <a:avLst/>
+          </a:prstGeom>
+          <a:noFill/>
+          <a:ln/>
+        </p:spPr>
+        <p:txBody>
+          <a:bodyPr wrap="square" lIns="0" tIns="0" rIns="0" bIns="0" rtlCol="0" anchor="ctr"/>
+          <a:lstStyle/>
+          <a:p>
+            <a:pPr indent="0" marL="0">
+              <a:buNone/>
+            </a:pPr>
+            <a:r>
+              <a:rPr lang="en-US" sz="950" dirty="0">
+                <a:solidFill>
+                  <a:srgbClr val="626A84"/>
+                </a:solidFill>
+                <a:latin typeface="Microsoft YaHei" pitchFamily="34" charset="0"/>
+                <a:ea typeface="Microsoft YaHei" pitchFamily="34" charset="-122"/>
+                <a:cs typeface="Microsoft YaHei" pitchFamily="34" charset="-120"/>
+              </a:rPr>
+              <a:t>企业官网公开接口</a:t>
+            </a:r>
+            <a:endParaRPr lang="en-US" sz="950" dirty="0"/>
+          </a:p>
+        </p:txBody>
+      </p:sp>
+      <p:sp>
+        <p:nvSpPr>
+          <p:cNvPr id="37" name="Shape 35"/>
+          <p:cNvSpPr/>
+          <p:nvPr/>
+        </p:nvSpPr>
+        <p:spPr>
+          <a:xfrm>
+            <a:off x="7635240" y="1353312"/>
+            <a:ext cx="4023360" cy="3090672"/>
+          </a:xfrm>
+          <a:prstGeom prst="roundRect">
+            <a:avLst>
+              <a:gd name="adj" fmla="val 2959"/>
+            </a:avLst>
+          </a:prstGeom>
+          <a:solidFill>
+            <a:srgbClr val="FFFFFF"/>
+          </a:solidFill>
+          <a:ln w="12700">
+            <a:solidFill>
+              <a:srgbClr val="E2DFF1"/>
+            </a:solidFill>
+            <a:prstDash val="solid"/>
+          </a:ln>
+          <a:effectLst>
+            <a:outerShdw sx="100000" sy="100000" kx="0" ky="0" algn="bl" rotWithShape="0" blurRad="4.72361257340561e+103" dist="1.1809031433514024e+103" dir="2.5587259226936733e+121">
+              <a:srgbClr val="9C93C8">
+                <a:alpha val="2.3999999999999996e+124"/>
+              </a:srgbClr>
+            </a:outerShdw>
+          </a:effectLst>
+        </p:spPr>
+      </p:sp>
+      <p:sp>
+        <p:nvSpPr>
+          <p:cNvPr id="38" name="Text 36"/>
+          <p:cNvSpPr/>
+          <p:nvPr/>
+        </p:nvSpPr>
+        <p:spPr>
+          <a:xfrm>
+            <a:off x="7909560" y="1554480"/>
+            <a:ext cx="3474720" cy="320040"/>
+          </a:xfrm>
+          <a:prstGeom prst="rect">
+            <a:avLst/>
+          </a:prstGeom>
+          <a:noFill/>
+          <a:ln/>
+        </p:spPr>
+        <p:txBody>
+          <a:bodyPr wrap="square" lIns="0" tIns="0" rIns="0" bIns="0" rtlCol="0" anchor="ctr"/>
+          <a:lstStyle/>
+          <a:p>
+            <a:pPr indent="0" marL="0">
+              <a:buNone/>
+            </a:pPr>
+            <a:r>
               <a:rPr lang="en-US" sz="1400" b="1" dirty="0">
                 <a:solidFill>
-                  <a:srgbClr val="6366F1"/>
+                  <a:srgbClr val="3F4BD8"/>
                 </a:solidFill>
                 <a:latin typeface="Microsoft YaHei" pitchFamily="34" charset="0"/>
                 <a:ea typeface="Microsoft YaHei" pitchFamily="34" charset="-122"/>
@@ -11833,35 +12344,35 @@
       </p:sp>
       <p:sp>
         <p:nvSpPr>
-          <p:cNvPr id="25" name="Text 23"/>
-          <p:cNvSpPr/>
-          <p:nvPr/>
-        </p:nvSpPr>
-        <p:spPr>
-          <a:xfrm>
-            <a:off x="7863840" y="2011680"/>
-            <a:ext cx="3566160" cy="2926080"/>
-          </a:xfrm>
-          <a:prstGeom prst="rect">
-            <a:avLst/>
-          </a:prstGeom>
-          <a:noFill/>
-          <a:ln/>
-        </p:spPr>
-        <p:txBody>
-          <a:bodyPr wrap="square" rtlCol="0" anchor="ctr"/>
+          <p:cNvPr id="39" name="Text 37"/>
+          <p:cNvSpPr/>
+          <p:nvPr/>
+        </p:nvSpPr>
+        <p:spPr>
+          <a:xfrm>
+            <a:off x="7909560" y="1938528"/>
+            <a:ext cx="3429000" cy="2331720"/>
+          </a:xfrm>
+          <a:prstGeom prst="rect">
+            <a:avLst/>
+          </a:prstGeom>
+          <a:noFill/>
+          <a:ln/>
+        </p:spPr>
+        <p:txBody>
+          <a:bodyPr wrap="square" lIns="254" tIns="254" rIns="254" bIns="254" rtlCol="0" anchor="t"/>
           <a:lstStyle/>
           <a:p>
             <a:pPr indent="0" marL="0">
               <a:spcAft>
-                <a:spcPts val="600"/>
+                <a:spcPts val="1700"/>
               </a:spcAft>
               <a:buNone/>
             </a:pPr>
             <a:r>
               <a:rPr lang="en-US" sz="1150" dirty="0">
                 <a:solidFill>
-                  <a:srgbClr val="64748B"/>
+                  <a:srgbClr val="626A84"/>
                 </a:solidFill>
                 <a:latin typeface="Microsoft YaHei" pitchFamily="34" charset="0"/>
                 <a:ea typeface="Microsoft YaHei" pitchFamily="34" charset="-122"/>
@@ -11874,14 +12385,14 @@
           <a:p>
             <a:pPr indent="0" marL="0">
               <a:spcAft>
-                <a:spcPts val="600"/>
+                <a:spcPts val="1700"/>
               </a:spcAft>
               <a:buNone/>
             </a:pPr>
             <a:r>
               <a:rPr lang="en-US" sz="1150" dirty="0">
                 <a:solidFill>
-                  <a:srgbClr val="64748B"/>
+                  <a:srgbClr val="626A84"/>
                 </a:solidFill>
                 <a:latin typeface="Microsoft YaHei" pitchFamily="34" charset="0"/>
                 <a:ea typeface="Microsoft YaHei" pitchFamily="34" charset="-122"/>
@@ -11894,14 +12405,14 @@
           <a:p>
             <a:pPr indent="0" marL="0">
               <a:spcAft>
-                <a:spcPts val="600"/>
+                <a:spcPts val="1700"/>
               </a:spcAft>
               <a:buNone/>
             </a:pPr>
             <a:r>
               <a:rPr lang="en-US" sz="1150" dirty="0">
                 <a:solidFill>
-                  <a:srgbClr val="64748B"/>
+                  <a:srgbClr val="626A84"/>
                 </a:solidFill>
                 <a:latin typeface="Microsoft YaHei" pitchFamily="34" charset="0"/>
                 <a:ea typeface="Microsoft YaHei" pitchFamily="34" charset="-122"/>
@@ -11914,14 +12425,14 @@
           <a:p>
             <a:pPr indent="0" marL="0">
               <a:spcAft>
-                <a:spcPts val="600"/>
+                <a:spcPts val="1700"/>
               </a:spcAft>
               <a:buNone/>
             </a:pPr>
             <a:r>
               <a:rPr lang="en-US" sz="1150" dirty="0">
                 <a:solidFill>
-                  <a:srgbClr val="64748B"/>
+                  <a:srgbClr val="626A84"/>
                 </a:solidFill>
                 <a:latin typeface="Microsoft YaHei" pitchFamily="34" charset="0"/>
                 <a:ea typeface="Microsoft YaHei" pitchFamily="34" charset="-122"/>
@@ -11934,40 +12445,40 @@
           <a:p>
             <a:pPr indent="0" marL="0">
               <a:spcAft>
-                <a:spcPts val="600"/>
+                <a:spcPts val="1700"/>
               </a:spcAft>
               <a:buNone/>
             </a:pPr>
             <a:r>
               <a:rPr lang="en-US" sz="1150" dirty="0">
                 <a:solidFill>
-                  <a:srgbClr val="64748B"/>
-                </a:solidFill>
-                <a:latin typeface="Microsoft YaHei" pitchFamily="34" charset="0"/>
-                <a:ea typeface="Microsoft YaHei" pitchFamily="34" charset="-122"/>
-                <a:cs typeface="Microsoft YaHei" pitchFamily="34" charset="-120"/>
-              </a:rPr>
-              <a:t>· jsonl 原始留存 + raw_jd 表溯源</a:t>
+                  <a:srgbClr val="626A84"/>
+                </a:solidFill>
+                <a:latin typeface="Microsoft YaHei" pitchFamily="34" charset="0"/>
+                <a:ea typeface="Microsoft YaHei" pitchFamily="34" charset="-122"/>
+                <a:cs typeface="Microsoft YaHei" pitchFamily="34" charset="-120"/>
+              </a:rPr>
+              <a:t>· jsonl 原始留存 + RawJD 溯源</a:t>
             </a:r>
             <a:endParaRPr lang="en-US" sz="1150" dirty="0"/>
           </a:p>
           <a:p>
             <a:pPr indent="0" marL="0">
               <a:spcAft>
-                <a:spcPts val="600"/>
+                <a:spcPts val="1700"/>
               </a:spcAft>
               <a:buNone/>
             </a:pPr>
             <a:r>
               <a:rPr lang="en-US" sz="1150" dirty="0">
                 <a:solidFill>
-                  <a:srgbClr val="64748B"/>
-                </a:solidFill>
-                <a:latin typeface="Microsoft YaHei" pitchFamily="34" charset="0"/>
-                <a:ea typeface="Microsoft YaHei" pitchFamily="34" charset="-122"/>
-                <a:cs typeface="Microsoft YaHei" pitchFamily="34" charset="-120"/>
-              </a:rPr>
-              <a:t>· SimHash 查重检出 25 条重复</a:t>
+                  <a:srgbClr val="626A84"/>
+                </a:solidFill>
+                <a:latin typeface="Microsoft YaHei" pitchFamily="34" charset="0"/>
+                <a:ea typeface="Microsoft YaHei" pitchFamily="34" charset="-122"/>
+                <a:cs typeface="Microsoft YaHei" pitchFamily="34" charset="-120"/>
+              </a:rPr>
+              <a:t>· SimHash 检出 166 条重复</a:t>
             </a:r>
             <a:endParaRPr lang="en-US" sz="1150" dirty="0"/>
           </a:p>
@@ -11975,40 +12486,89 @@
       </p:sp>
       <p:sp>
         <p:nvSpPr>
-          <p:cNvPr id="26" name="Text 24"/>
-          <p:cNvSpPr/>
-          <p:nvPr/>
-        </p:nvSpPr>
-        <p:spPr>
-          <a:xfrm>
-            <a:off x="502920" y="5349240"/>
-            <a:ext cx="11155680" cy="777240"/>
+          <p:cNvPr id="40" name="Text 38"/>
+          <p:cNvSpPr/>
+          <p:nvPr/>
+        </p:nvSpPr>
+        <p:spPr>
+          <a:xfrm>
+            <a:off x="502920" y="4617720"/>
+            <a:ext cx="11155680" cy="502920"/>
           </a:xfrm>
           <a:prstGeom prst="rect">
             <a:avLst/>
           </a:prstGeom>
           <a:solidFill>
-            <a:srgbClr val="E0E9FF"/>
+            <a:srgbClr val="E8F7F2"/>
           </a:solidFill>
-          <a:ln/>
-        </p:spPr>
-        <p:txBody>
-          <a:bodyPr wrap="square" rtlCol="0" anchor="ctr"/>
+          <a:ln w="12700">
+            <a:solidFill>
+              <a:srgbClr val="BDE8DC"/>
+            </a:solidFill>
+          </a:ln>
+        </p:spPr>
+        <p:txBody>
+          <a:bodyPr wrap="square" lIns="0" tIns="0" rIns="0" bIns="0" rtlCol="0" anchor="ctr"/>
           <a:lstStyle/>
           <a:p>
             <a:pPr algn="ctr" indent="0" marL="0">
               <a:buNone/>
             </a:pPr>
             <a:r>
+              <a:rPr lang="en-US" sz="1300" b="1" dirty="0">
+                <a:solidFill>
+                  <a:srgbClr val="047857"/>
+                </a:solidFill>
+                <a:latin typeface="Microsoft YaHei" pitchFamily="34" charset="0"/>
+                <a:ea typeface="Microsoft YaHei" pitchFamily="34" charset="-122"/>
+                <a:cs typeface="Microsoft YaHei" pitchFamily="34" charset="-120"/>
+              </a:rPr>
+              <a:t>AuthorityEvidence 21 条 · 覆盖 19 / 32 岗 · 6 / 6 新兴岗位全覆盖（8 条）</a:t>
+            </a:r>
+            <a:endParaRPr lang="en-US" sz="1300" dirty="0"/>
+          </a:p>
+        </p:txBody>
+      </p:sp>
+      <p:sp>
+        <p:nvSpPr>
+          <p:cNvPr id="41" name="Text 39"/>
+          <p:cNvSpPr/>
+          <p:nvPr/>
+        </p:nvSpPr>
+        <p:spPr>
+          <a:xfrm>
+            <a:off x="502920" y="5257800"/>
+            <a:ext cx="11155680" cy="502920"/>
+          </a:xfrm>
+          <a:prstGeom prst="rect">
+            <a:avLst/>
+          </a:prstGeom>
+          <a:solidFill>
+            <a:srgbClr val="EDE9FE"/>
+          </a:solidFill>
+          <a:ln w="12700">
+            <a:solidFill>
+              <a:srgbClr val="D8D0F5"/>
+            </a:solidFill>
+          </a:ln>
+        </p:spPr>
+        <p:txBody>
+          <a:bodyPr wrap="square" lIns="0" tIns="0" rIns="0" bIns="0" rtlCol="0" anchor="ctr"/>
+          <a:lstStyle/>
+          <a:p>
+            <a:pPr algn="ctr" indent="0" marL="0">
+              <a:buNone/>
+            </a:pPr>
+            <a:r>
               <a:rPr lang="en-US" sz="1200" b="1" dirty="0">
                 <a:solidFill>
-                  <a:srgbClr val="6366F1"/>
-                </a:solidFill>
-                <a:latin typeface="Microsoft YaHei" pitchFamily="34" charset="0"/>
-                <a:ea typeface="Microsoft YaHei" pitchFamily="34" charset="-122"/>
-                <a:cs typeface="Microsoft YaHei" pitchFamily="34" charset="-120"/>
-              </a:rPr>
-              <a:t>数据源台账在系统首页可视化：采集 2570 → 查重 → 解析 → 交叉验证 → 入图谱，闭环每一环都有真实数字可查；合成数据集（379 条）重新定位为对抗测试夹具，不进生产图谱</a:t>
+                  <a:srgbClr val="3F4BD8"/>
+                </a:solidFill>
+                <a:latin typeface="Microsoft YaHei" pitchFamily="34" charset="0"/>
+                <a:ea typeface="Microsoft YaHei" pitchFamily="34" charset="-122"/>
+                <a:cs typeface="Microsoft YaHei" pitchFamily="34" charset="-120"/>
+              </a:rPr>
+              <a:t>雇主识别 87.56%（2105 / 2404，页面显示 88%） · 独立来源按独立雇主实体归一化，同雇主跨渠道分发只计 1 次</a:t>
             </a:r>
             <a:endParaRPr lang="en-US" sz="1200" dirty="0"/>
           </a:p>
@@ -12016,7 +12576,46 @@
       </p:sp>
       <p:sp>
         <p:nvSpPr>
-          <p:cNvPr id="27" name="Text 25"/>
+          <p:cNvPr id="42" name="Text 40"/>
+          <p:cNvSpPr/>
+          <p:nvPr/>
+        </p:nvSpPr>
+        <p:spPr>
+          <a:xfrm>
+            <a:off x="502920" y="5852160"/>
+            <a:ext cx="11155680" cy="402336"/>
+          </a:xfrm>
+          <a:prstGeom prst="rect">
+            <a:avLst/>
+          </a:prstGeom>
+          <a:noFill/>
+          <a:ln/>
+        </p:spPr>
+        <p:txBody>
+          <a:bodyPr wrap="square" lIns="0" tIns="0" rIns="0" bIns="0" rtlCol="0" anchor="ctr"/>
+          <a:lstStyle/>
+          <a:p>
+            <a:pPr algn="ctr" indent="0" marL="0">
+              <a:buNone/>
+            </a:pPr>
+            <a:r>
+              <a:rPr lang="en-US" sz="1150" dirty="0">
+                <a:solidFill>
+                  <a:srgbClr val="626A84"/>
+                </a:solidFill>
+                <a:latin typeface="Microsoft YaHei" pitchFamily="34" charset="0"/>
+                <a:ea typeface="Microsoft YaHei" pitchFamily="34" charset="-122"/>
+                <a:cs typeface="Microsoft YaHei" pitchFamily="34" charset="-120"/>
+              </a:rPr>
+              <a:t>RoleContract ready 6 / 32（18.75%）｜对完整证据图投影 8–12 个同粒度能力簇；未 ready 表示证据不足，不代表岗位不可用</a:t>
+            </a:r>
+            <a:endParaRPr lang="en-US" sz="1150" dirty="0"/>
+          </a:p>
+        </p:txBody>
+      </p:sp>
+      <p:sp>
+        <p:nvSpPr>
+          <p:cNvPr id="43" name="Text 41"/>
           <p:cNvSpPr/>
           <p:nvPr/>
         </p:nvSpPr>
@@ -12041,7 +12640,7 @@
             <a:r>
               <a:rPr lang="en-US" sz="900" dirty="0">
                 <a:solidFill>
-                  <a:srgbClr val="94A3B8"/>
+                  <a:srgbClr val="767D92"/>
                 </a:solidFill>
                 <a:latin typeface="Microsoft YaHei" pitchFamily="34" charset="0"/>
                 <a:ea typeface="Microsoft YaHei" pitchFamily="34" charset="-122"/>
@@ -12055,7 +12654,7 @@
       </p:sp>
       <p:sp>
         <p:nvSpPr>
-          <p:cNvPr id="28" name="Text 26"/>
+          <p:cNvPr id="44" name="Text 42"/>
           <p:cNvSpPr/>
           <p:nvPr/>
         </p:nvSpPr>
@@ -12080,7 +12679,7 @@
             <a:r>
               <a:rPr lang="en-US" sz="900" dirty="0">
                 <a:solidFill>
-                  <a:srgbClr val="94A3B8"/>
+                  <a:srgbClr val="767D92"/>
                 </a:solidFill>
                 <a:latin typeface="Microsoft YaHei" pitchFamily="34" charset="0"/>
                 <a:ea typeface="Microsoft YaHei" pitchFamily="34" charset="-122"/>
@@ -12106,7 +12705,7 @@
     <p:bg>
       <p:bgPr>
         <a:solidFill>
-          <a:srgbClr val="EEF4FF"/>
+          <a:srgbClr val="F3F1FB"/>
         </a:solidFill>
       </p:bgPr>
     </p:bg>
@@ -12141,13 +12740,13 @@
             </a:avLst>
           </a:prstGeom>
           <a:solidFill>
-            <a:srgbClr val="6366F1"/>
+            <a:srgbClr val="3F4BD8"/>
           </a:solidFill>
           <a:ln/>
           <a:effectLst>
-            <a:outerShdw sx="100000" sy="100000" kx="0" ky="0" algn="bl" rotWithShape="0" blurRad="3.7193799790595354e+99" dist="9.298449947648839e+98" dir="4.2645432044894554e+116">
-              <a:srgbClr val="93A8D8">
-                <a:alpha val="2.8e+119"/>
+            <a:outerShdw sx="100000" sy="100000" kx="0" ky="0" algn="bl" rotWithShape="0" blurRad="5.998987968225125e+107" dist="1.499746992056281e+107" dir="1.535235553616204e+126">
+              <a:srgbClr val="9C93C8">
+                <a:alpha val="2.3999999999999996e+129"/>
               </a:srgbClr>
             </a:outerShdw>
           </a:effectLst>
@@ -12219,7 +12818,7 @@
             <a:r>
               <a:rPr lang="en-US" sz="2600" b="1" dirty="0">
                 <a:solidFill>
-                  <a:srgbClr val="1E293B"/>
+                  <a:srgbClr val="1E2442"/>
                 </a:solidFill>
                 <a:latin typeface="Microsoft YaHei" pitchFamily="34" charset="0"/>
                 <a:ea typeface="Microsoft YaHei" pitchFamily="34" charset="-122"/>
@@ -12258,7 +12857,7 @@
             <a:r>
               <a:rPr lang="en-US" sz="1250" dirty="0">
                 <a:solidFill>
-                  <a:srgbClr val="64748B"/>
+                  <a:srgbClr val="626A84"/>
                 </a:solidFill>
                 <a:latin typeface="Microsoft YaHei" pitchFamily="34" charset="0"/>
                 <a:ea typeface="Microsoft YaHei" pitchFamily="34" charset="-122"/>
@@ -12297,7 +12896,7 @@
             <a:r>
               <a:rPr lang="en-US" sz="1000" dirty="0">
                 <a:solidFill>
-                  <a:srgbClr val="94A3B8"/>
+                  <a:srgbClr val="767D92"/>
                 </a:solidFill>
                 <a:latin typeface="Microsoft YaHei" pitchFamily="34" charset="0"/>
                 <a:ea typeface="Microsoft YaHei" pitchFamily="34" charset="-122"/>
@@ -12330,14 +12929,14 @@
           </a:solidFill>
           <a:ln w="12700">
             <a:solidFill>
-              <a:srgbClr val="E2E8F0"/>
+              <a:srgbClr val="E2DFF1"/>
             </a:solidFill>
             <a:prstDash val="solid"/>
           </a:ln>
           <a:effectLst>
-            <a:outerShdw sx="100000" sy="100000" kx="0" ky="0" algn="bl" rotWithShape="0" blurRad="4.72361257340561e+103" dist="1.1809031433514024e+103" dir="2.5587259226936733e+121">
-              <a:srgbClr val="93A8D8">
-                <a:alpha val="2.8e+124"/>
+            <a:outerShdw sx="100000" sy="100000" kx="0" ky="0" algn="bl" rotWithShape="0" blurRad="7.618714719645908e+111" dist="1.904678679911477e+111" dir="9.211413321697224e+130">
+              <a:srgbClr val="9C93C8">
+                <a:alpha val="2.3999999999999997e+134"/>
               </a:srgbClr>
             </a:outerShdw>
           </a:effectLst>
@@ -12345,7 +12944,7 @@
       </p:sp>
       <p:pic>
         <p:nvPicPr>
-          <p:cNvPr id="8" name="Image 0" descr="02_全景能力图谱.jpeg">    </p:cNvPr>
+          <p:cNvPr id="8" name="Image 0" descr="C:\Users\32768\Desktop\project\挑战杯\talent-graph-system\docs\截图\02_全景能力图谱.jpeg">    </p:cNvPr>
           <p:cNvPicPr>
             <a:picLocks noChangeAspect="1"/>
           </p:cNvPicPr>
@@ -12387,14 +12986,14 @@
           </a:solidFill>
           <a:ln w="12700">
             <a:solidFill>
-              <a:srgbClr val="E2E8F0"/>
+              <a:srgbClr val="E2DFF1"/>
             </a:solidFill>
             <a:prstDash val="solid"/>
           </a:ln>
           <a:effectLst>
-            <a:outerShdw sx="100000" sy="100000" kx="0" ky="0" algn="bl" rotWithShape="0" blurRad="5.998987968225125e+107" dist="1.499746992056281e+107" dir="1.535235553616204e+126">
-              <a:srgbClr val="93A8D8">
-                <a:alpha val="2.8e+129"/>
+            <a:outerShdw sx="100000" sy="100000" kx="0" ky="0" algn="bl" rotWithShape="0" blurRad="9.675767693950304e+115" dist="2.418941923487576e+115" dir="5.526847993018334e+135">
+              <a:srgbClr val="9C93C8">
+                <a:alpha val="2.3999999999999995e+139"/>
               </a:srgbClr>
             </a:outerShdw>
           </a:effectLst>
@@ -12417,7 +13016,7 @@
             </a:avLst>
           </a:prstGeom>
           <a:solidFill>
-            <a:srgbClr val="6366F1"/>
+            <a:srgbClr val="3F4BD8"/>
           </a:solidFill>
           <a:ln/>
         </p:spPr>
@@ -12449,7 +13048,7 @@
             <a:r>
               <a:rPr lang="en-US" sz="1350" b="1" dirty="0">
                 <a:solidFill>
-                  <a:srgbClr val="1E293B"/>
+                  <a:srgbClr val="1E2442"/>
                 </a:solidFill>
                 <a:latin typeface="Microsoft YaHei" pitchFamily="34" charset="0"/>
                 <a:ea typeface="Microsoft YaHei" pitchFamily="34" charset="-122"/>
@@ -12488,7 +13087,7 @@
             <a:r>
               <a:rPr lang="en-US" sz="1100" dirty="0">
                 <a:solidFill>
-                  <a:srgbClr val="64748B"/>
+                  <a:srgbClr val="626A84"/>
                 </a:solidFill>
                 <a:latin typeface="Microsoft YaHei" pitchFamily="34" charset="0"/>
                 <a:ea typeface="Microsoft YaHei" pitchFamily="34" charset="-122"/>
@@ -12521,14 +13120,14 @@
           </a:solidFill>
           <a:ln w="12700">
             <a:solidFill>
-              <a:srgbClr val="E2E8F0"/>
+              <a:srgbClr val="E2DFF1"/>
             </a:solidFill>
             <a:prstDash val="solid"/>
           </a:ln>
           <a:effectLst>
-            <a:outerShdw sx="100000" sy="100000" kx="0" ky="0" algn="bl" rotWithShape="0" blurRad="7.618714719645908e+111" dist="1.904678679911477e+111" dir="9.211413321697224e+130">
-              <a:srgbClr val="93A8D8">
-                <a:alpha val="2.8e+134"/>
+            <a:outerShdw sx="100000" sy="100000" kx="0" ky="0" algn="bl" rotWithShape="0" blurRad="1.2288224971316886e+120" dist="3.0720562428292216e+119" dir="3.3161087958110005e+140">
+              <a:srgbClr val="9C93C8">
+                <a:alpha val="2.3999999999999997e+144"/>
               </a:srgbClr>
             </a:outerShdw>
           </a:effectLst>
@@ -12551,7 +13150,7 @@
             </a:avLst>
           </a:prstGeom>
           <a:solidFill>
-            <a:srgbClr val="0EA5E9"/>
+            <a:srgbClr val="0E7490"/>
           </a:solidFill>
           <a:ln/>
         </p:spPr>
@@ -12583,7 +13182,7 @@
             <a:r>
               <a:rPr lang="en-US" sz="1350" b="1" dirty="0">
                 <a:solidFill>
-                  <a:srgbClr val="1E293B"/>
+                  <a:srgbClr val="1E2442"/>
                 </a:solidFill>
                 <a:latin typeface="Microsoft YaHei" pitchFamily="34" charset="0"/>
                 <a:ea typeface="Microsoft YaHei" pitchFamily="34" charset="-122"/>
@@ -12622,7 +13221,7 @@
             <a:r>
               <a:rPr lang="en-US" sz="1100" dirty="0">
                 <a:solidFill>
-                  <a:srgbClr val="64748B"/>
+                  <a:srgbClr val="626A84"/>
                 </a:solidFill>
                 <a:latin typeface="Microsoft YaHei" pitchFamily="34" charset="0"/>
                 <a:ea typeface="Microsoft YaHei" pitchFamily="34" charset="-122"/>
@@ -12655,14 +13254,14 @@
           </a:solidFill>
           <a:ln w="12700">
             <a:solidFill>
-              <a:srgbClr val="E2E8F0"/>
+              <a:srgbClr val="E2DFF1"/>
             </a:solidFill>
             <a:prstDash val="solid"/>
           </a:ln>
           <a:effectLst>
-            <a:outerShdw sx="100000" sy="100000" kx="0" ky="0" algn="bl" rotWithShape="0" blurRad="9.675767693950304e+115" dist="2.418941923487576e+115" dir="5.526847993018334e+135">
-              <a:srgbClr val="93A8D8">
-                <a:alpha val="2.8e+139"/>
+            <a:outerShdw sx="100000" sy="100000" kx="0" ky="0" algn="bl" rotWithShape="0" blurRad="1.5606045713572446e+124" dist="3.9015114283931116e+123" dir="1.9896652774866004e+145">
+              <a:srgbClr val="9C93C8">
+                <a:alpha val="2.3999999999999997e+149"/>
               </a:srgbClr>
             </a:outerShdw>
           </a:effectLst>
@@ -12685,7 +13284,7 @@
             </a:avLst>
           </a:prstGeom>
           <a:solidFill>
-            <a:srgbClr val="A855F7"/>
+            <a:srgbClr val="B02AA8"/>
           </a:solidFill>
           <a:ln/>
         </p:spPr>
@@ -12717,7 +13316,7 @@
             <a:r>
               <a:rPr lang="en-US" sz="1350" b="1" dirty="0">
                 <a:solidFill>
-                  <a:srgbClr val="1E293B"/>
+                  <a:srgbClr val="1E2442"/>
                 </a:solidFill>
                 <a:latin typeface="Microsoft YaHei" pitchFamily="34" charset="0"/>
                 <a:ea typeface="Microsoft YaHei" pitchFamily="34" charset="-122"/>
@@ -12756,7 +13355,7 @@
             <a:r>
               <a:rPr lang="en-US" sz="1100" dirty="0">
                 <a:solidFill>
-                  <a:srgbClr val="64748B"/>
+                  <a:srgbClr val="626A84"/>
                 </a:solidFill>
                 <a:latin typeface="Microsoft YaHei" pitchFamily="34" charset="0"/>
                 <a:ea typeface="Microsoft YaHei" pitchFamily="34" charset="-122"/>
@@ -12789,14 +13388,14 @@
           </a:solidFill>
           <a:ln w="12700">
             <a:solidFill>
-              <a:srgbClr val="E2E8F0"/>
+              <a:srgbClr val="E2DFF1"/>
             </a:solidFill>
             <a:prstDash val="solid"/>
           </a:ln>
           <a:effectLst>
-            <a:outerShdw sx="100000" sy="100000" kx="0" ky="0" algn="bl" rotWithShape="0" blurRad="1.2288224971316886e+120" dist="3.0720562428292216e+119" dir="3.3161087958110005e+140">
-              <a:srgbClr val="93A8D8">
-                <a:alpha val="2.7999999999999997e+144"/>
+            <a:outerShdw sx="100000" sy="100000" kx="0" ky="0" algn="bl" rotWithShape="0" blurRad="1.9819678056237005e+128" dist="4.954919514059251e+127" dir="1.1937991664919603e+150">
+              <a:srgbClr val="9C93C8">
+                <a:alpha val="2.3999999999999996e+154"/>
               </a:srgbClr>
             </a:outerShdw>
           </a:effectLst>
@@ -12819,7 +13418,7 @@
             </a:avLst>
           </a:prstGeom>
           <a:solidFill>
-            <a:srgbClr val="10B981"/>
+            <a:srgbClr val="047857"/>
           </a:solidFill>
           <a:ln/>
         </p:spPr>
@@ -12851,7 +13450,7 @@
             <a:r>
               <a:rPr lang="en-US" sz="1350" b="1" dirty="0">
                 <a:solidFill>
-                  <a:srgbClr val="1E293B"/>
+                  <a:srgbClr val="1E2442"/>
                 </a:solidFill>
                 <a:latin typeface="Microsoft YaHei" pitchFamily="34" charset="0"/>
                 <a:ea typeface="Microsoft YaHei" pitchFamily="34" charset="-122"/>
@@ -12890,7 +13489,7 @@
             <a:r>
               <a:rPr lang="en-US" sz="1100" dirty="0">
                 <a:solidFill>
-                  <a:srgbClr val="64748B"/>
+                  <a:srgbClr val="626A84"/>
                 </a:solidFill>
                 <a:latin typeface="Microsoft YaHei" pitchFamily="34" charset="0"/>
                 <a:ea typeface="Microsoft YaHei" pitchFamily="34" charset="-122"/>
@@ -12929,7 +13528,7 @@
             <a:r>
               <a:rPr lang="en-US" sz="900" dirty="0">
                 <a:solidFill>
-                  <a:srgbClr val="94A3B8"/>
+                  <a:srgbClr val="767D92"/>
                 </a:solidFill>
                 <a:latin typeface="Microsoft YaHei" pitchFamily="34" charset="0"/>
                 <a:ea typeface="Microsoft YaHei" pitchFamily="34" charset="-122"/>
@@ -12968,7 +13567,7 @@
             <a:r>
               <a:rPr lang="en-US" sz="900" dirty="0">
                 <a:solidFill>
-                  <a:srgbClr val="94A3B8"/>
+                  <a:srgbClr val="767D92"/>
                 </a:solidFill>
                 <a:latin typeface="Microsoft YaHei" pitchFamily="34" charset="0"/>
                 <a:ea typeface="Microsoft YaHei" pitchFamily="34" charset="-122"/>
@@ -12994,7 +13593,7 @@
     <p:bg>
       <p:bgPr>
         <a:solidFill>
-          <a:srgbClr val="EEF4FF"/>
+          <a:srgbClr val="F3F1FB"/>
         </a:solidFill>
       </p:bgPr>
     </p:bg>
@@ -13029,13 +13628,13 @@
             </a:avLst>
           </a:prstGeom>
           <a:solidFill>
-            <a:srgbClr val="6366F1"/>
+            <a:srgbClr val="3F4BD8"/>
           </a:solidFill>
           <a:ln/>
           <a:effectLst>
-            <a:outerShdw sx="100000" sy="100000" kx="0" ky="0" algn="bl" rotWithShape="0" blurRad="1.5606045713572446e+124" dist="3.9015114283931116e+123" dir="1.9896652774866004e+145">
-              <a:srgbClr val="93A8D8">
-                <a:alpha val="2.8e+149"/>
+            <a:outerShdw sx="100000" sy="100000" kx="0" ky="0" algn="bl" rotWithShape="0" blurRad="2.5170991131420998e+132" dist="6.2927477828552495e+131" dir="7.162794998951762e+154">
+              <a:srgbClr val="9C93C8">
+                <a:alpha val="2.3999999999999996e+159"/>
               </a:srgbClr>
             </a:outerShdw>
           </a:effectLst>
@@ -13107,7 +13706,7 @@
             <a:r>
               <a:rPr lang="en-US" sz="2600" b="1" dirty="0">
                 <a:solidFill>
-                  <a:srgbClr val="1E293B"/>
+                  <a:srgbClr val="1E2442"/>
                 </a:solidFill>
                 <a:latin typeface="Microsoft YaHei" pitchFamily="34" charset="0"/>
                 <a:ea typeface="Microsoft YaHei" pitchFamily="34" charset="-122"/>
@@ -13146,7 +13745,7 @@
             <a:r>
               <a:rPr lang="en-US" sz="1250" dirty="0">
                 <a:solidFill>
-                  <a:srgbClr val="64748B"/>
+                  <a:srgbClr val="626A84"/>
                 </a:solidFill>
                 <a:latin typeface="Microsoft YaHei" pitchFamily="34" charset="0"/>
                 <a:ea typeface="Microsoft YaHei" pitchFamily="34" charset="-122"/>
@@ -13185,7 +13784,7 @@
             <a:r>
               <a:rPr lang="en-US" sz="1000" dirty="0">
                 <a:solidFill>
-                  <a:srgbClr val="94A3B8"/>
+                  <a:srgbClr val="767D92"/>
                 </a:solidFill>
                 <a:latin typeface="Microsoft YaHei" pitchFamily="34" charset="0"/>
                 <a:ea typeface="Microsoft YaHei" pitchFamily="34" charset="-122"/>
@@ -13206,7 +13805,7 @@
         <p:spPr>
           <a:xfrm>
             <a:off x="502920" y="1463040"/>
-            <a:ext cx="2103120" cy="1188720"/>
+            <a:ext cx="2048256" cy="1188720"/>
           </a:xfrm>
           <a:prstGeom prst="roundRect">
             <a:avLst>
@@ -13218,14 +13817,14 @@
           </a:solidFill>
           <a:ln w="12700">
             <a:solidFill>
-              <a:srgbClr val="E2E8F0"/>
+              <a:srgbClr val="E2DFF1"/>
             </a:solidFill>
             <a:prstDash val="solid"/>
           </a:ln>
           <a:effectLst>
-            <a:outerShdw sx="100000" sy="100000" kx="0" ky="0" algn="bl" rotWithShape="0" blurRad="1.9819678056237005e+128" dist="4.954919514059251e+127" dir="1.1937991664919603e+150">
-              <a:srgbClr val="93A8D8">
-                <a:alpha val="2.8e+154"/>
+            <a:outerShdw sx="100000" sy="100000" kx="0" ky="0" algn="bl" rotWithShape="0" blurRad="3.1967158736904667e+136" dist="7.991789684226167e+135" dir="4.297676999371057e+159">
+              <a:srgbClr val="9C93C8">
+                <a:alpha val="2.3999999999999996e+164"/>
               </a:srgbClr>
             </a:outerShdw>
           </a:effectLst>
@@ -13239,8 +13838,8 @@
         </p:nvSpPr>
         <p:spPr>
           <a:xfrm>
-            <a:off x="548640" y="1463040"/>
-            <a:ext cx="2011680" cy="1188720"/>
+            <a:off x="539496" y="1463040"/>
+            <a:ext cx="1975104" cy="1188720"/>
           </a:xfrm>
           <a:prstGeom prst="rect">
             <a:avLst/>
@@ -13258,7 +13857,7 @@
             <a:r>
               <a:rPr lang="en-US" sz="1200" b="1" dirty="0">
                 <a:solidFill>
-                  <a:srgbClr val="1E293B"/>
+                  <a:srgbClr val="1E2442"/>
                 </a:solidFill>
                 <a:latin typeface="Microsoft YaHei" pitchFamily="34" charset="0"/>
                 <a:ea typeface="Microsoft YaHei" pitchFamily="34" charset="-122"/>
@@ -13278,7 +13877,7 @@
         </p:nvSpPr>
         <p:spPr>
           <a:xfrm>
-            <a:off x="2587752" y="1463040"/>
+            <a:off x="2528316" y="1463040"/>
             <a:ext cx="274320" cy="1188720"/>
           </a:xfrm>
           <a:prstGeom prst="rect">
@@ -13297,7 +13896,7 @@
             <a:r>
               <a:rPr lang="en-US" sz="1600" dirty="0">
                 <a:solidFill>
-                  <a:srgbClr val="6366F1"/>
+                  <a:srgbClr val="3F4BD8"/>
                 </a:solidFill>
                 <a:latin typeface="Microsoft YaHei" pitchFamily="34" charset="0"/>
                 <a:ea typeface="Microsoft YaHei" pitchFamily="34" charset="-122"/>
@@ -13317,8 +13916,8 @@
         </p:nvSpPr>
         <p:spPr>
           <a:xfrm>
-            <a:off x="2834640" y="1463040"/>
-            <a:ext cx="2103120" cy="1188720"/>
+            <a:off x="2779776" y="1463040"/>
+            <a:ext cx="2048256" cy="1188720"/>
           </a:xfrm>
           <a:prstGeom prst="roundRect">
             <a:avLst>
@@ -13330,14 +13929,14 @@
           </a:solidFill>
           <a:ln w="12700">
             <a:solidFill>
-              <a:srgbClr val="E2E8F0"/>
+              <a:srgbClr val="E2DFF1"/>
             </a:solidFill>
             <a:prstDash val="solid"/>
           </a:ln>
           <a:effectLst>
-            <a:outerShdw sx="100000" sy="100000" kx="0" ky="0" algn="bl" rotWithShape="0" blurRad="2.5170991131420998e+132" dist="6.2927477828552495e+131" dir="7.162794998951762e+154">
-              <a:srgbClr val="93A8D8">
-                <a:alpha val="2.8e+159"/>
+            <a:outerShdw sx="100000" sy="100000" kx="0" ky="0" algn="bl" rotWithShape="0" blurRad="4.0598291595868925e+140" dist="1.0149572898967231e+140" dir="2.5786061996226343e+164">
+              <a:srgbClr val="9C93C8">
+                <a:alpha val="2.3999999999999995e+169"/>
               </a:srgbClr>
             </a:outerShdw>
           </a:effectLst>
@@ -13351,8 +13950,8 @@
         </p:nvSpPr>
         <p:spPr>
           <a:xfrm>
-            <a:off x="2880360" y="1463040"/>
-            <a:ext cx="2011680" cy="1188720"/>
+            <a:off x="2816352" y="1463040"/>
+            <a:ext cx="1975104" cy="1188720"/>
           </a:xfrm>
           <a:prstGeom prst="rect">
             <a:avLst/>
@@ -13370,7 +13969,7 @@
             <a:r>
               <a:rPr lang="en-US" sz="1200" dirty="0">
                 <a:solidFill>
-                  <a:srgbClr val="1E293B"/>
+                  <a:srgbClr val="1E2442"/>
                 </a:solidFill>
                 <a:latin typeface="Microsoft YaHei" pitchFamily="34" charset="0"/>
                 <a:ea typeface="Microsoft YaHei" pitchFamily="34" charset="-122"/>
@@ -13387,7 +13986,7 @@
             <a:r>
               <a:rPr lang="en-US" sz="1200" dirty="0">
                 <a:solidFill>
-                  <a:srgbClr val="1E293B"/>
+                  <a:srgbClr val="1E2442"/>
                 </a:solidFill>
                 <a:latin typeface="Microsoft YaHei" pitchFamily="34" charset="0"/>
                 <a:ea typeface="Microsoft YaHei" pitchFamily="34" charset="-122"/>
@@ -13407,7 +14006,7 @@
         </p:nvSpPr>
         <p:spPr>
           <a:xfrm>
-            <a:off x="4919472" y="1463040"/>
+            <a:off x="4805172" y="1463040"/>
             <a:ext cx="274320" cy="1188720"/>
           </a:xfrm>
           <a:prstGeom prst="rect">
@@ -13426,7 +14025,7 @@
             <a:r>
               <a:rPr lang="en-US" sz="1600" dirty="0">
                 <a:solidFill>
-                  <a:srgbClr val="6366F1"/>
+                  <a:srgbClr val="3F4BD8"/>
                 </a:solidFill>
                 <a:latin typeface="Microsoft YaHei" pitchFamily="34" charset="0"/>
                 <a:ea typeface="Microsoft YaHei" pitchFamily="34" charset="-122"/>
@@ -13446,8 +14045,8 @@
         </p:nvSpPr>
         <p:spPr>
           <a:xfrm>
-            <a:off x="5166360" y="1463040"/>
-            <a:ext cx="2103120" cy="1188720"/>
+            <a:off x="5056632" y="1463040"/>
+            <a:ext cx="2048256" cy="1188720"/>
           </a:xfrm>
           <a:prstGeom prst="roundRect">
             <a:avLst>
@@ -13459,14 +14058,14 @@
           </a:solidFill>
           <a:ln w="12700">
             <a:solidFill>
-              <a:srgbClr val="E2E8F0"/>
+              <a:srgbClr val="E2DFF1"/>
             </a:solidFill>
             <a:prstDash val="solid"/>
           </a:ln>
           <a:effectLst>
-            <a:outerShdw sx="100000" sy="100000" kx="0" ky="0" algn="bl" rotWithShape="0" blurRad="3.1967158736904667e+136" dist="7.991789684226167e+135" dir="4.297676999371057e+159">
-              <a:srgbClr val="93A8D8">
-                <a:alpha val="2.8e+164"/>
+            <a:outerShdw sx="100000" sy="100000" kx="0" ky="0" algn="bl" rotWithShape="0" blurRad="5.155983032675354e+144" dist="1.2889957581688384e+144" dir="1.5471637197735807e+169">
+              <a:srgbClr val="9C93C8">
+                <a:alpha val="2.3999999999999994e+174"/>
               </a:srgbClr>
             </a:outerShdw>
           </a:effectLst>
@@ -13480,8 +14079,8 @@
         </p:nvSpPr>
         <p:spPr>
           <a:xfrm>
-            <a:off x="5212080" y="1463040"/>
-            <a:ext cx="2011680" cy="1188720"/>
+            <a:off x="5093208" y="1463040"/>
+            <a:ext cx="1975104" cy="1188720"/>
           </a:xfrm>
           <a:prstGeom prst="rect">
             <a:avLst/>
@@ -13499,7 +14098,7 @@
             <a:r>
               <a:rPr lang="en-US" sz="1200" dirty="0">
                 <a:solidFill>
-                  <a:srgbClr val="1E293B"/>
+                  <a:srgbClr val="1E2442"/>
                 </a:solidFill>
                 <a:latin typeface="Microsoft YaHei" pitchFamily="34" charset="0"/>
                 <a:ea typeface="Microsoft YaHei" pitchFamily="34" charset="-122"/>
@@ -13516,7 +14115,7 @@
             <a:r>
               <a:rPr lang="en-US" sz="1200" dirty="0">
                 <a:solidFill>
-                  <a:srgbClr val="1E293B"/>
+                  <a:srgbClr val="1E2442"/>
                 </a:solidFill>
                 <a:latin typeface="Microsoft YaHei" pitchFamily="34" charset="0"/>
                 <a:ea typeface="Microsoft YaHei" pitchFamily="34" charset="-122"/>
@@ -13536,7 +14135,7 @@
         </p:nvSpPr>
         <p:spPr>
           <a:xfrm>
-            <a:off x="7251192" y="1463040"/>
+            <a:off x="7082028" y="1463040"/>
             <a:ext cx="274320" cy="1188720"/>
           </a:xfrm>
           <a:prstGeom prst="rect">
@@ -13555,7 +14154,7 @@
             <a:r>
               <a:rPr lang="en-US" sz="1600" dirty="0">
                 <a:solidFill>
-                  <a:srgbClr val="6366F1"/>
+                  <a:srgbClr val="3F4BD8"/>
                 </a:solidFill>
                 <a:latin typeface="Microsoft YaHei" pitchFamily="34" charset="0"/>
                 <a:ea typeface="Microsoft YaHei" pitchFamily="34" charset="-122"/>
@@ -13575,8 +14174,8 @@
         </p:nvSpPr>
         <p:spPr>
           <a:xfrm>
-            <a:off x="7498080" y="1463040"/>
-            <a:ext cx="2103120" cy="1188720"/>
+            <a:off x="7333488" y="1463040"/>
+            <a:ext cx="2048256" cy="1188720"/>
           </a:xfrm>
           <a:prstGeom prst="roundRect">
             <a:avLst>
@@ -13588,14 +14187,14 @@
           </a:solidFill>
           <a:ln w="12700">
             <a:solidFill>
-              <a:srgbClr val="E2E8F0"/>
+              <a:srgbClr val="E2DFF1"/>
             </a:solidFill>
             <a:prstDash val="solid"/>
           </a:ln>
           <a:effectLst>
-            <a:outerShdw sx="100000" sy="100000" kx="0" ky="0" algn="bl" rotWithShape="0" blurRad="4.0598291595868925e+140" dist="1.0149572898967231e+140" dir="2.5786061996226343e+164">
-              <a:srgbClr val="93A8D8">
-                <a:alpha val="2.8e+169"/>
+            <a:outerShdw sx="100000" sy="100000" kx="0" ky="0" algn="bl" rotWithShape="0" blurRad="6.548098451497699e+148" dist="1.6370246128744248e+148" dir="9.282982318641485e+173">
+              <a:srgbClr val="9C93C8">
+                <a:alpha val="2.3999999999999993e+179"/>
               </a:srgbClr>
             </a:outerShdw>
           </a:effectLst>
@@ -13609,8 +14208,8 @@
         </p:nvSpPr>
         <p:spPr>
           <a:xfrm>
-            <a:off x="7543800" y="1463040"/>
-            <a:ext cx="2011680" cy="1188720"/>
+            <a:off x="7370064" y="1463040"/>
+            <a:ext cx="1975104" cy="1188720"/>
           </a:xfrm>
           <a:prstGeom prst="rect">
             <a:avLst/>
@@ -13628,7 +14227,7 @@
             <a:r>
               <a:rPr lang="en-US" sz="1200" dirty="0">
                 <a:solidFill>
-                  <a:srgbClr val="1E293B"/>
+                  <a:srgbClr val="1E2442"/>
                 </a:solidFill>
                 <a:latin typeface="Microsoft YaHei" pitchFamily="34" charset="0"/>
                 <a:ea typeface="Microsoft YaHei" pitchFamily="34" charset="-122"/>
@@ -13645,7 +14244,7 @@
             <a:r>
               <a:rPr lang="en-US" sz="1200" dirty="0">
                 <a:solidFill>
-                  <a:srgbClr val="1E293B"/>
+                  <a:srgbClr val="1E2442"/>
                 </a:solidFill>
                 <a:latin typeface="Microsoft YaHei" pitchFamily="34" charset="0"/>
                 <a:ea typeface="Microsoft YaHei" pitchFamily="34" charset="-122"/>
@@ -13665,7 +14264,7 @@
         </p:nvSpPr>
         <p:spPr>
           <a:xfrm>
-            <a:off x="9582912" y="1463040"/>
+            <a:off x="9358884" y="1463040"/>
             <a:ext cx="274320" cy="1188720"/>
           </a:xfrm>
           <a:prstGeom prst="rect">
@@ -13684,7 +14283,7 @@
             <a:r>
               <a:rPr lang="en-US" sz="1600" dirty="0">
                 <a:solidFill>
-                  <a:srgbClr val="6366F1"/>
+                  <a:srgbClr val="3F4BD8"/>
                 </a:solidFill>
                 <a:latin typeface="Microsoft YaHei" pitchFamily="34" charset="0"/>
                 <a:ea typeface="Microsoft YaHei" pitchFamily="34" charset="-122"/>
@@ -13704,8 +14303,8 @@
         </p:nvSpPr>
         <p:spPr>
           <a:xfrm>
-            <a:off x="9829800" y="1463040"/>
-            <a:ext cx="2103120" cy="1188720"/>
+            <a:off x="9610344" y="1463040"/>
+            <a:ext cx="2048256" cy="1188720"/>
           </a:xfrm>
           <a:prstGeom prst="roundRect">
             <a:avLst>
@@ -13717,14 +14316,14 @@
           </a:solidFill>
           <a:ln w="12700">
             <a:solidFill>
-              <a:srgbClr val="E2E8F0"/>
+              <a:srgbClr val="E2DFF1"/>
             </a:solidFill>
             <a:prstDash val="solid"/>
           </a:ln>
           <a:effectLst>
-            <a:outerShdw sx="100000" sy="100000" kx="0" ky="0" algn="bl" rotWithShape="0" blurRad="5.155983032675354e+144" dist="1.2889957581688384e+144" dir="1.5471637197735807e+169">
-              <a:srgbClr val="93A8D8">
-                <a:alpha val="2.8000000000000004e+174"/>
+            <a:outerShdw sx="100000" sy="100000" kx="0" ky="0" algn="bl" rotWithShape="0" blurRad="8.316085033402078e+152" dist="2.0790212583505195e+152" dir="5.569789391184891e+178">
+              <a:srgbClr val="9C93C8">
+                <a:alpha val="2.3999999999999992e+184"/>
               </a:srgbClr>
             </a:outerShdw>
           </a:effectLst>
@@ -13738,8 +14337,8 @@
         </p:nvSpPr>
         <p:spPr>
           <a:xfrm>
-            <a:off x="9875520" y="1463040"/>
-            <a:ext cx="2011680" cy="1188720"/>
+            <a:off x="9646920" y="1463040"/>
+            <a:ext cx="1975104" cy="1188720"/>
           </a:xfrm>
           <a:prstGeom prst="rect">
             <a:avLst/>
@@ -13757,7 +14356,7 @@
             <a:r>
               <a:rPr lang="en-US" sz="1200" dirty="0">
                 <a:solidFill>
-                  <a:srgbClr val="1E293B"/>
+                  <a:srgbClr val="1E2442"/>
                 </a:solidFill>
                 <a:latin typeface="Microsoft YaHei" pitchFamily="34" charset="0"/>
                 <a:ea typeface="Microsoft YaHei" pitchFamily="34" charset="-122"/>
@@ -13774,7 +14373,7 @@
             <a:r>
               <a:rPr lang="en-US" sz="1200" dirty="0">
                 <a:solidFill>
-                  <a:srgbClr val="1E293B"/>
+                  <a:srgbClr val="1E2442"/>
                 </a:solidFill>
                 <a:latin typeface="Microsoft YaHei" pitchFamily="34" charset="0"/>
                 <a:ea typeface="Microsoft YaHei" pitchFamily="34" charset="-122"/>
@@ -13807,14 +14406,14 @@
           </a:solidFill>
           <a:ln w="12700">
             <a:solidFill>
-              <a:srgbClr val="E2E8F0"/>
+              <a:srgbClr val="E2DFF1"/>
             </a:solidFill>
             <a:prstDash val="solid"/>
           </a:ln>
           <a:effectLst>
-            <a:outerShdw sx="100000" sy="100000" kx="0" ky="0" algn="bl" rotWithShape="0" blurRad="6.548098451497699e+148" dist="1.6370246128744248e+148" dir="9.282982318641485e+173">
-              <a:srgbClr val="93A8D8">
-                <a:alpha val="2.8000000000000006e+179"/>
+            <a:outerShdw sx="100000" sy="100000" kx="0" ky="0" algn="bl" rotWithShape="0" blurRad="1.056142799242064e+157" dist="2.64035699810516e+156" dir="3.3418736347109347e+183">
+              <a:srgbClr val="9C93C8">
+                <a:alpha val="2.399999999999999e+189"/>
               </a:srgbClr>
             </a:outerShdw>
           </a:effectLst>
@@ -13847,7 +14446,7 @@
             <a:r>
               <a:rPr lang="en-US" sz="1400" b="1" dirty="0">
                 <a:solidFill>
-                  <a:srgbClr val="6366F1"/>
+                  <a:srgbClr val="3F4BD8"/>
                 </a:solidFill>
                 <a:latin typeface="Microsoft YaHei" pitchFamily="34" charset="0"/>
                 <a:ea typeface="Microsoft YaHei" pitchFamily="34" charset="-122"/>
@@ -13908,7 +14507,7 @@
             <a:r>
               <a:rPr lang="en-US" sz="1250" b="1" dirty="0">
                 <a:solidFill>
-                  <a:srgbClr val="6366F1"/>
+                  <a:srgbClr val="3F4BD8"/>
                 </a:solidFill>
                 <a:latin typeface="Microsoft YaHei" pitchFamily="34" charset="0"/>
                 <a:ea typeface="Microsoft YaHei" pitchFamily="34" charset="-122"/>
@@ -13928,7 +14527,7 @@
         </p:nvSpPr>
         <p:spPr>
           <a:xfrm>
-            <a:off x="2971800" y="3520440"/>
+            <a:off x="2926080" y="3520440"/>
             <a:ext cx="2011680" cy="502920"/>
           </a:xfrm>
           <a:prstGeom prst="roundRect">
@@ -13950,7 +14549,7 @@
         </p:nvSpPr>
         <p:spPr>
           <a:xfrm>
-            <a:off x="2971800" y="3520440"/>
+            <a:off x="2926080" y="3520440"/>
             <a:ext cx="2011680" cy="502920"/>
           </a:xfrm>
           <a:prstGeom prst="rect">
@@ -13969,7 +14568,7 @@
             <a:r>
               <a:rPr lang="en-US" sz="1250" b="1" dirty="0">
                 <a:solidFill>
-                  <a:srgbClr val="6366F1"/>
+                  <a:srgbClr val="3F4BD8"/>
                 </a:solidFill>
                 <a:latin typeface="Microsoft YaHei" pitchFamily="34" charset="0"/>
                 <a:ea typeface="Microsoft YaHei" pitchFamily="34" charset="-122"/>
@@ -13989,7 +14588,7 @@
         </p:nvSpPr>
         <p:spPr>
           <a:xfrm>
-            <a:off x="5166360" y="3520440"/>
+            <a:off x="5074920" y="3520440"/>
             <a:ext cx="2011680" cy="502920"/>
           </a:xfrm>
           <a:prstGeom prst="roundRect">
@@ -14011,7 +14610,7 @@
         </p:nvSpPr>
         <p:spPr>
           <a:xfrm>
-            <a:off x="5166360" y="3520440"/>
+            <a:off x="5074920" y="3520440"/>
             <a:ext cx="2011680" cy="502920"/>
           </a:xfrm>
           <a:prstGeom prst="rect">
@@ -14030,7 +14629,7 @@
             <a:r>
               <a:rPr lang="en-US" sz="1250" b="1" dirty="0">
                 <a:solidFill>
-                  <a:srgbClr val="6366F1"/>
+                  <a:srgbClr val="3F4BD8"/>
                 </a:solidFill>
                 <a:latin typeface="Microsoft YaHei" pitchFamily="34" charset="0"/>
                 <a:ea typeface="Microsoft YaHei" pitchFamily="34" charset="-122"/>
@@ -14050,7 +14649,7 @@
         </p:nvSpPr>
         <p:spPr>
           <a:xfrm>
-            <a:off x="7360920" y="3520440"/>
+            <a:off x="7223760" y="3520440"/>
             <a:ext cx="2011680" cy="502920"/>
           </a:xfrm>
           <a:prstGeom prst="roundRect">
@@ -14072,7 +14671,7 @@
         </p:nvSpPr>
         <p:spPr>
           <a:xfrm>
-            <a:off x="7360920" y="3520440"/>
+            <a:off x="7223760" y="3520440"/>
             <a:ext cx="2011680" cy="502920"/>
           </a:xfrm>
           <a:prstGeom prst="rect">
@@ -14091,7 +14690,7 @@
             <a:r>
               <a:rPr lang="en-US" sz="1250" b="1" dirty="0">
                 <a:solidFill>
-                  <a:srgbClr val="6366F1"/>
+                  <a:srgbClr val="3F4BD8"/>
                 </a:solidFill>
                 <a:latin typeface="Microsoft YaHei" pitchFamily="34" charset="0"/>
                 <a:ea typeface="Microsoft YaHei" pitchFamily="34" charset="-122"/>
@@ -14111,7 +14710,7 @@
         </p:nvSpPr>
         <p:spPr>
           <a:xfrm>
-            <a:off x="9555480" y="3520440"/>
+            <a:off x="9372600" y="3520440"/>
             <a:ext cx="2011680" cy="502920"/>
           </a:xfrm>
           <a:prstGeom prst="roundRect">
@@ -14133,7 +14732,7 @@
         </p:nvSpPr>
         <p:spPr>
           <a:xfrm>
-            <a:off x="9555480" y="3520440"/>
+            <a:off x="9372600" y="3520440"/>
             <a:ext cx="2011680" cy="502920"/>
           </a:xfrm>
           <a:prstGeom prst="rect">
@@ -14152,7 +14751,7 @@
             <a:r>
               <a:rPr lang="en-US" sz="1250" b="1" dirty="0">
                 <a:solidFill>
-                  <a:srgbClr val="6366F1"/>
+                  <a:srgbClr val="3F4BD8"/>
                 </a:solidFill>
                 <a:latin typeface="Microsoft YaHei" pitchFamily="34" charset="0"/>
                 <a:ea typeface="Microsoft YaHei" pitchFamily="34" charset="-122"/>
@@ -14197,7 +14796,7 @@
             <a:r>
               <a:rPr lang="en-US" sz="1400" b="1" dirty="0">
                 <a:solidFill>
-                  <a:srgbClr val="1E293B"/>
+                  <a:srgbClr val="1E2442"/>
                 </a:solidFill>
                 <a:latin typeface="Microsoft YaHei" pitchFamily="34" charset="0"/>
                 <a:ea typeface="Microsoft YaHei" pitchFamily="34" charset="-122"/>
@@ -14220,7 +14819,7 @@
             <a:r>
               <a:rPr lang="en-US" sz="1250" dirty="0">
                 <a:solidFill>
-                  <a:srgbClr val="64748B"/>
+                  <a:srgbClr val="626A84"/>
                 </a:solidFill>
                 <a:latin typeface="Microsoft YaHei" pitchFamily="34" charset="0"/>
                 <a:ea typeface="Microsoft YaHei" pitchFamily="34" charset="-122"/>
@@ -14240,13 +14839,13 @@
             <a:r>
               <a:rPr lang="en-US" sz="1250" dirty="0">
                 <a:solidFill>
-                  <a:srgbClr val="64748B"/>
-                </a:solidFill>
-                <a:latin typeface="Microsoft YaHei" pitchFamily="34" charset="0"/>
-                <a:ea typeface="Microsoft YaHei" pitchFamily="34" charset="-122"/>
-                <a:cs typeface="Microsoft YaHei" pitchFamily="34" charset="-120"/>
-              </a:rPr>
-              <a:t>典型场景：智能对话与客服机器人 · 智能推荐 · 竞品分析与市场调研   （13 条多源证据 · 3 个独立来源交叉验证）</a:t>
+                  <a:srgbClr val="626A84"/>
+                </a:solidFill>
+                <a:latin typeface="Microsoft YaHei" pitchFamily="34" charset="0"/>
+                <a:ea typeface="Microsoft YaHei" pitchFamily="34" charset="-122"/>
+                <a:cs typeface="Microsoft YaHei" pitchFamily="34" charset="-120"/>
+              </a:rPr>
+              <a:t>典型场景：智能对话与客服机器人 · 智能推荐 · 竞品分析与市场调研；证据可下钻至真实 JD，并按独立雇主实体交叉验证（同雇主跨渠道去重）</a:t>
             </a:r>
             <a:endParaRPr lang="en-US" sz="1400" dirty="0"/>
           </a:p>
@@ -14279,13 +14878,13 @@
             <a:r>
               <a:rPr lang="en-US" sz="1200" b="1" dirty="0">
                 <a:solidFill>
-                  <a:srgbClr val="10B981"/>
-                </a:solidFill>
-                <a:latin typeface="Microsoft YaHei" pitchFamily="34" charset="0"/>
-                <a:ea typeface="Microsoft YaHei" pitchFamily="34" charset="-122"/>
-                <a:cs typeface="Microsoft YaHei" pitchFamily="34" charset="-120"/>
-              </a:rPr>
-              <a:t>✓ 当前 6 个新兴岗位全部有权威佐证（人社部文件/头部报告），标注「新出现 / 复兴」徽章，支持人工优化与动态更新</a:t>
+                  <a:srgbClr val="047857"/>
+                </a:solidFill>
+                <a:latin typeface="Microsoft YaHei" pitchFamily="34" charset="0"/>
+                <a:ea typeface="Microsoft YaHei" pitchFamily="34" charset="-122"/>
+                <a:cs typeface="Microsoft YaHei" pitchFamily="34" charset="-120"/>
+              </a:rPr>
+              <a:t>✓ 6 / 6 新兴岗位权威佐证全覆盖（共 8 条）；全库 21 条 AuthorityEvidence 覆盖 19 岗，均保留来源快照</a:t>
             </a:r>
             <a:endParaRPr lang="en-US" sz="1200" dirty="0"/>
           </a:p>
@@ -14318,7 +14917,7 @@
             <a:r>
               <a:rPr lang="en-US" sz="900" dirty="0">
                 <a:solidFill>
-                  <a:srgbClr val="94A3B8"/>
+                  <a:srgbClr val="767D92"/>
                 </a:solidFill>
                 <a:latin typeface="Microsoft YaHei" pitchFamily="34" charset="0"/>
                 <a:ea typeface="Microsoft YaHei" pitchFamily="34" charset="-122"/>
@@ -14357,7 +14956,7 @@
             <a:r>
               <a:rPr lang="en-US" sz="900" dirty="0">
                 <a:solidFill>
-                  <a:srgbClr val="94A3B8"/>
+                  <a:srgbClr val="767D92"/>
                 </a:solidFill>
                 <a:latin typeface="Microsoft YaHei" pitchFamily="34" charset="0"/>
                 <a:ea typeface="Microsoft YaHei" pitchFamily="34" charset="-122"/>
@@ -14383,7 +14982,7 @@
     <p:bg>
       <p:bgPr>
         <a:solidFill>
-          <a:srgbClr val="EEF4FF"/>
+          <a:srgbClr val="F3F1FB"/>
         </a:solidFill>
       </p:bgPr>
     </p:bg>
@@ -14418,13 +15017,13 @@
             </a:avLst>
           </a:prstGeom>
           <a:solidFill>
-            <a:srgbClr val="6366F1"/>
+            <a:srgbClr val="3F4BD8"/>
           </a:solidFill>
           <a:ln/>
           <a:effectLst>
-            <a:outerShdw sx="100000" sy="100000" kx="0" ky="0" algn="bl" rotWithShape="0" blurRad="8.316085033402078e+152" dist="2.0790212583505195e+152" dir="5.569789391184891e+178">
-              <a:srgbClr val="93A8D8">
-                <a:alpha val="2.8000000000000007e+184"/>
+            <a:outerShdw sx="100000" sy="100000" kx="0" ky="0" algn="bl" rotWithShape="0" blurRad="1.3413013550374212e+161" dist="3.353253387593553e+160" dir="2.0051241808265608e+188">
+              <a:srgbClr val="9C93C8">
+                <a:alpha val="2.399999999999999e+194"/>
               </a:srgbClr>
             </a:outerShdw>
           </a:effectLst>
@@ -14496,7 +15095,7 @@
             <a:r>
               <a:rPr lang="en-US" sz="2600" b="1" dirty="0">
                 <a:solidFill>
-                  <a:srgbClr val="1E293B"/>
+                  <a:srgbClr val="1E2442"/>
                 </a:solidFill>
                 <a:latin typeface="Microsoft YaHei" pitchFamily="34" charset="0"/>
                 <a:ea typeface="Microsoft YaHei" pitchFamily="34" charset="-122"/>
@@ -14535,13 +15134,13 @@
             <a:r>
               <a:rPr lang="en-US" sz="1250" dirty="0">
                 <a:solidFill>
-                  <a:srgbClr val="64748B"/>
-                </a:solidFill>
-                <a:latin typeface="Microsoft YaHei" pitchFamily="34" charset="0"/>
-                <a:ea typeface="Microsoft YaHei" pitchFamily="34" charset="-122"/>
-                <a:cs typeface="Microsoft YaHei" pitchFamily="34" charset="-120"/>
-              </a:rPr>
-              <a:t>2018 历史基线 → 2026 现网真实 JD 驱动演化 · 自动标注变更并溯源</a:t>
+                  <a:srgbClr val="626A84"/>
+                </a:solidFill>
+                <a:latin typeface="Microsoft YaHei" pitchFamily="34" charset="0"/>
+                <a:ea typeface="Microsoft YaHei" pitchFamily="34" charset="-122"/>
+                <a:cs typeface="Microsoft YaHei" pitchFamily="34" charset="-120"/>
+              </a:rPr>
+              <a:t>2018 历史基线 → 2026 现网真实 JD 驱动演化 · 621 条：新增 367 / 删除 143 / 修改 111</a:t>
             </a:r>
             <a:endParaRPr lang="en-US" sz="1250" dirty="0"/>
           </a:p>
@@ -14574,7 +15173,7 @@
             <a:r>
               <a:rPr lang="en-US" sz="1000" dirty="0">
                 <a:solidFill>
-                  <a:srgbClr val="94A3B8"/>
+                  <a:srgbClr val="767D92"/>
                 </a:solidFill>
                 <a:latin typeface="Microsoft YaHei" pitchFamily="34" charset="0"/>
                 <a:ea typeface="Microsoft YaHei" pitchFamily="34" charset="-122"/>
@@ -14607,14 +15206,14 @@
           </a:solidFill>
           <a:ln w="12700">
             <a:solidFill>
-              <a:srgbClr val="E2E8F0"/>
+              <a:srgbClr val="E2DFF1"/>
             </a:solidFill>
             <a:prstDash val="solid"/>
           </a:ln>
           <a:effectLst>
-            <a:outerShdw sx="100000" sy="100000" kx="0" ky="0" algn="bl" rotWithShape="0" blurRad="1.056142799242064e+157" dist="2.64035699810516e+156" dir="3.3418736347109347e+183">
-              <a:srgbClr val="93A8D8">
-                <a:alpha val="2.8000000000000006e+189"/>
+            <a:outerShdw sx="100000" sy="100000" kx="0" ky="0" algn="bl" rotWithShape="0" blurRad="1.703452720897525e+165" dist="4.2586318022438123e+164" dir="1.2030745084959364e+193">
+              <a:srgbClr val="9C93C8">
+                <a:alpha val="2.399999999999999e+199"/>
               </a:srgbClr>
             </a:outerShdw>
           </a:effectLst>
@@ -14637,7 +15236,7 @@
             </a:avLst>
           </a:prstGeom>
           <a:solidFill>
-            <a:srgbClr val="10B981"/>
+            <a:srgbClr val="047857"/>
           </a:solidFill>
           <a:ln/>
         </p:spPr>
@@ -14708,7 +15307,7 @@
             <a:r>
               <a:rPr lang="en-US" sz="1500" b="1" dirty="0">
                 <a:solidFill>
-                  <a:srgbClr val="1E293B"/>
+                  <a:srgbClr val="1E2442"/>
                 </a:solidFill>
                 <a:latin typeface="Microsoft YaHei" pitchFamily="34" charset="0"/>
                 <a:ea typeface="Microsoft YaHei" pitchFamily="34" charset="-122"/>
@@ -14747,7 +15346,7 @@
             <a:r>
               <a:rPr lang="en-US" sz="1250" dirty="0">
                 <a:solidFill>
-                  <a:srgbClr val="64748B"/>
+                  <a:srgbClr val="626A84"/>
                 </a:solidFill>
                 <a:latin typeface="Microsoft YaHei" pitchFamily="34" charset="0"/>
                 <a:ea typeface="Microsoft YaHei" pitchFamily="34" charset="-122"/>
@@ -14780,14 +15379,14 @@
           </a:solidFill>
           <a:ln w="12700">
             <a:solidFill>
-              <a:srgbClr val="E2E8F0"/>
+              <a:srgbClr val="E2DFF1"/>
             </a:solidFill>
             <a:prstDash val="solid"/>
           </a:ln>
           <a:effectLst>
-            <a:outerShdw sx="100000" sy="100000" kx="0" ky="0" algn="bl" rotWithShape="0" blurRad="1.3413013550374212e+161" dist="3.353253387593553e+160" dir="2.0051241808265608e+188">
-              <a:srgbClr val="93A8D8">
-                <a:alpha val="2.8000000000000004e+194"/>
+            <a:outerShdw sx="100000" sy="100000" kx="0" ky="0" algn="bl" rotWithShape="0" blurRad="2.1633849555398568e+169" dist="5.408462388849642e+168" dir="7.218447050975619e+197">
+              <a:srgbClr val="9C93C8">
+                <a:alpha val="2.3999999999999989e+204"/>
               </a:srgbClr>
             </a:outerShdw>
           </a:effectLst>
@@ -14810,7 +15409,7 @@
             </a:avLst>
           </a:prstGeom>
           <a:solidFill>
-            <a:srgbClr val="F43F5E"/>
+            <a:srgbClr val="BE123C"/>
           </a:solidFill>
           <a:ln/>
         </p:spPr>
@@ -14881,7 +15480,7 @@
             <a:r>
               <a:rPr lang="en-US" sz="1500" b="1" dirty="0">
                 <a:solidFill>
-                  <a:srgbClr val="1E293B"/>
+                  <a:srgbClr val="1E2442"/>
                 </a:solidFill>
                 <a:latin typeface="Microsoft YaHei" pitchFamily="34" charset="0"/>
                 <a:ea typeface="Microsoft YaHei" pitchFamily="34" charset="-122"/>
@@ -14920,7 +15519,7 @@
             <a:r>
               <a:rPr lang="en-US" sz="1250" dirty="0">
                 <a:solidFill>
-                  <a:srgbClr val="64748B"/>
+                  <a:srgbClr val="626A84"/>
                 </a:solidFill>
                 <a:latin typeface="Microsoft YaHei" pitchFamily="34" charset="0"/>
                 <a:ea typeface="Microsoft YaHei" pitchFamily="34" charset="-122"/>
@@ -14953,14 +15552,14 @@
           </a:solidFill>
           <a:ln w="12700">
             <a:solidFill>
-              <a:srgbClr val="E2E8F0"/>
+              <a:srgbClr val="E2DFF1"/>
             </a:solidFill>
             <a:prstDash val="solid"/>
           </a:ln>
           <a:effectLst>
-            <a:outerShdw sx="100000" sy="100000" kx="0" ky="0" algn="bl" rotWithShape="0" blurRad="1.703452720897525e+165" dist="4.2586318022438123e+164" dir="1.2030745084959364e+193">
-              <a:srgbClr val="93A8D8">
-                <a:alpha val="2.8000000000000005e+199"/>
+            <a:outerShdw sx="100000" sy="100000" kx="0" ky="0" algn="bl" rotWithShape="0" blurRad="2.7474988935356184e+173" dist="6.868747233839046e+172" dir="4.3310682305853715e+202">
+              <a:srgbClr val="9C93C8">
+                <a:alpha val="2.399999999999999e+209"/>
               </a:srgbClr>
             </a:outerShdw>
           </a:effectLst>
@@ -14983,7 +15582,7 @@
             </a:avLst>
           </a:prstGeom>
           <a:solidFill>
-            <a:srgbClr val="F59E0B"/>
+            <a:srgbClr val="A16207"/>
           </a:solidFill>
           <a:ln/>
         </p:spPr>
@@ -15054,7 +15653,7 @@
             <a:r>
               <a:rPr lang="en-US" sz="1500" b="1" dirty="0">
                 <a:solidFill>
-                  <a:srgbClr val="1E293B"/>
+                  <a:srgbClr val="1E2442"/>
                 </a:solidFill>
                 <a:latin typeface="Microsoft YaHei" pitchFamily="34" charset="0"/>
                 <a:ea typeface="Microsoft YaHei" pitchFamily="34" charset="-122"/>
@@ -15093,7 +15692,7 @@
             <a:r>
               <a:rPr lang="en-US" sz="1250" dirty="0">
                 <a:solidFill>
-                  <a:srgbClr val="64748B"/>
+                  <a:srgbClr val="626A84"/>
                 </a:solidFill>
                 <a:latin typeface="Microsoft YaHei" pitchFamily="34" charset="0"/>
                 <a:ea typeface="Microsoft YaHei" pitchFamily="34" charset="-122"/>
@@ -15113,7 +15712,7 @@
         </p:nvSpPr>
         <p:spPr>
           <a:xfrm>
-            <a:off x="502920" y="6126480"/>
+            <a:off x="502920" y="6016752"/>
             <a:ext cx="11155680" cy="365760"/>
           </a:xfrm>
           <a:prstGeom prst="rect">
@@ -15132,7 +15731,7 @@
             <a:r>
               <a:rPr lang="en-US" sz="1250" b="1" dirty="0">
                 <a:solidFill>
-                  <a:srgbClr val="6366F1"/>
+                  <a:srgbClr val="3F4BD8"/>
                 </a:solidFill>
                 <a:latin typeface="Microsoft YaHei" pitchFamily="34" charset="0"/>
                 <a:ea typeface="Microsoft YaHei" pitchFamily="34" charset="-122"/>
@@ -15171,7 +15770,7 @@
             <a:r>
               <a:rPr lang="en-US" sz="900" dirty="0">
                 <a:solidFill>
-                  <a:srgbClr val="94A3B8"/>
+                  <a:srgbClr val="767D92"/>
                 </a:solidFill>
                 <a:latin typeface="Microsoft YaHei" pitchFamily="34" charset="0"/>
                 <a:ea typeface="Microsoft YaHei" pitchFamily="34" charset="-122"/>
@@ -15210,7 +15809,7 @@
             <a:r>
               <a:rPr lang="en-US" sz="900" dirty="0">
                 <a:solidFill>
-                  <a:srgbClr val="94A3B8"/>
+                  <a:srgbClr val="767D92"/>
                 </a:solidFill>
                 <a:latin typeface="Microsoft YaHei" pitchFamily="34" charset="0"/>
                 <a:ea typeface="Microsoft YaHei" pitchFamily="34" charset="-122"/>
@@ -15236,7 +15835,7 @@
     <p:bg>
       <p:bgPr>
         <a:solidFill>
-          <a:srgbClr val="EEF4FF"/>
+          <a:srgbClr val="F3F1FB"/>
         </a:solidFill>
       </p:bgPr>
     </p:bg>
@@ -15271,13 +15870,13 @@
             </a:avLst>
           </a:prstGeom>
           <a:solidFill>
-            <a:srgbClr val="6366F1"/>
+            <a:srgbClr val="3F4BD8"/>
           </a:solidFill>
           <a:ln/>
           <a:effectLst>
-            <a:outerShdw sx="100000" sy="100000" kx="0" ky="0" algn="bl" rotWithShape="0" blurRad="2.1633849555398568e+169" dist="5.408462388849642e+168" dir="7.218447050975619e+197">
-              <a:srgbClr val="93A8D8">
-                <a:alpha val="2.800000000000001e+204"/>
+            <a:outerShdw sx="100000" sy="100000" kx="0" ky="0" algn="bl" rotWithShape="0" blurRad="3.4893235947902355e+177" dist="8.723308986975589e+176" dir="2.598640938351223e+207">
+              <a:srgbClr val="9C93C8">
+                <a:alpha val="2.3999999999999986e+214"/>
               </a:srgbClr>
             </a:outerShdw>
           </a:effectLst>
@@ -15349,13 +15948,13 @@
             <a:r>
               <a:rPr lang="en-US" sz="2600" b="1" dirty="0">
                 <a:solidFill>
-                  <a:srgbClr val="1E293B"/>
-                </a:solidFill>
-                <a:latin typeface="Microsoft YaHei" pitchFamily="34" charset="0"/>
-                <a:ea typeface="Microsoft YaHei" pitchFamily="34" charset="-122"/>
-                <a:cs typeface="Microsoft YaHei" pitchFamily="34" charset="-120"/>
-              </a:rPr>
-              <a:t>分级演化 · 初/中/高晋升路径</a:t>
+                  <a:srgbClr val="1E2442"/>
+                </a:solidFill>
+                <a:latin typeface="Microsoft YaHei" pitchFamily="34" charset="0"/>
+                <a:ea typeface="Microsoft YaHei" pitchFamily="34" charset="-122"/>
+                <a:cs typeface="Microsoft YaHei" pitchFamily="34" charset="-120"/>
+              </a:rPr>
+              <a:t>分级画像 · 初/中/高晋升路径</a:t>
             </a:r>
             <a:endParaRPr lang="en-US" sz="2600" dirty="0"/>
           </a:p>
@@ -15388,13 +15987,13 @@
             <a:r>
               <a:rPr lang="en-US" sz="1250" dirty="0">
                 <a:solidFill>
-                  <a:srgbClr val="64748B"/>
-                </a:solidFill>
-                <a:latin typeface="Microsoft YaHei" pitchFamily="34" charset="0"/>
-                <a:ea typeface="Microsoft YaHei" pitchFamily="34" charset="-122"/>
-                <a:cs typeface="Microsoft YaHei" pitchFamily="34" charset="-120"/>
-              </a:rPr>
-              <a:t>32 / 32 个岗位建有三档分级画像 · 621 条真实演化记录贯穿 2018→2024→2026 三个切片</a:t>
+                  <a:srgbClr val="626A84"/>
+                </a:solidFill>
+                <a:latin typeface="Microsoft YaHei" pitchFamily="34" charset="0"/>
+                <a:ea typeface="Microsoft YaHei" pitchFamily="34" charset="-122"/>
+                <a:cs typeface="Microsoft YaHei" pitchFamily="34" charset="-120"/>
+              </a:rPr>
+              <a:t>828 行覆盖 27 / 32 岗 · 越界 0 / 828 · 无画像 5 岗：机器人算法、自动驾驶、数字人训练师、提示词、智能硬件</a:t>
             </a:r>
             <a:endParaRPr lang="en-US" sz="1250" dirty="0"/>
           </a:p>
@@ -15427,7 +16026,7 @@
             <a:r>
               <a:rPr lang="en-US" sz="1000" dirty="0">
                 <a:solidFill>
-                  <a:srgbClr val="94A3B8"/>
+                  <a:srgbClr val="767D92"/>
                 </a:solidFill>
                 <a:latin typeface="Microsoft YaHei" pitchFamily="34" charset="0"/>
                 <a:ea typeface="Microsoft YaHei" pitchFamily="34" charset="-122"/>
@@ -15460,14 +16059,14 @@
           </a:solidFill>
           <a:ln w="12700">
             <a:solidFill>
-              <a:srgbClr val="E2E8F0"/>
+              <a:srgbClr val="E2DFF1"/>
             </a:solidFill>
             <a:prstDash val="solid"/>
           </a:ln>
           <a:effectLst>
-            <a:outerShdw sx="100000" sy="100000" kx="0" ky="0" algn="bl" rotWithShape="0" blurRad="2.7474988935356184e+173" dist="6.868747233839046e+172" dir="4.3310682305853715e+202">
-              <a:srgbClr val="93A8D8">
-                <a:alpha val="2.800000000000001e+209"/>
+            <a:outerShdw sx="100000" sy="100000" kx="0" ky="0" algn="bl" rotWithShape="0" blurRad="4.431440965383599e+181" dist="1.1078602413458997e+181" dir="1.5591845630107338e+212">
+              <a:srgbClr val="9C93C8">
+                <a:alpha val="2.3999999999999988e+219"/>
               </a:srgbClr>
             </a:outerShdw>
           </a:effectLst>
@@ -15490,7 +16089,7 @@
             </a:avLst>
           </a:prstGeom>
           <a:solidFill>
-            <a:srgbClr val="0EA5E9"/>
+            <a:srgbClr val="0E7490"/>
           </a:solidFill>
           <a:ln/>
         </p:spPr>
@@ -15543,16 +16142,16 @@
         <p:spPr>
           <a:xfrm>
             <a:off x="731520" y="2304288"/>
-            <a:ext cx="3017520" cy="548640"/>
-          </a:xfrm>
-          <a:prstGeom prst="rect">
-            <a:avLst/>
-          </a:prstGeom>
-          <a:noFill/>
-          <a:ln/>
-        </p:spPr>
-        <p:txBody>
-          <a:bodyPr wrap="square" rtlCol="0" anchor="ctr"/>
+            <a:ext cx="3017520" cy="384048"/>
+          </a:xfrm>
+          <a:prstGeom prst="rect">
+            <a:avLst/>
+          </a:prstGeom>
+          <a:noFill/>
+          <a:ln/>
+        </p:spPr>
+        <p:txBody>
+          <a:bodyPr wrap="square" lIns="0" tIns="0" rIns="0" bIns="0" rtlCol="0" anchor="ctr"/>
           <a:lstStyle/>
           <a:p>
             <a:pPr indent="0" marL="0">
@@ -15561,7 +16160,7 @@
             <a:r>
               <a:rPr lang="en-US" sz="1100" dirty="0">
                 <a:solidFill>
-                  <a:srgbClr val="64748B"/>
+                  <a:srgbClr val="626A84"/>
                 </a:solidFill>
                 <a:latin typeface="Microsoft YaHei" pitchFamily="34" charset="0"/>
                 <a:ea typeface="Microsoft YaHei" pitchFamily="34" charset="-122"/>
@@ -15582,16 +16181,16 @@
         <p:spPr>
           <a:xfrm>
             <a:off x="3931920" y="2057400"/>
-            <a:ext cx="411480" cy="548640"/>
-          </a:xfrm>
-          <a:prstGeom prst="rect">
-            <a:avLst/>
-          </a:prstGeom>
-          <a:noFill/>
-          <a:ln/>
-        </p:spPr>
-        <p:txBody>
-          <a:bodyPr wrap="square" rtlCol="0" anchor="ctr"/>
+            <a:ext cx="411480" cy="365760"/>
+          </a:xfrm>
+          <a:prstGeom prst="rect">
+            <a:avLst/>
+          </a:prstGeom>
+          <a:noFill/>
+          <a:ln/>
+        </p:spPr>
+        <p:txBody>
+          <a:bodyPr wrap="square" lIns="0" tIns="0" rIns="0" bIns="0" rtlCol="0" anchor="ctr"/>
           <a:lstStyle/>
           <a:p>
             <a:pPr algn="ctr" indent="0" marL="0">
@@ -15600,7 +16199,7 @@
             <a:r>
               <a:rPr lang="en-US" sz="1600" dirty="0">
                 <a:solidFill>
-                  <a:srgbClr val="94A3B8"/>
+                  <a:srgbClr val="767D92"/>
                 </a:solidFill>
                 <a:latin typeface="Microsoft YaHei" pitchFamily="34" charset="0"/>
                 <a:ea typeface="Microsoft YaHei" pitchFamily="34" charset="-122"/>
@@ -15620,7 +16219,7 @@
         </p:nvSpPr>
         <p:spPr>
           <a:xfrm>
-            <a:off x="4343400" y="2057400"/>
+            <a:off x="4343400" y="1554480"/>
             <a:ext cx="3429000" cy="1371600"/>
           </a:xfrm>
           <a:prstGeom prst="roundRect">
@@ -15633,14 +16232,14 @@
           </a:solidFill>
           <a:ln w="12700">
             <a:solidFill>
-              <a:srgbClr val="E2E8F0"/>
+              <a:srgbClr val="E2DFF1"/>
             </a:solidFill>
             <a:prstDash val="solid"/>
           </a:ln>
           <a:effectLst>
-            <a:outerShdw sx="100000" sy="100000" kx="0" ky="0" algn="bl" rotWithShape="0" blurRad="3.4893235947902355e+177" dist="8.723308986975589e+176" dir="2.598640938351223e+207">
-              <a:srgbClr val="93A8D8">
-                <a:alpha val="2.8000000000000007e+214"/>
+            <a:outerShdw sx="100000" sy="100000" kx="0" ky="0" algn="bl" rotWithShape="0" blurRad="5.62793002603717e+185" dist="1.4069825065092926e+185" dir="9.355107378064403e+216">
+              <a:srgbClr val="9C93C8">
+                <a:alpha val="2.3999999999999988e+224"/>
               </a:srgbClr>
             </a:outerShdw>
           </a:effectLst>
@@ -15654,7 +16253,7 @@
         </p:nvSpPr>
         <p:spPr>
           <a:xfrm>
-            <a:off x="4572000" y="2286000"/>
+            <a:off x="4572000" y="1783080"/>
             <a:ext cx="1737360" cy="457200"/>
           </a:xfrm>
           <a:prstGeom prst="roundRect">
@@ -15663,7 +16262,7 @@
             </a:avLst>
           </a:prstGeom>
           <a:solidFill>
-            <a:srgbClr val="6366F1"/>
+            <a:srgbClr val="3F4BD8"/>
           </a:solidFill>
           <a:ln/>
         </p:spPr>
@@ -15676,7 +16275,7 @@
         </p:nvSpPr>
         <p:spPr>
           <a:xfrm>
-            <a:off x="4572000" y="2286000"/>
+            <a:off x="4572000" y="1783080"/>
             <a:ext cx="1737360" cy="457200"/>
           </a:xfrm>
           <a:prstGeom prst="rect">
@@ -15715,17 +16314,17 @@
         </p:nvSpPr>
         <p:spPr>
           <a:xfrm>
-            <a:off x="4572000" y="2807208"/>
-            <a:ext cx="3017520" cy="548640"/>
-          </a:xfrm>
-          <a:prstGeom prst="rect">
-            <a:avLst/>
-          </a:prstGeom>
-          <a:noFill/>
-          <a:ln/>
-        </p:spPr>
-        <p:txBody>
-          <a:bodyPr wrap="square" rtlCol="0" anchor="ctr"/>
+            <a:off x="4572000" y="2304288"/>
+            <a:ext cx="3017520" cy="384048"/>
+          </a:xfrm>
+          <a:prstGeom prst="rect">
+            <a:avLst/>
+          </a:prstGeom>
+          <a:noFill/>
+          <a:ln/>
+        </p:spPr>
+        <p:txBody>
+          <a:bodyPr wrap="square" lIns="0" tIns="0" rIns="0" bIns="0" rtlCol="0" anchor="ctr"/>
           <a:lstStyle/>
           <a:p>
             <a:pPr indent="0" marL="0">
@@ -15734,7 +16333,7 @@
             <a:r>
               <a:rPr lang="en-US" sz="1100" dirty="0">
                 <a:solidFill>
-                  <a:srgbClr val="64748B"/>
+                  <a:srgbClr val="626A84"/>
                 </a:solidFill>
                 <a:latin typeface="Microsoft YaHei" pitchFamily="34" charset="0"/>
                 <a:ea typeface="Microsoft YaHei" pitchFamily="34" charset="-122"/>
@@ -15754,17 +16353,17 @@
         </p:nvSpPr>
         <p:spPr>
           <a:xfrm>
-            <a:off x="7772400" y="2560320"/>
-            <a:ext cx="411480" cy="548640"/>
-          </a:xfrm>
-          <a:prstGeom prst="rect">
-            <a:avLst/>
-          </a:prstGeom>
-          <a:noFill/>
-          <a:ln/>
-        </p:spPr>
-        <p:txBody>
-          <a:bodyPr wrap="square" rtlCol="0" anchor="ctr"/>
+            <a:off x="7772400" y="2057400"/>
+            <a:ext cx="411480" cy="365760"/>
+          </a:xfrm>
+          <a:prstGeom prst="rect">
+            <a:avLst/>
+          </a:prstGeom>
+          <a:noFill/>
+          <a:ln/>
+        </p:spPr>
+        <p:txBody>
+          <a:bodyPr wrap="square" lIns="0" tIns="0" rIns="0" bIns="0" rtlCol="0" anchor="ctr"/>
           <a:lstStyle/>
           <a:p>
             <a:pPr algn="ctr" indent="0" marL="0">
@@ -15773,7 +16372,7 @@
             <a:r>
               <a:rPr lang="en-US" sz="1600" dirty="0">
                 <a:solidFill>
-                  <a:srgbClr val="94A3B8"/>
+                  <a:srgbClr val="767D92"/>
                 </a:solidFill>
                 <a:latin typeface="Microsoft YaHei" pitchFamily="34" charset="0"/>
                 <a:ea typeface="Microsoft YaHei" pitchFamily="34" charset="-122"/>
@@ -15793,7 +16392,7 @@
         </p:nvSpPr>
         <p:spPr>
           <a:xfrm>
-            <a:off x="8183880" y="2560320"/>
+            <a:off x="8183880" y="1554480"/>
             <a:ext cx="3429000" cy="1371600"/>
           </a:xfrm>
           <a:prstGeom prst="roundRect">
@@ -15806,14 +16405,14 @@
           </a:solidFill>
           <a:ln w="12700">
             <a:solidFill>
-              <a:srgbClr val="E2E8F0"/>
+              <a:srgbClr val="E2DFF1"/>
             </a:solidFill>
             <a:prstDash val="solid"/>
           </a:ln>
           <a:effectLst>
-            <a:outerShdw sx="100000" sy="100000" kx="0" ky="0" algn="bl" rotWithShape="0" blurRad="4.431440965383599e+181" dist="1.1078602413458997e+181" dir="1.5591845630107338e+212">
-              <a:srgbClr val="93A8D8">
-                <a:alpha val="2.8000000000000008e+219"/>
+            <a:outerShdw sx="100000" sy="100000" kx="0" ky="0" algn="bl" rotWithShape="0" blurRad="7.147471133067207e+189" dist="1.7868677832668018e+189" dir="5.613064426838642e+221">
+              <a:srgbClr val="9C93C8">
+                <a:alpha val="2.3999999999999987e+229"/>
               </a:srgbClr>
             </a:outerShdw>
           </a:effectLst>
@@ -15827,7 +16426,7 @@
         </p:nvSpPr>
         <p:spPr>
           <a:xfrm>
-            <a:off x="8412480" y="2788920"/>
+            <a:off x="8412480" y="1783080"/>
             <a:ext cx="1737360" cy="457200"/>
           </a:xfrm>
           <a:prstGeom prst="roundRect">
@@ -15836,7 +16435,7 @@
             </a:avLst>
           </a:prstGeom>
           <a:solidFill>
-            <a:srgbClr val="A855F7"/>
+            <a:srgbClr val="B02AA8"/>
           </a:solidFill>
           <a:ln/>
         </p:spPr>
@@ -15849,7 +16448,7 @@
         </p:nvSpPr>
         <p:spPr>
           <a:xfrm>
-            <a:off x="8412480" y="2788920"/>
+            <a:off x="8412480" y="1783080"/>
             <a:ext cx="1737360" cy="457200"/>
           </a:xfrm>
           <a:prstGeom prst="rect">
@@ -15888,17 +16487,17 @@
         </p:nvSpPr>
         <p:spPr>
           <a:xfrm>
-            <a:off x="8412480" y="3310128"/>
-            <a:ext cx="3017520" cy="548640"/>
-          </a:xfrm>
-          <a:prstGeom prst="rect">
-            <a:avLst/>
-          </a:prstGeom>
-          <a:noFill/>
-          <a:ln/>
-        </p:spPr>
-        <p:txBody>
-          <a:bodyPr wrap="square" rtlCol="0" anchor="ctr"/>
+            <a:off x="8412480" y="2304288"/>
+            <a:ext cx="3017520" cy="384048"/>
+          </a:xfrm>
+          <a:prstGeom prst="rect">
+            <a:avLst/>
+          </a:prstGeom>
+          <a:noFill/>
+          <a:ln/>
+        </p:spPr>
+        <p:txBody>
+          <a:bodyPr wrap="square" lIns="0" tIns="0" rIns="0" bIns="0" rtlCol="0" anchor="ctr"/>
           <a:lstStyle/>
           <a:p>
             <a:pPr indent="0" marL="0">
@@ -15907,7 +16506,7 @@
             <a:r>
               <a:rPr lang="en-US" sz="1100" dirty="0">
                 <a:solidFill>
-                  <a:srgbClr val="64748B"/>
+                  <a:srgbClr val="626A84"/>
                 </a:solidFill>
                 <a:latin typeface="Microsoft YaHei" pitchFamily="34" charset="0"/>
                 <a:ea typeface="Microsoft YaHei" pitchFamily="34" charset="-122"/>
@@ -15927,12 +16526,12 @@
         </p:nvSpPr>
         <p:spPr>
           <a:xfrm>
-            <a:off x="502920" y="3611880"/>
-            <a:ext cx="11155680" cy="2423160"/>
+            <a:off x="502920" y="3593592"/>
+            <a:ext cx="11155680" cy="2212848"/>
           </a:xfrm>
           <a:prstGeom prst="roundRect">
             <a:avLst>
-              <a:gd name="adj" fmla="val 3774"/>
+              <a:gd name="adj" fmla="val 4132"/>
             </a:avLst>
           </a:prstGeom>
           <a:solidFill>
@@ -15940,14 +16539,14 @@
           </a:solidFill>
           <a:ln w="12700">
             <a:solidFill>
-              <a:srgbClr val="E2E8F0"/>
+              <a:srgbClr val="E2DFF1"/>
             </a:solidFill>
             <a:prstDash val="solid"/>
           </a:ln>
           <a:effectLst>
-            <a:outerShdw sx="100000" sy="100000" kx="0" ky="0" algn="bl" rotWithShape="0" blurRad="5.62793002603717e+185" dist="1.4069825065092926e+185" dir="9.355107378064403e+216">
-              <a:srgbClr val="93A8D8">
-                <a:alpha val="2.800000000000001e+224"/>
+            <a:outerShdw sx="100000" sy="100000" kx="0" ky="0" algn="bl" rotWithShape="0" blurRad="9.077288338995353e+193" dist="2.2693220847488382e+193" dir="3.367838656103185e+226">
+              <a:srgbClr val="9C93C8">
+                <a:alpha val="2.3999999999999987e+234"/>
               </a:srgbClr>
             </a:outerShdw>
           </a:effectLst>
@@ -15961,7 +16560,7 @@
         </p:nvSpPr>
         <p:spPr>
           <a:xfrm>
-            <a:off x="777240" y="3794760"/>
+            <a:off x="777240" y="3776472"/>
             <a:ext cx="10607040" cy="365760"/>
           </a:xfrm>
           <a:prstGeom prst="rect">
@@ -15980,7 +16579,7 @@
             <a:r>
               <a:rPr lang="en-US" sz="1400" b="1" dirty="0">
                 <a:solidFill>
-                  <a:srgbClr val="6366F1"/>
+                  <a:srgbClr val="3F4BD8"/>
                 </a:solidFill>
                 <a:latin typeface="Microsoft YaHei" pitchFamily="34" charset="0"/>
                 <a:ea typeface="Microsoft YaHei" pitchFamily="34" charset="-122"/>
@@ -16000,104 +16599,104 @@
         </p:nvSpPr>
         <p:spPr>
           <a:xfrm>
-            <a:off x="777240" y="4251960"/>
-            <a:ext cx="10607040" cy="1691640"/>
-          </a:xfrm>
-          <a:prstGeom prst="rect">
-            <a:avLst/>
-          </a:prstGeom>
-          <a:noFill/>
-          <a:ln/>
-        </p:spPr>
-        <p:txBody>
-          <a:bodyPr wrap="square" rtlCol="0" anchor="ctr"/>
+            <a:off x="777240" y="4233672"/>
+            <a:ext cx="10607040" cy="1481328"/>
+          </a:xfrm>
+          <a:prstGeom prst="rect">
+            <a:avLst/>
+          </a:prstGeom>
+          <a:noFill/>
+          <a:ln/>
+        </p:spPr>
+        <p:txBody>
+          <a:bodyPr wrap="square" rtlCol="0" anchor="t"/>
           <a:lstStyle/>
           <a:p>
             <a:pPr indent="0" marL="0">
               <a:lnSpc>
-                <a:spcPct val="115000"/>
+                <a:spcPct val="130000"/>
               </a:lnSpc>
               <a:spcAft>
-                <a:spcPts val="600"/>
+                <a:spcPts val="900"/>
               </a:spcAft>
               <a:buNone/>
             </a:pPr>
             <a:r>
               <a:rPr lang="en-US" sz="1250" b="1" dirty="0">
                 <a:solidFill>
-                  <a:srgbClr val="1E293B"/>
-                </a:solidFill>
-                <a:latin typeface="Microsoft YaHei" pitchFamily="34" charset="0"/>
-                <a:ea typeface="Microsoft YaHei" pitchFamily="34" charset="-122"/>
-                <a:cs typeface="Microsoft YaHei" pitchFamily="34" charset="-120"/>
-              </a:rPr>
-              <a:t>🟢 晋升需新增掌握：云原生 等 8 条能力项</a:t>
+                  <a:srgbClr val="1E2442"/>
+                </a:solidFill>
+                <a:latin typeface="Microsoft YaHei" pitchFamily="34" charset="0"/>
+                <a:ea typeface="Microsoft YaHei" pitchFamily="34" charset="-122"/>
+                <a:cs typeface="Microsoft YaHei" pitchFamily="34" charset="-120"/>
+              </a:rPr>
+              <a:t>新增掌握：对比相邻等级画像，列出晋升需补齐的 active 能力</a:t>
             </a:r>
             <a:endParaRPr lang="en-US" sz="1250" dirty="0"/>
           </a:p>
           <a:p>
             <a:pPr indent="0" marL="0">
               <a:lnSpc>
-                <a:spcPct val="115000"/>
+                <a:spcPct val="130000"/>
               </a:lnSpc>
               <a:spcAft>
-                <a:spcPts val="600"/>
+                <a:spcPts val="900"/>
               </a:spcAft>
               <a:buNone/>
             </a:pPr>
             <a:r>
               <a:rPr lang="en-US" sz="1250" dirty="0">
                 <a:solidFill>
-                  <a:srgbClr val="64748B"/>
-                </a:solidFill>
-                <a:latin typeface="Microsoft YaHei" pitchFamily="34" charset="0"/>
-                <a:ea typeface="Microsoft YaHei" pitchFamily="34" charset="-122"/>
-                <a:cs typeface="Microsoft YaHei" pitchFamily="34" charset="-120"/>
-              </a:rPr>
-              <a:t>🟡 晋升要求强化：核心技能权重显著上调（如 45% → 72%）</a:t>
+                  <a:srgbClr val="626A84"/>
+                </a:solidFill>
+                <a:latin typeface="Microsoft YaHei" pitchFamily="34" charset="0"/>
+                <a:ea typeface="Microsoft YaHei" pitchFamily="34" charset="-122"/>
+                <a:cs typeface="Microsoft YaHei" pitchFamily="34" charset="-120"/>
+              </a:rPr>
+              <a:t>要求强化：同一能力在目标等级中的权重上调，形成优先级</a:t>
             </a:r>
             <a:endParaRPr lang="en-US" sz="1250" dirty="0"/>
           </a:p>
           <a:p>
             <a:pPr indent="0" marL="0">
               <a:lnSpc>
-                <a:spcPct val="115000"/>
+                <a:spcPct val="130000"/>
               </a:lnSpc>
               <a:spcAft>
-                <a:spcPts val="600"/>
+                <a:spcPts val="900"/>
               </a:spcAft>
               <a:buNone/>
             </a:pPr>
             <a:r>
               <a:rPr lang="en-US" sz="1250" dirty="0">
                 <a:solidFill>
-                  <a:srgbClr val="64748B"/>
-                </a:solidFill>
-                <a:latin typeface="Microsoft YaHei" pitchFamily="34" charset="0"/>
-                <a:ea typeface="Microsoft YaHei" pitchFamily="34" charset="-122"/>
-                <a:cs typeface="Microsoft YaHei" pitchFamily="34" charset="-120"/>
-              </a:rPr>
-              <a:t>⚪ 部分基础技能在高级 JD 中不再单列 —— 视为默认前提</a:t>
+                  <a:srgbClr val="626A84"/>
+                </a:solidFill>
+                <a:latin typeface="Microsoft YaHei" pitchFamily="34" charset="0"/>
+                <a:ea typeface="Microsoft YaHei" pitchFamily="34" charset="-122"/>
+                <a:cs typeface="Microsoft YaHei" pitchFamily="34" charset="-120"/>
+              </a:rPr>
+              <a:t>默认前提：部分基础能力在高级 JD 中不再单列，但不误判为删除</a:t>
             </a:r>
             <a:endParaRPr lang="en-US" sz="1250" dirty="0"/>
           </a:p>
           <a:p>
             <a:pPr indent="0" marL="0">
               <a:lnSpc>
-                <a:spcPct val="115000"/>
+                <a:spcPct val="130000"/>
               </a:lnSpc>
               <a:buNone/>
             </a:pPr>
             <a:r>
               <a:rPr lang="en-US" sz="1100" dirty="0">
                 <a:solidFill>
-                  <a:srgbClr val="94A3B8"/>
-                </a:solidFill>
-                <a:latin typeface="Microsoft YaHei" pitchFamily="34" charset="0"/>
-                <a:ea typeface="Microsoft YaHei" pitchFamily="34" charset="-122"/>
-                <a:cs typeface="Microsoft YaHei" pitchFamily="34" charset="-120"/>
-              </a:rPr>
-              <a:t>级别由真实 JD 标题关键词 + 经验年限自动推断分桶，每档 ≥3 条 JD 才产出画像，前端以「初级→中级→高级」阶梯视图展示</a:t>
+                  <a:srgbClr val="626A84"/>
+                </a:solidFill>
+                <a:latin typeface="Microsoft YaHei" pitchFamily="34" charset="0"/>
+                <a:ea typeface="Microsoft YaHei" pitchFamily="34" charset="-122"/>
+                <a:cs typeface="Microsoft YaHei" pitchFamily="34" charset="-120"/>
+              </a:rPr>
+              <a:t>画像写入严格与岗位 active 能力集相交，当前 828 / 828 均在边界内；真实分桶不达门槛的 5 岗不生成画像、不以旧切片填充。</a:t>
             </a:r>
             <a:endParaRPr lang="en-US" sz="1250" dirty="0"/>
           </a:p>
@@ -16130,7 +16729,7 @@
             <a:r>
               <a:rPr lang="en-US" sz="900" dirty="0">
                 <a:solidFill>
-                  <a:srgbClr val="94A3B8"/>
+                  <a:srgbClr val="767D92"/>
                 </a:solidFill>
                 <a:latin typeface="Microsoft YaHei" pitchFamily="34" charset="0"/>
                 <a:ea typeface="Microsoft YaHei" pitchFamily="34" charset="-122"/>
@@ -16169,7 +16768,7 @@
             <a:r>
               <a:rPr lang="en-US" sz="900" dirty="0">
                 <a:solidFill>
-                  <a:srgbClr val="94A3B8"/>
+                  <a:srgbClr val="767D92"/>
                 </a:solidFill>
                 <a:latin typeface="Microsoft YaHei" pitchFamily="34" charset="0"/>
                 <a:ea typeface="Microsoft YaHei" pitchFamily="34" charset="-122"/>
@@ -16195,7 +16794,7 @@
     <p:bg>
       <p:bgPr>
         <a:solidFill>
-          <a:srgbClr val="EEF4FF"/>
+          <a:srgbClr val="F3F1FB"/>
         </a:solidFill>
       </p:bgPr>
     </p:bg>
@@ -16230,13 +16829,13 @@
             </a:avLst>
           </a:prstGeom>
           <a:solidFill>
-            <a:srgbClr val="6366F1"/>
+            <a:srgbClr val="3F4BD8"/>
           </a:solidFill>
           <a:ln/>
           <a:effectLst>
-            <a:outerShdw sx="100000" sy="100000" kx="0" ky="0" algn="bl" rotWithShape="0" blurRad="7.147471133067207e+189" dist="1.7868677832668018e+189" dir="5.613064426838642e+221">
-              <a:srgbClr val="93A8D8">
-                <a:alpha val="2.800000000000001e+229"/>
+            <a:outerShdw sx="100000" sy="100000" kx="0" ky="0" algn="bl" rotWithShape="0" blurRad="1.1528156190524098e+198" dist="2.8820390476310245e+197" dir="2.020703193661911e+231">
+              <a:srgbClr val="9C93C8">
+                <a:alpha val="2.3999999999999985e+239"/>
               </a:srgbClr>
             </a:outerShdw>
           </a:effectLst>
@@ -16308,7 +16907,7 @@
             <a:r>
               <a:rPr lang="en-US" sz="2600" b="1" dirty="0">
                 <a:solidFill>
-                  <a:srgbClr val="1E293B"/>
+                  <a:srgbClr val="1E2442"/>
                 </a:solidFill>
                 <a:latin typeface="Microsoft YaHei" pitchFamily="34" charset="0"/>
                 <a:ea typeface="Microsoft YaHei" pitchFamily="34" charset="-122"/>
@@ -16347,7 +16946,7 @@
             <a:r>
               <a:rPr lang="en-US" sz="1250" dirty="0">
                 <a:solidFill>
-                  <a:srgbClr val="64748B"/>
+                  <a:srgbClr val="626A84"/>
                 </a:solidFill>
                 <a:latin typeface="Microsoft YaHei" pitchFamily="34" charset="0"/>
                 <a:ea typeface="Microsoft YaHei" pitchFamily="34" charset="-122"/>
@@ -16386,7 +16985,7 @@
             <a:r>
               <a:rPr lang="en-US" sz="1000" dirty="0">
                 <a:solidFill>
-                  <a:srgbClr val="94A3B8"/>
+                  <a:srgbClr val="767D92"/>
                 </a:solidFill>
                 <a:latin typeface="Microsoft YaHei" pitchFamily="34" charset="0"/>
                 <a:ea typeface="Microsoft YaHei" pitchFamily="34" charset="-122"/>
@@ -16419,14 +17018,14 @@
           </a:solidFill>
           <a:ln w="12700">
             <a:solidFill>
-              <a:srgbClr val="E2E8F0"/>
+              <a:srgbClr val="E2DFF1"/>
             </a:solidFill>
             <a:prstDash val="solid"/>
           </a:ln>
           <a:effectLst>
-            <a:outerShdw sx="100000" sy="100000" kx="0" ky="0" algn="bl" rotWithShape="0" blurRad="9.077288338995353e+193" dist="2.2693220847488382e+193" dir="3.367838656103185e+226">
-              <a:srgbClr val="93A8D8">
-                <a:alpha val="2.800000000000001e+234"/>
+            <a:outerShdw sx="100000" sy="100000" kx="0" ky="0" algn="bl" rotWithShape="0" blurRad="1.4640758361965605e+202" dist="3.6601895904914013e+201" dir="1.2124219161971466e+236">
+              <a:srgbClr val="9C93C8">
+                <a:alpha val="2.3999999999999984e+244"/>
               </a:srgbClr>
             </a:outerShdw>
           </a:effectLst>
@@ -16434,7 +17033,7 @@
       </p:sp>
       <p:pic>
         <p:nvPicPr>
-          <p:cNvPr id="8" name="Image 0" descr="03_人岗匹配诊断.jpeg">    </p:cNvPr>
+          <p:cNvPr id="8" name="Image 0" descr="C:\Users\32768\Desktop\project\挑战杯\talent-graph-system\docs\截图\03_人岗匹配诊断.jpeg">    </p:cNvPr>
           <p:cNvPicPr>
             <a:picLocks noChangeAspect="1"/>
           </p:cNvPicPr>
@@ -16476,14 +17075,14 @@
           </a:solidFill>
           <a:ln w="12700">
             <a:solidFill>
-              <a:srgbClr val="E2E8F0"/>
+              <a:srgbClr val="E2DFF1"/>
             </a:solidFill>
             <a:prstDash val="solid"/>
           </a:ln>
           <a:effectLst>
-            <a:outerShdw sx="100000" sy="100000" kx="0" ky="0" algn="bl" rotWithShape="0" blurRad="1.1528156190524098e+198" dist="2.8820390476310245e+197" dir="2.020703193661911e+231">
-              <a:srgbClr val="93A8D8">
-                <a:alpha val="2.800000000000001e+239"/>
+            <a:outerShdw sx="100000" sy="100000" kx="0" ky="0" algn="bl" rotWithShape="0" blurRad="1.8593763119696318e+206" dist="4.648440779924079e+205" dir="7.27453149718288e+240">
+              <a:srgbClr val="9C93C8">
+                <a:alpha val="2.3999999999999982e+249"/>
               </a:srgbClr>
             </a:outerShdw>
           </a:effectLst>
@@ -16516,7 +17115,7 @@
             <a:r>
               <a:rPr lang="en-US" sz="1350" b="1" dirty="0">
                 <a:solidFill>
-                  <a:srgbClr val="6366F1"/>
+                  <a:srgbClr val="3F4BD8"/>
                 </a:solidFill>
                 <a:latin typeface="Microsoft YaHei" pitchFamily="34" charset="0"/>
                 <a:ea typeface="Microsoft YaHei" pitchFamily="34" charset="-122"/>
@@ -16555,7 +17154,7 @@
             <a:r>
               <a:rPr lang="en-US" sz="1050" dirty="0">
                 <a:solidFill>
-                  <a:srgbClr val="64748B"/>
+                  <a:srgbClr val="626A84"/>
                 </a:solidFill>
                 <a:latin typeface="Microsoft YaHei" pitchFamily="34" charset="0"/>
                 <a:ea typeface="Microsoft YaHei" pitchFamily="34" charset="-122"/>
@@ -16588,14 +17187,14 @@
           </a:solidFill>
           <a:ln w="12700">
             <a:solidFill>
-              <a:srgbClr val="E2E8F0"/>
+              <a:srgbClr val="E2DFF1"/>
             </a:solidFill>
             <a:prstDash val="solid"/>
           </a:ln>
           <a:effectLst>
-            <a:outerShdw sx="100000" sy="100000" kx="0" ky="0" algn="bl" rotWithShape="0" blurRad="1.4640758361965605e+202" dist="3.6601895904914013e+201" dir="1.2124219161971466e+236">
-              <a:srgbClr val="93A8D8">
-                <a:alpha val="2.800000000000001e+244"/>
+            <a:outerShdw sx="100000" sy="100000" kx="0" ky="0" algn="bl" rotWithShape="0" blurRad="2.3614079162014322e+210" dist="5.9035197905035806e+209" dir="4.364718898309728e+245">
+              <a:srgbClr val="9C93C8">
+                <a:alpha val="2.3999999999999983e+254"/>
               </a:srgbClr>
             </a:outerShdw>
           </a:effectLst>
@@ -16628,7 +17227,7 @@
             <a:r>
               <a:rPr lang="en-US" sz="1350" b="1" dirty="0">
                 <a:solidFill>
-                  <a:srgbClr val="6366F1"/>
+                  <a:srgbClr val="3F4BD8"/>
                 </a:solidFill>
                 <a:latin typeface="Microsoft YaHei" pitchFamily="34" charset="0"/>
                 <a:ea typeface="Microsoft YaHei" pitchFamily="34" charset="-122"/>
@@ -16667,7 +17266,7 @@
             <a:r>
               <a:rPr lang="en-US" sz="1050" dirty="0">
                 <a:solidFill>
-                  <a:srgbClr val="64748B"/>
+                  <a:srgbClr val="626A84"/>
                 </a:solidFill>
                 <a:latin typeface="Microsoft YaHei" pitchFamily="34" charset="0"/>
                 <a:ea typeface="Microsoft YaHei" pitchFamily="34" charset="-122"/>
@@ -16700,14 +17299,14 @@
           </a:solidFill>
           <a:ln w="12700">
             <a:solidFill>
-              <a:srgbClr val="E2E8F0"/>
+              <a:srgbClr val="E2DFF1"/>
             </a:solidFill>
             <a:prstDash val="solid"/>
           </a:ln>
           <a:effectLst>
-            <a:outerShdw sx="100000" sy="100000" kx="0" ky="0" algn="bl" rotWithShape="0" blurRad="1.8593763119696318e+206" dist="4.648440779924079e+205" dir="7.27453149718288e+240">
-              <a:srgbClr val="93A8D8">
-                <a:alpha val="2.800000000000001e+249"/>
+            <a:outerShdw sx="100000" sy="100000" kx="0" ky="0" algn="bl" rotWithShape="0" blurRad="2.9989880535758187e+214" dist="7.497470133939547e+213" dir="2.6188313389858368e+250">
+              <a:srgbClr val="9C93C8">
+                <a:alpha val="2.3999999999999983e+259"/>
               </a:srgbClr>
             </a:outerShdw>
           </a:effectLst>
@@ -16740,7 +17339,7 @@
             <a:r>
               <a:rPr lang="en-US" sz="1350" b="1" dirty="0">
                 <a:solidFill>
-                  <a:srgbClr val="6366F1"/>
+                  <a:srgbClr val="3F4BD8"/>
                 </a:solidFill>
                 <a:latin typeface="Microsoft YaHei" pitchFamily="34" charset="0"/>
                 <a:ea typeface="Microsoft YaHei" pitchFamily="34" charset="-122"/>
@@ -16779,7 +17378,7 @@
             <a:r>
               <a:rPr lang="en-US" sz="1050" dirty="0">
                 <a:solidFill>
-                  <a:srgbClr val="64748B"/>
+                  <a:srgbClr val="626A84"/>
                 </a:solidFill>
                 <a:latin typeface="Microsoft YaHei" pitchFamily="34" charset="0"/>
                 <a:ea typeface="Microsoft YaHei" pitchFamily="34" charset="-122"/>
@@ -16812,14 +17411,14 @@
           </a:solidFill>
           <a:ln w="12700">
             <a:solidFill>
-              <a:srgbClr val="E2E8F0"/>
+              <a:srgbClr val="E2DFF1"/>
             </a:solidFill>
             <a:prstDash val="solid"/>
           </a:ln>
           <a:effectLst>
-            <a:outerShdw sx="100000" sy="100000" kx="0" ky="0" algn="bl" rotWithShape="0" blurRad="2.3614079162014322e+210" dist="5.9035197905035806e+209" dir="4.364718898309728e+245">
-              <a:srgbClr val="93A8D8">
-                <a:alpha val="2.800000000000001e+254"/>
+            <a:outerShdw sx="100000" sy="100000" kx="0" ky="0" algn="bl" rotWithShape="0" blurRad="3.80871482804129e+218" dist="9.521787070103225e+217" dir="1.571298803391502e+255">
+              <a:srgbClr val="9C93C8">
+                <a:alpha val="2.399999999999998e+264"/>
               </a:srgbClr>
             </a:outerShdw>
           </a:effectLst>
@@ -16852,7 +17451,7 @@
             <a:r>
               <a:rPr lang="en-US" sz="1350" b="1" dirty="0">
                 <a:solidFill>
-                  <a:srgbClr val="6366F1"/>
+                  <a:srgbClr val="3F4BD8"/>
                 </a:solidFill>
                 <a:latin typeface="Microsoft YaHei" pitchFamily="34" charset="0"/>
                 <a:ea typeface="Microsoft YaHei" pitchFamily="34" charset="-122"/>
@@ -16891,7 +17490,7 @@
             <a:r>
               <a:rPr lang="en-US" sz="1050" dirty="0">
                 <a:solidFill>
-                  <a:srgbClr val="64748B"/>
+                  <a:srgbClr val="626A84"/>
                 </a:solidFill>
                 <a:latin typeface="Microsoft YaHei" pitchFamily="34" charset="0"/>
                 <a:ea typeface="Microsoft YaHei" pitchFamily="34" charset="-122"/>
@@ -16924,14 +17523,14 @@
           </a:solidFill>
           <a:ln w="12700">
             <a:solidFill>
-              <a:srgbClr val="E2E8F0"/>
+              <a:srgbClr val="E2DFF1"/>
             </a:solidFill>
             <a:prstDash val="solid"/>
           </a:ln>
           <a:effectLst>
-            <a:outerShdw sx="100000" sy="100000" kx="0" ky="0" algn="bl" rotWithShape="0" blurRad="2.9989880535758187e+214" dist="7.497470133939547e+213" dir="2.6188313389858368e+250">
-              <a:srgbClr val="93A8D8">
-                <a:alpha val="2.8000000000000008e+259"/>
+            <a:outerShdw sx="100000" sy="100000" kx="0" ky="0" algn="bl" rotWithShape="0" blurRad="4.8370678316124384e+222" dist="1.2092669579031096e+222" dir="9.427792820349012e+259">
+              <a:srgbClr val="9C93C8">
+                <a:alpha val="2.3999999999999982e+269"/>
               </a:srgbClr>
             </a:outerShdw>
           </a:effectLst>
@@ -16964,7 +17563,7 @@
             <a:r>
               <a:rPr lang="en-US" sz="1350" b="1" dirty="0">
                 <a:solidFill>
-                  <a:srgbClr val="6366F1"/>
+                  <a:srgbClr val="3F4BD8"/>
                 </a:solidFill>
                 <a:latin typeface="Microsoft YaHei" pitchFamily="34" charset="0"/>
                 <a:ea typeface="Microsoft YaHei" pitchFamily="34" charset="-122"/>
@@ -17003,7 +17602,7 @@
             <a:r>
               <a:rPr lang="en-US" sz="1050" dirty="0">
                 <a:solidFill>
-                  <a:srgbClr val="64748B"/>
+                  <a:srgbClr val="626A84"/>
                 </a:solidFill>
                 <a:latin typeface="Microsoft YaHei" pitchFamily="34" charset="0"/>
                 <a:ea typeface="Microsoft YaHei" pitchFamily="34" charset="-122"/>
@@ -17042,7 +17641,7 @@
             <a:r>
               <a:rPr lang="en-US" sz="900" dirty="0">
                 <a:solidFill>
-                  <a:srgbClr val="94A3B8"/>
+                  <a:srgbClr val="767D92"/>
                 </a:solidFill>
                 <a:latin typeface="Microsoft YaHei" pitchFamily="34" charset="0"/>
                 <a:ea typeface="Microsoft YaHei" pitchFamily="34" charset="-122"/>
@@ -17081,7 +17680,7 @@
             <a:r>
               <a:rPr lang="en-US" sz="900" dirty="0">
                 <a:solidFill>
-                  <a:srgbClr val="94A3B8"/>
+                  <a:srgbClr val="767D92"/>
                 </a:solidFill>
                 <a:latin typeface="Microsoft YaHei" pitchFamily="34" charset="0"/>
                 <a:ea typeface="Microsoft YaHei" pitchFamily="34" charset="-122"/>
